--- a/docs/figures/pptx/continuous-curation-loop.pptx
+++ b/docs/figures/pptx/continuous-curation-loop.pptx
@@ -5,13 +5,15 @@
     <p:sldMasterId id="2147483660" r:id="rId1"/>
   </p:sldMasterIdLst>
   <p:notesMasterIdLst>
-    <p:notesMasterId r:id="rId6"/>
+    <p:notesMasterId r:id="rId8"/>
   </p:notesMasterIdLst>
   <p:sldIdLst>
     <p:sldId id="283" r:id="rId2"/>
-    <p:sldId id="282" r:id="rId3"/>
-    <p:sldId id="284" r:id="rId4"/>
-    <p:sldId id="285" r:id="rId5"/>
+    <p:sldId id="286" r:id="rId3"/>
+    <p:sldId id="282" r:id="rId4"/>
+    <p:sldId id="284" r:id="rId5"/>
+    <p:sldId id="285" r:id="rId6"/>
+    <p:sldId id="277" r:id="rId7"/>
   </p:sldIdLst>
   <p:sldSz cx="7772400" cy="10058400"/>
   <p:notesSz cx="6858000" cy="9144000"/>
@@ -200,7 +202,7 @@
           <a:p>
             <a:fld id="{50F1E524-6E79-CF4B-9E85-0A88F03DEB7C}" type="datetimeFigureOut">
               <a:rPr lang="en-US" smtClean="0"/>
-              <a:t>9/20/26</a:t>
+              <a:t>10/23/26</a:t>
             </a:fld>
             <a:endParaRPr lang="en-US"/>
           </a:p>
@@ -542,6 +544,174 @@
     <p:extLst>
       <p:ext uri="{BB962C8B-B14F-4D97-AF65-F5344CB8AC3E}">
         <p14:creationId xmlns:p14="http://schemas.microsoft.com/office/powerpoint/2010/main" val="3796059907"/>
+      </p:ext>
+    </p:extLst>
+  </p:cSld>
+  <p:clrMapOvr>
+    <a:masterClrMapping/>
+  </p:clrMapOvr>
+</p:notes>
+</file>
+
+<file path=ppt/notesSlides/notesSlide2.xml><?xml version="1.0" encoding="utf-8"?>
+<p:notes xmlns:a="http://schemas.openxmlformats.org/drawingml/2006/main" xmlns:r="http://schemas.openxmlformats.org/officeDocument/2006/relationships" xmlns:p="http://schemas.openxmlformats.org/presentationml/2006/main">
+  <p:cSld>
+    <p:spTree>
+      <p:nvGrpSpPr>
+        <p:cNvPr id="1" name=""/>
+        <p:cNvGrpSpPr/>
+        <p:nvPr/>
+      </p:nvGrpSpPr>
+      <p:grpSpPr>
+        <a:xfrm>
+          <a:off x="0" y="0"/>
+          <a:ext cx="0" cy="0"/>
+          <a:chOff x="0" y="0"/>
+          <a:chExt cx="0" cy="0"/>
+        </a:xfrm>
+      </p:grpSpPr>
+      <p:sp>
+        <p:nvSpPr>
+          <p:cNvPr id="2" name="Slide Image Placeholder 1"/>
+          <p:cNvSpPr>
+            <a:spLocks noGrp="1" noRot="1" noChangeAspect="1"/>
+          </p:cNvSpPr>
+          <p:nvPr>
+            <p:ph type="sldImg"/>
+          </p:nvPr>
+        </p:nvSpPr>
+        <p:spPr/>
+      </p:sp>
+      <p:sp>
+        <p:nvSpPr>
+          <p:cNvPr id="3" name="Notes Placeholder 2"/>
+          <p:cNvSpPr>
+            <a:spLocks noGrp="1"/>
+          </p:cNvSpPr>
+          <p:nvPr>
+            <p:ph type="body" idx="1"/>
+          </p:nvPr>
+        </p:nvSpPr>
+        <p:spPr/>
+        <p:txBody>
+          <a:bodyPr/>
+          <a:lstStyle/>
+          <a:p>
+            <a:endParaRPr lang="en-US"/>
+          </a:p>
+        </p:txBody>
+      </p:sp>
+      <p:sp>
+        <p:nvSpPr>
+          <p:cNvPr id="4" name="Slide Number Placeholder 3"/>
+          <p:cNvSpPr>
+            <a:spLocks noGrp="1"/>
+          </p:cNvSpPr>
+          <p:nvPr>
+            <p:ph type="sldNum" sz="quarter" idx="5"/>
+          </p:nvPr>
+        </p:nvSpPr>
+        <p:spPr/>
+        <p:txBody>
+          <a:bodyPr/>
+          <a:lstStyle/>
+          <a:p>
+            <a:fld id="{C1D44131-5ABB-A944-8E26-DE05003D1682}" type="slidenum">
+              <a:rPr lang="en-US" smtClean="0"/>
+              <a:t>3</a:t>
+            </a:fld>
+            <a:endParaRPr lang="en-US"/>
+          </a:p>
+        </p:txBody>
+      </p:sp>
+    </p:spTree>
+    <p:extLst>
+      <p:ext uri="{BB962C8B-B14F-4D97-AF65-F5344CB8AC3E}">
+        <p14:creationId xmlns:p14="http://schemas.microsoft.com/office/powerpoint/2010/main" val="3796059907"/>
+      </p:ext>
+    </p:extLst>
+  </p:cSld>
+  <p:clrMapOvr>
+    <a:masterClrMapping/>
+  </p:clrMapOvr>
+</p:notes>
+</file>
+
+<file path=ppt/notesSlides/notesSlide3.xml><?xml version="1.0" encoding="utf-8"?>
+<p:notes xmlns:a="http://schemas.openxmlformats.org/drawingml/2006/main" xmlns:r="http://schemas.openxmlformats.org/officeDocument/2006/relationships" xmlns:p="http://schemas.openxmlformats.org/presentationml/2006/main">
+  <p:cSld>
+    <p:spTree>
+      <p:nvGrpSpPr>
+        <p:cNvPr id="1" name=""/>
+        <p:cNvGrpSpPr/>
+        <p:nvPr/>
+      </p:nvGrpSpPr>
+      <p:grpSpPr>
+        <a:xfrm>
+          <a:off x="0" y="0"/>
+          <a:ext cx="0" cy="0"/>
+          <a:chOff x="0" y="0"/>
+          <a:chExt cx="0" cy="0"/>
+        </a:xfrm>
+      </p:grpSpPr>
+      <p:sp>
+        <p:nvSpPr>
+          <p:cNvPr id="2" name="Slide Image Placeholder 1"/>
+          <p:cNvSpPr>
+            <a:spLocks noGrp="1" noRot="1" noChangeAspect="1"/>
+          </p:cNvSpPr>
+          <p:nvPr>
+            <p:ph type="sldImg"/>
+          </p:nvPr>
+        </p:nvSpPr>
+        <p:spPr/>
+      </p:sp>
+      <p:sp>
+        <p:nvSpPr>
+          <p:cNvPr id="3" name="Notes Placeholder 2"/>
+          <p:cNvSpPr>
+            <a:spLocks noGrp="1"/>
+          </p:cNvSpPr>
+          <p:nvPr>
+            <p:ph type="body" idx="1"/>
+          </p:nvPr>
+        </p:nvSpPr>
+        <p:spPr/>
+        <p:txBody>
+          <a:bodyPr/>
+          <a:lstStyle/>
+          <a:p>
+            <a:endParaRPr lang="en-US"/>
+          </a:p>
+        </p:txBody>
+      </p:sp>
+      <p:sp>
+        <p:nvSpPr>
+          <p:cNvPr id="4" name="Slide Number Placeholder 3"/>
+          <p:cNvSpPr>
+            <a:spLocks noGrp="1"/>
+          </p:cNvSpPr>
+          <p:nvPr>
+            <p:ph type="sldNum" sz="quarter" idx="5"/>
+          </p:nvPr>
+        </p:nvSpPr>
+        <p:spPr/>
+        <p:txBody>
+          <a:bodyPr/>
+          <a:lstStyle/>
+          <a:p>
+            <a:fld id="{BC052F9E-F4B0-EF49-A3AC-2E72F3287889}" type="slidenum">
+              <a:rPr lang="en-US" smtClean="0"/>
+              <a:t>6</a:t>
+            </a:fld>
+            <a:endParaRPr lang="en-US"/>
+          </a:p>
+        </p:txBody>
+      </p:sp>
+    </p:spTree>
+    <p:extLst>
+      <p:ext uri="{BB962C8B-B14F-4D97-AF65-F5344CB8AC3E}">
+        <p14:creationId xmlns:p14="http://schemas.microsoft.com/office/powerpoint/2010/main" val="251107438"/>
       </p:ext>
     </p:extLst>
   </p:cSld>
@@ -2084,7 +2254,7 @@
           <a:p>
             <a:fld id="{F10855C1-EDC8-3D45-8F6E-152AA6BBBAFA}" type="datetimeFigureOut">
               <a:rPr lang="en-US" smtClean="0"/>
-              <a:t>9/20/26</a:t>
+              <a:t>10/23/26</a:t>
             </a:fld>
             <a:endParaRPr lang="en-US"/>
           </a:p>
@@ -7506,6 +7676,4958 @@
       </p:grpSpPr>
       <p:sp>
         <p:nvSpPr>
+          <p:cNvPr id="4" name="Freeform 3">
+            <a:extLst>
+              <a:ext uri="{FF2B5EF4-FFF2-40B4-BE49-F238E27FC236}">
+                <a16:creationId xmlns:a16="http://schemas.microsoft.com/office/drawing/2014/main" id="{D1864C72-06B8-BFCC-607A-780724760CAD}"/>
+              </a:ext>
+            </a:extLst>
+          </p:cNvPr>
+          <p:cNvSpPr/>
+          <p:nvPr/>
+        </p:nvSpPr>
+        <p:spPr>
+          <a:xfrm rot="16200000">
+            <a:off x="2414655" y="1279542"/>
+            <a:ext cx="156098" cy="1188720"/>
+          </a:xfrm>
+          <a:custGeom>
+            <a:avLst/>
+            <a:gdLst>
+              <a:gd name="csX0" fmla="*/ 0 w 521208"/>
+              <a:gd name="csY0" fmla="*/ 0 h 2785946"/>
+              <a:gd name="csX1" fmla="*/ 12734 w 521208"/>
+              <a:gd name="csY1" fmla="*/ 0 h 2785946"/>
+              <a:gd name="csX2" fmla="*/ 260604 w 521208"/>
+              <a:gd name="csY2" fmla="*/ 261057 h 2785946"/>
+              <a:gd name="csX3" fmla="*/ 508474 w 521208"/>
+              <a:gd name="csY3" fmla="*/ 0 h 2785946"/>
+              <a:gd name="csX4" fmla="*/ 521208 w 521208"/>
+              <a:gd name="csY4" fmla="*/ 0 h 2785946"/>
+              <a:gd name="csX5" fmla="*/ 521208 w 521208"/>
+              <a:gd name="csY5" fmla="*/ 2511478 h 2785946"/>
+              <a:gd name="csX6" fmla="*/ 260604 w 521208"/>
+              <a:gd name="csY6" fmla="*/ 2785946 h 2785946"/>
+              <a:gd name="csX7" fmla="*/ 0 w 521208"/>
+              <a:gd name="csY7" fmla="*/ 2511478 h 2785946"/>
+            </a:gdLst>
+            <a:ahLst/>
+            <a:cxnLst>
+              <a:cxn ang="0">
+                <a:pos x="csX0" y="csY0"/>
+              </a:cxn>
+              <a:cxn ang="0">
+                <a:pos x="csX1" y="csY1"/>
+              </a:cxn>
+              <a:cxn ang="0">
+                <a:pos x="csX2" y="csY2"/>
+              </a:cxn>
+              <a:cxn ang="0">
+                <a:pos x="csX3" y="csY3"/>
+              </a:cxn>
+              <a:cxn ang="0">
+                <a:pos x="csX4" y="csY4"/>
+              </a:cxn>
+              <a:cxn ang="0">
+                <a:pos x="csX5" y="csY5"/>
+              </a:cxn>
+              <a:cxn ang="0">
+                <a:pos x="csX6" y="csY6"/>
+              </a:cxn>
+              <a:cxn ang="0">
+                <a:pos x="csX7" y="csY7"/>
+              </a:cxn>
+            </a:cxnLst>
+            <a:rect l="l" t="t" r="r" b="b"/>
+            <a:pathLst>
+              <a:path w="521208" h="2785946">
+                <a:moveTo>
+                  <a:pt x="0" y="0"/>
+                </a:moveTo>
+                <a:lnTo>
+                  <a:pt x="12734" y="0"/>
+                </a:lnTo>
+                <a:lnTo>
+                  <a:pt x="260604" y="261057"/>
+                </a:lnTo>
+                <a:lnTo>
+                  <a:pt x="508474" y="0"/>
+                </a:lnTo>
+                <a:lnTo>
+                  <a:pt x="521208" y="0"/>
+                </a:lnTo>
+                <a:lnTo>
+                  <a:pt x="521208" y="2511478"/>
+                </a:lnTo>
+                <a:lnTo>
+                  <a:pt x="260604" y="2785946"/>
+                </a:lnTo>
+                <a:lnTo>
+                  <a:pt x="0" y="2511478"/>
+                </a:lnTo>
+                <a:close/>
+              </a:path>
+            </a:pathLst>
+          </a:custGeom>
+          <a:solidFill>
+            <a:schemeClr val="tx2"/>
+          </a:solidFill>
+          <a:ln>
+            <a:noFill/>
+          </a:ln>
+        </p:spPr>
+        <p:style>
+          <a:lnRef idx="0">
+            <a:scrgbClr r="0" g="0" b="0"/>
+          </a:lnRef>
+          <a:fillRef idx="0">
+            <a:scrgbClr r="0" g="0" b="0"/>
+          </a:fillRef>
+          <a:effectRef idx="0">
+            <a:scrgbClr r="0" g="0" b="0"/>
+          </a:effectRef>
+          <a:fontRef idx="minor">
+            <a:schemeClr val="lt1"/>
+          </a:fontRef>
+        </p:style>
+        <p:txBody>
+          <a:bodyPr wrap="square" rtlCol="0" anchor="ctr">
+            <a:noAutofit/>
+          </a:bodyPr>
+          <a:lstStyle/>
+          <a:p>
+            <a:pPr marL="0" marR="0" lvl="0" indent="0" algn="ctr" defTabSz="914400" rtl="0" eaLnBrk="1" fontAlgn="auto" latinLnBrk="0" hangingPunct="1">
+              <a:lnSpc>
+                <a:spcPct val="95000"/>
+              </a:lnSpc>
+              <a:spcBef>
+                <a:spcPts val="0"/>
+              </a:spcBef>
+              <a:spcAft>
+                <a:spcPts val="0"/>
+              </a:spcAft>
+              <a:buClrTx/>
+              <a:buSzTx/>
+              <a:buFontTx/>
+              <a:buNone/>
+              <a:tabLst/>
+              <a:defRPr/>
+            </a:pPr>
+            <a:endParaRPr kumimoji="0" lang="en-US" sz="1800" b="1" i="0" u="none" strike="noStrike" kern="1200" cap="none" spc="0" normalizeH="0" baseline="0" noProof="0">
+              <a:ln>
+                <a:noFill/>
+              </a:ln>
+              <a:solidFill>
+                <a:srgbClr val="C9BC9B"/>
+              </a:solidFill>
+              <a:effectLst/>
+              <a:uLnTx/>
+              <a:uFillTx/>
+              <a:latin typeface="Source Sans Pro" panose="020B0503030403020204" pitchFamily="34" charset="0"/>
+              <a:ea typeface="Source Sans Pro" panose="020B0503030403020204" pitchFamily="34" charset="0"/>
+            </a:endParaRPr>
+          </a:p>
+        </p:txBody>
+      </p:sp>
+      <p:sp>
+        <p:nvSpPr>
+          <p:cNvPr id="39" name="Freeform 38">
+            <a:extLst>
+              <a:ext uri="{FF2B5EF4-FFF2-40B4-BE49-F238E27FC236}">
+                <a16:creationId xmlns:a16="http://schemas.microsoft.com/office/drawing/2014/main" id="{0B01733A-D893-9055-C5B5-EDB2ED443729}"/>
+              </a:ext>
+            </a:extLst>
+          </p:cNvPr>
+          <p:cNvSpPr/>
+          <p:nvPr/>
+        </p:nvSpPr>
+        <p:spPr>
+          <a:xfrm rot="16200000">
+            <a:off x="5221759" y="-445819"/>
+            <a:ext cx="156098" cy="1280160"/>
+          </a:xfrm>
+          <a:custGeom>
+            <a:avLst/>
+            <a:gdLst>
+              <a:gd name="csX0" fmla="*/ 0 w 521208"/>
+              <a:gd name="csY0" fmla="*/ 0 h 2785946"/>
+              <a:gd name="csX1" fmla="*/ 12734 w 521208"/>
+              <a:gd name="csY1" fmla="*/ 0 h 2785946"/>
+              <a:gd name="csX2" fmla="*/ 260604 w 521208"/>
+              <a:gd name="csY2" fmla="*/ 261057 h 2785946"/>
+              <a:gd name="csX3" fmla="*/ 508474 w 521208"/>
+              <a:gd name="csY3" fmla="*/ 0 h 2785946"/>
+              <a:gd name="csX4" fmla="*/ 521208 w 521208"/>
+              <a:gd name="csY4" fmla="*/ 0 h 2785946"/>
+              <a:gd name="csX5" fmla="*/ 521208 w 521208"/>
+              <a:gd name="csY5" fmla="*/ 2511478 h 2785946"/>
+              <a:gd name="csX6" fmla="*/ 260604 w 521208"/>
+              <a:gd name="csY6" fmla="*/ 2785946 h 2785946"/>
+              <a:gd name="csX7" fmla="*/ 0 w 521208"/>
+              <a:gd name="csY7" fmla="*/ 2511478 h 2785946"/>
+            </a:gdLst>
+            <a:ahLst/>
+            <a:cxnLst>
+              <a:cxn ang="0">
+                <a:pos x="csX0" y="csY0"/>
+              </a:cxn>
+              <a:cxn ang="0">
+                <a:pos x="csX1" y="csY1"/>
+              </a:cxn>
+              <a:cxn ang="0">
+                <a:pos x="csX2" y="csY2"/>
+              </a:cxn>
+              <a:cxn ang="0">
+                <a:pos x="csX3" y="csY3"/>
+              </a:cxn>
+              <a:cxn ang="0">
+                <a:pos x="csX4" y="csY4"/>
+              </a:cxn>
+              <a:cxn ang="0">
+                <a:pos x="csX5" y="csY5"/>
+              </a:cxn>
+              <a:cxn ang="0">
+                <a:pos x="csX6" y="csY6"/>
+              </a:cxn>
+              <a:cxn ang="0">
+                <a:pos x="csX7" y="csY7"/>
+              </a:cxn>
+            </a:cxnLst>
+            <a:rect l="l" t="t" r="r" b="b"/>
+            <a:pathLst>
+              <a:path w="521208" h="2785946">
+                <a:moveTo>
+                  <a:pt x="0" y="0"/>
+                </a:moveTo>
+                <a:lnTo>
+                  <a:pt x="12734" y="0"/>
+                </a:lnTo>
+                <a:lnTo>
+                  <a:pt x="260604" y="261057"/>
+                </a:lnTo>
+                <a:lnTo>
+                  <a:pt x="508474" y="0"/>
+                </a:lnTo>
+                <a:lnTo>
+                  <a:pt x="521208" y="0"/>
+                </a:lnTo>
+                <a:lnTo>
+                  <a:pt x="521208" y="2511478"/>
+                </a:lnTo>
+                <a:lnTo>
+                  <a:pt x="260604" y="2785946"/>
+                </a:lnTo>
+                <a:lnTo>
+                  <a:pt x="0" y="2511478"/>
+                </a:lnTo>
+                <a:close/>
+              </a:path>
+            </a:pathLst>
+          </a:custGeom>
+          <a:solidFill>
+            <a:schemeClr val="tx2"/>
+          </a:solidFill>
+          <a:ln>
+            <a:noFill/>
+          </a:ln>
+        </p:spPr>
+        <p:style>
+          <a:lnRef idx="0">
+            <a:scrgbClr r="0" g="0" b="0"/>
+          </a:lnRef>
+          <a:fillRef idx="0">
+            <a:scrgbClr r="0" g="0" b="0"/>
+          </a:fillRef>
+          <a:effectRef idx="0">
+            <a:scrgbClr r="0" g="0" b="0"/>
+          </a:effectRef>
+          <a:fontRef idx="minor">
+            <a:schemeClr val="lt1"/>
+          </a:fontRef>
+        </p:style>
+        <p:txBody>
+          <a:bodyPr wrap="square" rtlCol="0" anchor="ctr">
+            <a:noAutofit/>
+          </a:bodyPr>
+          <a:lstStyle/>
+          <a:p>
+            <a:pPr marL="0" marR="0" lvl="0" indent="0" algn="ctr" defTabSz="914400" rtl="0" eaLnBrk="1" fontAlgn="auto" latinLnBrk="0" hangingPunct="1">
+              <a:lnSpc>
+                <a:spcPct val="95000"/>
+              </a:lnSpc>
+              <a:spcBef>
+                <a:spcPts val="0"/>
+              </a:spcBef>
+              <a:spcAft>
+                <a:spcPts val="0"/>
+              </a:spcAft>
+              <a:buClrTx/>
+              <a:buSzTx/>
+              <a:buFontTx/>
+              <a:buNone/>
+              <a:tabLst/>
+              <a:defRPr/>
+            </a:pPr>
+            <a:endParaRPr kumimoji="0" lang="en-US" sz="1800" b="1" i="0" u="none" strike="noStrike" kern="1200" cap="none" spc="0" normalizeH="0" baseline="0" noProof="0">
+              <a:ln>
+                <a:noFill/>
+              </a:ln>
+              <a:solidFill>
+                <a:srgbClr val="C9BC9B"/>
+              </a:solidFill>
+              <a:effectLst/>
+              <a:uLnTx/>
+              <a:uFillTx/>
+              <a:latin typeface="Source Sans Pro" panose="020B0503030403020204" pitchFamily="34" charset="0"/>
+              <a:ea typeface="Source Sans Pro" panose="020B0503030403020204" pitchFamily="34" charset="0"/>
+            </a:endParaRPr>
+          </a:p>
+        </p:txBody>
+      </p:sp>
+      <p:grpSp>
+        <p:nvGrpSpPr>
+          <p:cNvPr id="2" name="Group 1">
+            <a:extLst>
+              <a:ext uri="{FF2B5EF4-FFF2-40B4-BE49-F238E27FC236}">
+                <a16:creationId xmlns:a16="http://schemas.microsoft.com/office/drawing/2014/main" id="{2414685D-4B12-F84E-E2DC-BCE2DE8C152F}"/>
+              </a:ext>
+            </a:extLst>
+          </p:cNvPr>
+          <p:cNvGrpSpPr/>
+          <p:nvPr/>
+        </p:nvGrpSpPr>
+        <p:grpSpPr>
+          <a:xfrm>
+            <a:off x="2010292" y="-48170"/>
+            <a:ext cx="3857403" cy="2277958"/>
+            <a:chOff x="444491" y="2336963"/>
+            <a:chExt cx="7183605" cy="4242220"/>
+          </a:xfrm>
+        </p:grpSpPr>
+        <p:grpSp>
+          <p:nvGrpSpPr>
+            <p:cNvPr id="36" name="Group 35">
+              <a:extLst>
+                <a:ext uri="{FF2B5EF4-FFF2-40B4-BE49-F238E27FC236}">
+                  <a16:creationId xmlns:a16="http://schemas.microsoft.com/office/drawing/2014/main" id="{3F4B5E2F-AAFC-0904-CCA6-9048847C4272}"/>
+                </a:ext>
+              </a:extLst>
+            </p:cNvPr>
+            <p:cNvGrpSpPr/>
+            <p:nvPr/>
+          </p:nvGrpSpPr>
+          <p:grpSpPr>
+            <a:xfrm>
+              <a:off x="444491" y="2336963"/>
+              <a:ext cx="7183605" cy="4242220"/>
+              <a:chOff x="444491" y="2336963"/>
+              <a:chExt cx="7183605" cy="4242220"/>
+            </a:xfrm>
+          </p:grpSpPr>
+          <p:sp>
+            <p:nvSpPr>
+              <p:cNvPr id="29" name="Freeform 28">
+                <a:extLst>
+                  <a:ext uri="{FF2B5EF4-FFF2-40B4-BE49-F238E27FC236}">
+                    <a16:creationId xmlns:a16="http://schemas.microsoft.com/office/drawing/2014/main" id="{B5EBD823-CB2B-73C8-88B0-F08C9C58B27F}"/>
+                  </a:ext>
+                </a:extLst>
+              </p:cNvPr>
+              <p:cNvSpPr/>
+              <p:nvPr/>
+            </p:nvSpPr>
+            <p:spPr>
+              <a:xfrm rot="10550342">
+                <a:off x="3928893" y="4250691"/>
+                <a:ext cx="2899237" cy="1932252"/>
+              </a:xfrm>
+              <a:custGeom>
+                <a:avLst/>
+                <a:gdLst>
+                  <a:gd name="csX0" fmla="*/ 2439956 w 2899237"/>
+                  <a:gd name="csY0" fmla="*/ 1932252 h 1932252"/>
+                  <a:gd name="csX1" fmla="*/ 2182161 w 2899237"/>
+                  <a:gd name="csY1" fmla="*/ 1422236 h 1932252"/>
+                  <a:gd name="csX2" fmla="*/ 2012489 w 2899237"/>
+                  <a:gd name="csY2" fmla="*/ 1162636 h 1932252"/>
+                  <a:gd name="csX3" fmla="*/ 1959650 w 2899237"/>
+                  <a:gd name="csY3" fmla="*/ 1084382 h 1932252"/>
+                  <a:gd name="csX4" fmla="*/ 1938412 w 2899237"/>
+                  <a:gd name="csY4" fmla="*/ 1087339 h 1932252"/>
+                  <a:gd name="csX5" fmla="*/ 1955248 w 2899237"/>
+                  <a:gd name="csY5" fmla="*/ 1077862 h 1932252"/>
+                  <a:gd name="csX6" fmla="*/ 1928786 w 2899237"/>
+                  <a:gd name="csY6" fmla="*/ 1038674 h 1932252"/>
+                  <a:gd name="csX7" fmla="*/ 1898987 w 2899237"/>
+                  <a:gd name="csY7" fmla="*/ 988617 h 1932252"/>
+                  <a:gd name="csX8" fmla="*/ 1889164 w 2899237"/>
+                  <a:gd name="csY8" fmla="*/ 975927 h 1932252"/>
+                  <a:gd name="csX9" fmla="*/ 290959 w 2899237"/>
+                  <a:gd name="csY9" fmla="*/ 736386 h 1932252"/>
+                  <a:gd name="csX10" fmla="*/ 0 w 2899237"/>
+                  <a:gd name="csY10" fmla="*/ 276025 h 1932252"/>
+                  <a:gd name="csX11" fmla="*/ 2216152 w 2899237"/>
+                  <a:gd name="csY11" fmla="*/ 527298 h 1932252"/>
+                  <a:gd name="csX12" fmla="*/ 2333318 w 2899237"/>
+                  <a:gd name="csY12" fmla="*/ 658264 h 1932252"/>
+                  <a:gd name="csX13" fmla="*/ 2337502 w 2899237"/>
+                  <a:gd name="csY13" fmla="*/ 655844 h 1932252"/>
+                  <a:gd name="csX14" fmla="*/ 2399987 w 2899237"/>
+                  <a:gd name="csY14" fmla="*/ 748060 h 1932252"/>
+                  <a:gd name="csX15" fmla="*/ 2412486 w 2899237"/>
+                  <a:gd name="csY15" fmla="*/ 766650 h 1932252"/>
+                  <a:gd name="csX16" fmla="*/ 2440309 w 2899237"/>
+                  <a:gd name="csY16" fmla="*/ 804814 h 1932252"/>
+                  <a:gd name="csX17" fmla="*/ 2466357 w 2899237"/>
+                  <a:gd name="csY17" fmla="*/ 790152 h 1932252"/>
+                  <a:gd name="csX18" fmla="*/ 2445706 w 2899237"/>
+                  <a:gd name="csY18" fmla="*/ 816064 h 1932252"/>
+                  <a:gd name="csX19" fmla="*/ 2479267 w 2899237"/>
+                  <a:gd name="csY19" fmla="*/ 865984 h 1932252"/>
+                  <a:gd name="csX20" fmla="*/ 2641089 w 2899237"/>
+                  <a:gd name="csY20" fmla="*/ 1124940 h 1932252"/>
+                  <a:gd name="csX21" fmla="*/ 2899237 w 2899237"/>
+                  <a:gd name="csY21" fmla="*/ 1645265 h 1932252"/>
+                </a:gdLst>
+                <a:ahLst/>
+                <a:cxnLst>
+                  <a:cxn ang="0">
+                    <a:pos x="csX0" y="csY0"/>
+                  </a:cxn>
+                  <a:cxn ang="0">
+                    <a:pos x="csX1" y="csY1"/>
+                  </a:cxn>
+                  <a:cxn ang="0">
+                    <a:pos x="csX2" y="csY2"/>
+                  </a:cxn>
+                  <a:cxn ang="0">
+                    <a:pos x="csX3" y="csY3"/>
+                  </a:cxn>
+                  <a:cxn ang="0">
+                    <a:pos x="csX4" y="csY4"/>
+                  </a:cxn>
+                  <a:cxn ang="0">
+                    <a:pos x="csX5" y="csY5"/>
+                  </a:cxn>
+                  <a:cxn ang="0">
+                    <a:pos x="csX6" y="csY6"/>
+                  </a:cxn>
+                  <a:cxn ang="0">
+                    <a:pos x="csX7" y="csY7"/>
+                  </a:cxn>
+                  <a:cxn ang="0">
+                    <a:pos x="csX8" y="csY8"/>
+                  </a:cxn>
+                  <a:cxn ang="0">
+                    <a:pos x="csX9" y="csY9"/>
+                  </a:cxn>
+                  <a:cxn ang="0">
+                    <a:pos x="csX10" y="csY10"/>
+                  </a:cxn>
+                  <a:cxn ang="0">
+                    <a:pos x="csX11" y="csY11"/>
+                  </a:cxn>
+                  <a:cxn ang="0">
+                    <a:pos x="csX12" y="csY12"/>
+                  </a:cxn>
+                  <a:cxn ang="0">
+                    <a:pos x="csX13" y="csY13"/>
+                  </a:cxn>
+                  <a:cxn ang="0">
+                    <a:pos x="csX14" y="csY14"/>
+                  </a:cxn>
+                  <a:cxn ang="0">
+                    <a:pos x="csX15" y="csY15"/>
+                  </a:cxn>
+                  <a:cxn ang="0">
+                    <a:pos x="csX16" y="csY16"/>
+                  </a:cxn>
+                  <a:cxn ang="0">
+                    <a:pos x="csX17" y="csY17"/>
+                  </a:cxn>
+                  <a:cxn ang="0">
+                    <a:pos x="csX18" y="csY18"/>
+                  </a:cxn>
+                  <a:cxn ang="0">
+                    <a:pos x="csX19" y="csY19"/>
+                  </a:cxn>
+                  <a:cxn ang="0">
+                    <a:pos x="csX20" y="csY20"/>
+                  </a:cxn>
+                  <a:cxn ang="0">
+                    <a:pos x="csX21" y="csY21"/>
+                  </a:cxn>
+                </a:cxnLst>
+                <a:rect l="l" t="t" r="r" b="b"/>
+                <a:pathLst>
+                  <a:path w="2899237" h="1932252">
+                    <a:moveTo>
+                      <a:pt x="2439956" y="1932252"/>
+                    </a:moveTo>
+                    <a:cubicBezTo>
+                      <a:pt x="2371515" y="1817205"/>
+                      <a:pt x="2278160" y="1589314"/>
+                      <a:pt x="2182161" y="1422236"/>
+                    </a:cubicBezTo>
+                    <a:cubicBezTo>
+                      <a:pt x="2134162" y="1338697"/>
+                      <a:pt x="2071563" y="1248437"/>
+                      <a:pt x="2012489" y="1162636"/>
+                    </a:cubicBezTo>
+                    <a:lnTo>
+                      <a:pt x="1959650" y="1084382"/>
+                    </a:lnTo>
+                    <a:lnTo>
+                      <a:pt x="1938412" y="1087339"/>
+                    </a:lnTo>
+                    <a:lnTo>
+                      <a:pt x="1955248" y="1077862"/>
+                    </a:lnTo>
+                    <a:lnTo>
+                      <a:pt x="1928786" y="1038674"/>
+                    </a:lnTo>
+                    <a:lnTo>
+                      <a:pt x="1898987" y="988617"/>
+                    </a:lnTo>
+                    <a:lnTo>
+                      <a:pt x="1889164" y="975927"/>
+                    </a:lnTo>
+                    <a:cubicBezTo>
+                      <a:pt x="1494405" y="514697"/>
+                      <a:pt x="814058" y="405168"/>
+                      <a:pt x="290959" y="736386"/>
+                    </a:cubicBezTo>
+                    <a:lnTo>
+                      <a:pt x="0" y="276025"/>
+                    </a:lnTo>
+                    <a:cubicBezTo>
+                      <a:pt x="718661" y="-178765"/>
+                      <a:pt x="1640059" y="-55422"/>
+                      <a:pt x="2216152" y="527298"/>
+                    </a:cubicBezTo>
+                    <a:lnTo>
+                      <a:pt x="2333318" y="658264"/>
+                    </a:lnTo>
+                    <a:lnTo>
+                      <a:pt x="2337502" y="655844"/>
+                    </a:lnTo>
+                    <a:cubicBezTo>
+                      <a:pt x="2354222" y="680798"/>
+                      <a:pt x="2375706" y="712286"/>
+                      <a:pt x="2399987" y="748060"/>
+                    </a:cubicBezTo>
+                    <a:lnTo>
+                      <a:pt x="2412486" y="766650"/>
+                    </a:lnTo>
+                    <a:lnTo>
+                      <a:pt x="2440309" y="804814"/>
+                    </a:lnTo>
+                    <a:lnTo>
+                      <a:pt x="2466357" y="790152"/>
+                    </a:lnTo>
+                    <a:lnTo>
+                      <a:pt x="2445706" y="816064"/>
+                    </a:lnTo>
+                    <a:lnTo>
+                      <a:pt x="2479267" y="865984"/>
+                    </a:lnTo>
+                    <a:cubicBezTo>
+                      <a:pt x="2535101" y="950168"/>
+                      <a:pt x="2594277" y="1042489"/>
+                      <a:pt x="2641089" y="1124940"/>
+                    </a:cubicBezTo>
+                    <a:cubicBezTo>
+                      <a:pt x="2727198" y="1298168"/>
+                      <a:pt x="2823134" y="1516765"/>
+                      <a:pt x="2899237" y="1645265"/>
+                    </a:cubicBezTo>
+                    <a:close/>
+                  </a:path>
+                </a:pathLst>
+              </a:custGeom>
+              <a:solidFill>
+                <a:srgbClr val="893625"/>
+              </a:solidFill>
+              <a:ln>
+                <a:solidFill>
+                  <a:schemeClr val="bg1"/>
+                </a:solidFill>
+              </a:ln>
+            </p:spPr>
+            <p:style>
+              <a:lnRef idx="0">
+                <a:scrgbClr r="0" g="0" b="0"/>
+              </a:lnRef>
+              <a:fillRef idx="0">
+                <a:scrgbClr r="0" g="0" b="0"/>
+              </a:fillRef>
+              <a:effectRef idx="0">
+                <a:scrgbClr r="0" g="0" b="0"/>
+              </a:effectRef>
+              <a:fontRef idx="minor">
+                <a:schemeClr val="lt1"/>
+              </a:fontRef>
+            </p:style>
+            <p:txBody>
+              <a:bodyPr wrap="square" rtlCol="0" anchor="ctr">
+                <a:noAutofit/>
+              </a:bodyPr>
+              <a:lstStyle/>
+              <a:p>
+                <a:pPr marL="0" marR="0" lvl="0" indent="0" algn="ctr" defTabSz="914400" rtl="0" eaLnBrk="1" fontAlgn="auto" latinLnBrk="0" hangingPunct="1">
+                  <a:lnSpc>
+                    <a:spcPct val="95000"/>
+                  </a:lnSpc>
+                  <a:spcBef>
+                    <a:spcPts val="0"/>
+                  </a:spcBef>
+                  <a:spcAft>
+                    <a:spcPts val="0"/>
+                  </a:spcAft>
+                  <a:buClrTx/>
+                  <a:buSzTx/>
+                  <a:buFontTx/>
+                  <a:buNone/>
+                  <a:tabLst/>
+                  <a:defRPr/>
+                </a:pPr>
+                <a:endParaRPr kumimoji="0" lang="en-US" sz="1800" b="1" i="0" u="none" strike="noStrike" kern="1200" cap="none" spc="0" normalizeH="0" baseline="0" noProof="0">
+                  <a:ln>
+                    <a:noFill/>
+                  </a:ln>
+                  <a:solidFill>
+                    <a:srgbClr val="C9BC9B"/>
+                  </a:solidFill>
+                  <a:effectLst/>
+                  <a:uLnTx/>
+                  <a:uFillTx/>
+                  <a:latin typeface="Source Sans Pro" panose="020B0503030403020204" pitchFamily="34" charset="0"/>
+                  <a:ea typeface="Source Sans Pro" panose="020B0503030403020204" pitchFamily="34" charset="0"/>
+                </a:endParaRPr>
+              </a:p>
+            </p:txBody>
+          </p:sp>
+          <p:sp>
+            <p:nvSpPr>
+              <p:cNvPr id="19" name="Circular Arrow 18">
+                <a:extLst>
+                  <a:ext uri="{FF2B5EF4-FFF2-40B4-BE49-F238E27FC236}">
+                    <a16:creationId xmlns:a16="http://schemas.microsoft.com/office/drawing/2014/main" id="{28A97E00-93B8-B4C8-6527-E1628C81C6CF}"/>
+                  </a:ext>
+                </a:extLst>
+              </p:cNvPr>
+              <p:cNvSpPr/>
+              <p:nvPr/>
+            </p:nvSpPr>
+            <p:spPr>
+              <a:xfrm rot="6227262">
+                <a:off x="4005234" y="2555374"/>
+                <a:ext cx="3621730" cy="3623994"/>
+              </a:xfrm>
+              <a:prstGeom prst="circularArrow">
+                <a:avLst>
+                  <a:gd name="adj1" fmla="val 15037"/>
+                  <a:gd name="adj2" fmla="val 1142319"/>
+                  <a:gd name="adj3" fmla="val 19561631"/>
+                  <a:gd name="adj4" fmla="val 12438665"/>
+                  <a:gd name="adj5" fmla="val 8364"/>
+                </a:avLst>
+              </a:prstGeom>
+              <a:solidFill>
+                <a:srgbClr val="A44E3C"/>
+              </a:solidFill>
+              <a:ln w="19050">
+                <a:solidFill>
+                  <a:schemeClr val="bg1"/>
+                </a:solidFill>
+              </a:ln>
+            </p:spPr>
+            <p:style>
+              <a:lnRef idx="0">
+                <a:scrgbClr r="0" g="0" b="0"/>
+              </a:lnRef>
+              <a:fillRef idx="0">
+                <a:scrgbClr r="0" g="0" b="0"/>
+              </a:fillRef>
+              <a:effectRef idx="0">
+                <a:scrgbClr r="0" g="0" b="0"/>
+              </a:effectRef>
+              <a:fontRef idx="minor">
+                <a:schemeClr val="lt1"/>
+              </a:fontRef>
+            </p:style>
+            <p:txBody>
+              <a:bodyPr rtlCol="0" anchor="ctr"/>
+              <a:lstStyle/>
+              <a:p>
+                <a:pPr marL="0" marR="0" lvl="0" indent="0" algn="ctr" defTabSz="914400" rtl="0" eaLnBrk="1" fontAlgn="auto" latinLnBrk="0" hangingPunct="1">
+                  <a:lnSpc>
+                    <a:spcPct val="95000"/>
+                  </a:lnSpc>
+                  <a:spcBef>
+                    <a:spcPts val="0"/>
+                  </a:spcBef>
+                  <a:spcAft>
+                    <a:spcPts val="0"/>
+                  </a:spcAft>
+                  <a:buClrTx/>
+                  <a:buSzTx/>
+                  <a:buFontTx/>
+                  <a:buNone/>
+                  <a:tabLst/>
+                  <a:defRPr/>
+                </a:pPr>
+                <a:endParaRPr kumimoji="0" lang="en-US" sz="1800" b="1" i="0" u="none" strike="noStrike" kern="1200" cap="none" spc="0" normalizeH="0" baseline="0" noProof="0">
+                  <a:ln>
+                    <a:noFill/>
+                  </a:ln>
+                  <a:solidFill>
+                    <a:srgbClr val="C9BC9B"/>
+                  </a:solidFill>
+                  <a:effectLst/>
+                  <a:uLnTx/>
+                  <a:uFillTx/>
+                  <a:latin typeface="Source Sans Pro" panose="020B0503030403020204" pitchFamily="34" charset="0"/>
+                  <a:ea typeface="Source Sans Pro" panose="020B0503030403020204" pitchFamily="34" charset="0"/>
+                </a:endParaRPr>
+              </a:p>
+            </p:txBody>
+          </p:sp>
+          <p:sp>
+            <p:nvSpPr>
+              <p:cNvPr id="30" name="Freeform 29">
+                <a:extLst>
+                  <a:ext uri="{FF2B5EF4-FFF2-40B4-BE49-F238E27FC236}">
+                    <a16:creationId xmlns:a16="http://schemas.microsoft.com/office/drawing/2014/main" id="{0A7E5FA9-A1D6-D853-80DF-BEDC38DE5B75}"/>
+                  </a:ext>
+                </a:extLst>
+              </p:cNvPr>
+              <p:cNvSpPr/>
+              <p:nvPr/>
+            </p:nvSpPr>
+            <p:spPr>
+              <a:xfrm rot="7442250" flipH="1">
+                <a:off x="3883085" y="2671932"/>
+                <a:ext cx="3228928" cy="2558989"/>
+              </a:xfrm>
+              <a:custGeom>
+                <a:avLst/>
+                <a:gdLst>
+                  <a:gd name="csX0" fmla="*/ 2915225 w 3228928"/>
+                  <a:gd name="csY0" fmla="*/ 1792995 h 2558989"/>
+                  <a:gd name="csX1" fmla="*/ 3166129 w 3228928"/>
+                  <a:gd name="csY1" fmla="*/ 315091 h 2558989"/>
+                  <a:gd name="csX2" fmla="*/ 3181085 w 3228928"/>
+                  <a:gd name="csY2" fmla="*/ 306009 h 2558989"/>
+                  <a:gd name="csX3" fmla="*/ 2737077 w 3228928"/>
+                  <a:gd name="csY3" fmla="*/ 0 h 2558989"/>
+                  <a:gd name="csX4" fmla="*/ 2663236 w 3228928"/>
+                  <a:gd name="csY4" fmla="*/ 620457 h 2558989"/>
+                  <a:gd name="csX5" fmla="*/ 2672696 w 3228928"/>
+                  <a:gd name="csY5" fmla="*/ 614712 h 2558989"/>
+                  <a:gd name="csX6" fmla="*/ 2419214 w 3228928"/>
+                  <a:gd name="csY6" fmla="*/ 1548532 h 2558989"/>
+                  <a:gd name="csX7" fmla="*/ 1694218 w 3228928"/>
+                  <a:gd name="csY7" fmla="*/ 1994367 h 2558989"/>
+                  <a:gd name="csX8" fmla="*/ 1652435 w 3228928"/>
+                  <a:gd name="csY8" fmla="*/ 2000629 h 2558989"/>
+                  <a:gd name="csX9" fmla="*/ 1572718 w 3228928"/>
+                  <a:gd name="csY9" fmla="*/ 1998011 h 2558989"/>
+                  <a:gd name="csX10" fmla="*/ 816852 w 3228928"/>
+                  <a:gd name="csY10" fmla="*/ 2009712 h 2558989"/>
+                  <a:gd name="csX11" fmla="*/ 0 w 3228928"/>
+                  <a:gd name="csY11" fmla="*/ 1958070 h 2558989"/>
+                  <a:gd name="csX12" fmla="*/ 0 w 3228928"/>
+                  <a:gd name="csY12" fmla="*/ 2499643 h 2558989"/>
+                  <a:gd name="csX13" fmla="*/ 829668 w 3228928"/>
+                  <a:gd name="csY13" fmla="*/ 2556447 h 2558989"/>
+                  <a:gd name="csX14" fmla="*/ 1558753 w 3228928"/>
+                  <a:gd name="csY14" fmla="*/ 2549379 h 2558989"/>
+                  <a:gd name="csX15" fmla="*/ 1623347 w 3228928"/>
+                  <a:gd name="csY15" fmla="*/ 2547774 h 2558989"/>
+                  <a:gd name="csX16" fmla="*/ 1624053 w 3228928"/>
+                  <a:gd name="csY16" fmla="*/ 2554883 h 2558989"/>
+                  <a:gd name="csX17" fmla="*/ 2915225 w 3228928"/>
+                  <a:gd name="csY17" fmla="*/ 1792995 h 2558989"/>
+                </a:gdLst>
+                <a:ahLst/>
+                <a:cxnLst>
+                  <a:cxn ang="0">
+                    <a:pos x="csX0" y="csY0"/>
+                  </a:cxn>
+                  <a:cxn ang="0">
+                    <a:pos x="csX1" y="csY1"/>
+                  </a:cxn>
+                  <a:cxn ang="0">
+                    <a:pos x="csX2" y="csY2"/>
+                  </a:cxn>
+                  <a:cxn ang="0">
+                    <a:pos x="csX3" y="csY3"/>
+                  </a:cxn>
+                  <a:cxn ang="0">
+                    <a:pos x="csX4" y="csY4"/>
+                  </a:cxn>
+                  <a:cxn ang="0">
+                    <a:pos x="csX5" y="csY5"/>
+                  </a:cxn>
+                  <a:cxn ang="0">
+                    <a:pos x="csX6" y="csY6"/>
+                  </a:cxn>
+                  <a:cxn ang="0">
+                    <a:pos x="csX7" y="csY7"/>
+                  </a:cxn>
+                  <a:cxn ang="0">
+                    <a:pos x="csX8" y="csY8"/>
+                  </a:cxn>
+                  <a:cxn ang="0">
+                    <a:pos x="csX9" y="csY9"/>
+                  </a:cxn>
+                  <a:cxn ang="0">
+                    <a:pos x="csX10" y="csY10"/>
+                  </a:cxn>
+                  <a:cxn ang="0">
+                    <a:pos x="csX11" y="csY11"/>
+                  </a:cxn>
+                  <a:cxn ang="0">
+                    <a:pos x="csX12" y="csY12"/>
+                  </a:cxn>
+                  <a:cxn ang="0">
+                    <a:pos x="csX13" y="csY13"/>
+                  </a:cxn>
+                  <a:cxn ang="0">
+                    <a:pos x="csX14" y="csY14"/>
+                  </a:cxn>
+                  <a:cxn ang="0">
+                    <a:pos x="csX15" y="csY15"/>
+                  </a:cxn>
+                  <a:cxn ang="0">
+                    <a:pos x="csX16" y="csY16"/>
+                  </a:cxn>
+                  <a:cxn ang="0">
+                    <a:pos x="csX17" y="csY17"/>
+                  </a:cxn>
+                </a:cxnLst>
+                <a:rect l="l" t="t" r="r" b="b"/>
+                <a:pathLst>
+                  <a:path w="3228928" h="2558989">
+                    <a:moveTo>
+                      <a:pt x="2915225" y="1792995"/>
+                    </a:moveTo>
+                    <a:cubicBezTo>
+                      <a:pt x="3212287" y="1361418"/>
+                      <a:pt x="3304070" y="820782"/>
+                      <a:pt x="3166129" y="315091"/>
+                    </a:cubicBezTo>
+                    <a:lnTo>
+                      <a:pt x="3181085" y="306009"/>
+                    </a:lnTo>
+                    <a:lnTo>
+                      <a:pt x="2737077" y="0"/>
+                    </a:lnTo>
+                    <a:lnTo>
+                      <a:pt x="2663236" y="620457"/>
+                    </a:lnTo>
+                    <a:lnTo>
+                      <a:pt x="2672696" y="614712"/>
+                    </a:lnTo>
+                    <a:cubicBezTo>
+                      <a:pt x="2718664" y="947614"/>
+                      <a:pt x="2627148" y="1284761"/>
+                      <a:pt x="2419214" y="1548532"/>
+                    </a:cubicBezTo>
+                    <a:cubicBezTo>
+                      <a:pt x="2237229" y="1779386"/>
+                      <a:pt x="1979798" y="1936622"/>
+                      <a:pt x="1694218" y="1994367"/>
+                    </a:cubicBezTo>
+                    <a:lnTo>
+                      <a:pt x="1652435" y="2000629"/>
+                    </a:lnTo>
+                    <a:lnTo>
+                      <a:pt x="1572718" y="1998011"/>
+                    </a:lnTo>
+                    <a:cubicBezTo>
+                      <a:pt x="1359568" y="1995172"/>
+                      <a:pt x="1058683" y="2015946"/>
+                      <a:pt x="816852" y="2009712"/>
+                    </a:cubicBezTo>
+                    <a:cubicBezTo>
+                      <a:pt x="540474" y="2002587"/>
+                      <a:pt x="192087" y="1960994"/>
+                      <a:pt x="0" y="1958070"/>
+                    </a:cubicBezTo>
+                    <a:lnTo>
+                      <a:pt x="0" y="2499643"/>
+                    </a:lnTo>
+                    <a:cubicBezTo>
+                      <a:pt x="214289" y="2503198"/>
+                      <a:pt x="553327" y="2537677"/>
+                      <a:pt x="829668" y="2556447"/>
+                    </a:cubicBezTo>
+                    <a:cubicBezTo>
+                      <a:pt x="1067602" y="2563436"/>
+                      <a:pt x="1371122" y="2554328"/>
+                      <a:pt x="1558753" y="2549379"/>
+                    </a:cubicBezTo>
+                    <a:lnTo>
+                      <a:pt x="1623347" y="2547774"/>
+                    </a:lnTo>
+                    <a:lnTo>
+                      <a:pt x="1624053" y="2554883"/>
+                    </a:lnTo>
+                    <a:cubicBezTo>
+                      <a:pt x="2145730" y="2503415"/>
+                      <a:pt x="2618081" y="2224692"/>
+                      <a:pt x="2915225" y="1792995"/>
+                    </a:cubicBezTo>
+                    <a:close/>
+                  </a:path>
+                </a:pathLst>
+              </a:custGeom>
+              <a:solidFill>
+                <a:srgbClr val="C36957"/>
+              </a:solidFill>
+              <a:ln w="19050">
+                <a:solidFill>
+                  <a:schemeClr val="bg1"/>
+                </a:solidFill>
+              </a:ln>
+            </p:spPr>
+            <p:style>
+              <a:lnRef idx="0">
+                <a:scrgbClr r="0" g="0" b="0"/>
+              </a:lnRef>
+              <a:fillRef idx="0">
+                <a:scrgbClr r="0" g="0" b="0"/>
+              </a:fillRef>
+              <a:effectRef idx="0">
+                <a:scrgbClr r="0" g="0" b="0"/>
+              </a:effectRef>
+              <a:fontRef idx="minor">
+                <a:schemeClr val="lt1"/>
+              </a:fontRef>
+            </p:style>
+            <p:txBody>
+              <a:bodyPr wrap="square" rtlCol="0" anchor="ctr">
+                <a:noAutofit/>
+              </a:bodyPr>
+              <a:lstStyle/>
+              <a:p>
+                <a:pPr marL="0" marR="0" lvl="0" indent="0" algn="ctr" defTabSz="914400" rtl="0" eaLnBrk="1" fontAlgn="auto" latinLnBrk="0" hangingPunct="1">
+                  <a:lnSpc>
+                    <a:spcPct val="95000"/>
+                  </a:lnSpc>
+                  <a:spcBef>
+                    <a:spcPts val="0"/>
+                  </a:spcBef>
+                  <a:spcAft>
+                    <a:spcPts val="0"/>
+                  </a:spcAft>
+                  <a:buClrTx/>
+                  <a:buSzTx/>
+                  <a:buFontTx/>
+                  <a:buNone/>
+                  <a:tabLst/>
+                  <a:defRPr/>
+                </a:pPr>
+                <a:endParaRPr kumimoji="0" lang="en-US" sz="1800" b="1" i="0" u="none" strike="noStrike" kern="1200" cap="none" spc="0" normalizeH="0" baseline="0" noProof="0">
+                  <a:ln>
+                    <a:noFill/>
+                  </a:ln>
+                  <a:solidFill>
+                    <a:srgbClr val="C9BC9B"/>
+                  </a:solidFill>
+                  <a:effectLst/>
+                  <a:uLnTx/>
+                  <a:uFillTx/>
+                  <a:latin typeface="Source Sans Pro" panose="020B0503030403020204" pitchFamily="34" charset="0"/>
+                  <a:ea typeface="Source Sans Pro" panose="020B0503030403020204" pitchFamily="34" charset="0"/>
+                </a:endParaRPr>
+              </a:p>
+            </p:txBody>
+          </p:sp>
+          <p:sp>
+            <p:nvSpPr>
+              <p:cNvPr id="27" name="Freeform 26">
+                <a:extLst>
+                  <a:ext uri="{FF2B5EF4-FFF2-40B4-BE49-F238E27FC236}">
+                    <a16:creationId xmlns:a16="http://schemas.microsoft.com/office/drawing/2014/main" id="{1C5B0E19-F961-8181-2B6C-953A281AC419}"/>
+                  </a:ext>
+                </a:extLst>
+              </p:cNvPr>
+              <p:cNvSpPr/>
+              <p:nvPr/>
+            </p:nvSpPr>
+            <p:spPr>
+              <a:xfrm rot="18258322">
+                <a:off x="1327855" y="4205243"/>
+                <a:ext cx="2873253" cy="1874628"/>
+              </a:xfrm>
+              <a:custGeom>
+                <a:avLst/>
+                <a:gdLst>
+                  <a:gd name="csX0" fmla="*/ 2873253 w 2873253"/>
+                  <a:gd name="csY0" fmla="*/ 1567425 h 1874628"/>
+                  <a:gd name="csX1" fmla="*/ 2602467 w 2873253"/>
+                  <a:gd name="csY1" fmla="*/ 1838211 h 1874628"/>
+                  <a:gd name="csX2" fmla="*/ 1698669 w 2873253"/>
+                  <a:gd name="csY2" fmla="*/ 1838211 h 1874628"/>
+                  <a:gd name="csX3" fmla="*/ 1684470 w 2873253"/>
+                  <a:gd name="csY3" fmla="*/ 1874628 h 1874628"/>
+                  <a:gd name="csX4" fmla="*/ 1684068 w 2873253"/>
+                  <a:gd name="csY4" fmla="*/ 1844740 h 1874628"/>
+                  <a:gd name="csX5" fmla="*/ 1621419 w 2873253"/>
+                  <a:gd name="csY5" fmla="*/ 1838211 h 1874628"/>
+                  <a:gd name="csX6" fmla="*/ 1618364 w 2873253"/>
+                  <a:gd name="csY6" fmla="*/ 1838211 h 1874628"/>
+                  <a:gd name="csX7" fmla="*/ 1618364 w 2873253"/>
+                  <a:gd name="csY7" fmla="*/ 1837893 h 1874628"/>
+                  <a:gd name="csX8" fmla="*/ 1504778 w 2873253"/>
+                  <a:gd name="csY8" fmla="*/ 1826055 h 1874628"/>
+                  <a:gd name="csX9" fmla="*/ 1314 w 2873253"/>
+                  <a:gd name="csY9" fmla="*/ 0 h 1874628"/>
+                  <a:gd name="csX10" fmla="*/ 545531 w 2873253"/>
+                  <a:gd name="csY10" fmla="*/ 20426 h 1874628"/>
+                  <a:gd name="csX11" fmla="*/ 1555265 w 2873253"/>
+                  <a:gd name="csY11" fmla="*/ 1282201 h 1874628"/>
+                  <a:gd name="csX12" fmla="*/ 1663502 w 2873253"/>
+                  <a:gd name="csY12" fmla="*/ 1296638 h 1874628"/>
+                  <a:gd name="csX13" fmla="*/ 1676715 w 2873253"/>
+                  <a:gd name="csY13" fmla="*/ 1296638 h 1874628"/>
+                  <a:gd name="csX14" fmla="*/ 1676342 w 2873253"/>
+                  <a:gd name="csY14" fmla="*/ 1268840 h 1874628"/>
+                  <a:gd name="csX15" fmla="*/ 1687696 w 2873253"/>
+                  <a:gd name="csY15" fmla="*/ 1296638 h 1874628"/>
+                  <a:gd name="csX16" fmla="*/ 2602467 w 2873253"/>
+                  <a:gd name="csY16" fmla="*/ 1296638 h 1874628"/>
+                </a:gdLst>
+                <a:ahLst/>
+                <a:cxnLst>
+                  <a:cxn ang="0">
+                    <a:pos x="csX0" y="csY0"/>
+                  </a:cxn>
+                  <a:cxn ang="0">
+                    <a:pos x="csX1" y="csY1"/>
+                  </a:cxn>
+                  <a:cxn ang="0">
+                    <a:pos x="csX2" y="csY2"/>
+                  </a:cxn>
+                  <a:cxn ang="0">
+                    <a:pos x="csX3" y="csY3"/>
+                  </a:cxn>
+                  <a:cxn ang="0">
+                    <a:pos x="csX4" y="csY4"/>
+                  </a:cxn>
+                  <a:cxn ang="0">
+                    <a:pos x="csX5" y="csY5"/>
+                  </a:cxn>
+                  <a:cxn ang="0">
+                    <a:pos x="csX6" y="csY6"/>
+                  </a:cxn>
+                  <a:cxn ang="0">
+                    <a:pos x="csX7" y="csY7"/>
+                  </a:cxn>
+                  <a:cxn ang="0">
+                    <a:pos x="csX8" y="csY8"/>
+                  </a:cxn>
+                  <a:cxn ang="0">
+                    <a:pos x="csX9" y="csY9"/>
+                  </a:cxn>
+                  <a:cxn ang="0">
+                    <a:pos x="csX10" y="csY10"/>
+                  </a:cxn>
+                  <a:cxn ang="0">
+                    <a:pos x="csX11" y="csY11"/>
+                  </a:cxn>
+                  <a:cxn ang="0">
+                    <a:pos x="csX12" y="csY12"/>
+                  </a:cxn>
+                  <a:cxn ang="0">
+                    <a:pos x="csX13" y="csY13"/>
+                  </a:cxn>
+                  <a:cxn ang="0">
+                    <a:pos x="csX14" y="csY14"/>
+                  </a:cxn>
+                  <a:cxn ang="0">
+                    <a:pos x="csX15" y="csY15"/>
+                  </a:cxn>
+                  <a:cxn ang="0">
+                    <a:pos x="csX16" y="csY16"/>
+                  </a:cxn>
+                </a:cxnLst>
+                <a:rect l="l" t="t" r="r" b="b"/>
+                <a:pathLst>
+                  <a:path w="2873253" h="1874628">
+                    <a:moveTo>
+                      <a:pt x="2873253" y="1567425"/>
+                    </a:moveTo>
+                    <a:lnTo>
+                      <a:pt x="2602467" y="1838211"/>
+                    </a:lnTo>
+                    <a:lnTo>
+                      <a:pt x="1698669" y="1838211"/>
+                    </a:lnTo>
+                    <a:lnTo>
+                      <a:pt x="1684470" y="1874628"/>
+                    </a:lnTo>
+                    <a:lnTo>
+                      <a:pt x="1684068" y="1844740"/>
+                    </a:lnTo>
+                    <a:lnTo>
+                      <a:pt x="1621419" y="1838211"/>
+                    </a:lnTo>
+                    <a:lnTo>
+                      <a:pt x="1618364" y="1838211"/>
+                    </a:lnTo>
+                    <a:lnTo>
+                      <a:pt x="1618364" y="1837893"/>
+                    </a:lnTo>
+                    <a:lnTo>
+                      <a:pt x="1504778" y="1826055"/>
+                    </a:lnTo>
+                    <a:cubicBezTo>
+                      <a:pt x="622706" y="1689100"/>
+                      <a:pt x="-33386" y="910562"/>
+                      <a:pt x="1314" y="0"/>
+                    </a:cubicBezTo>
+                    <a:lnTo>
+                      <a:pt x="545531" y="20426"/>
+                    </a:lnTo>
+                    <a:cubicBezTo>
+                      <a:pt x="521797" y="639113"/>
+                      <a:pt x="958170" y="1172449"/>
+                      <a:pt x="1555265" y="1282201"/>
+                    </a:cubicBezTo>
+                    <a:lnTo>
+                      <a:pt x="1663502" y="1296638"/>
+                    </a:lnTo>
+                    <a:lnTo>
+                      <a:pt x="1676715" y="1296638"/>
+                    </a:lnTo>
+                    <a:lnTo>
+                      <a:pt x="1676342" y="1268840"/>
+                    </a:lnTo>
+                    <a:lnTo>
+                      <a:pt x="1687696" y="1296638"/>
+                    </a:lnTo>
+                    <a:lnTo>
+                      <a:pt x="2602467" y="1296638"/>
+                    </a:lnTo>
+                    <a:close/>
+                  </a:path>
+                </a:pathLst>
+              </a:custGeom>
+              <a:solidFill>
+                <a:schemeClr val="accent1"/>
+              </a:solidFill>
+              <a:ln w="19050">
+                <a:solidFill>
+                  <a:schemeClr val="bg1"/>
+                </a:solidFill>
+              </a:ln>
+            </p:spPr>
+            <p:style>
+              <a:lnRef idx="0">
+                <a:scrgbClr r="0" g="0" b="0"/>
+              </a:lnRef>
+              <a:fillRef idx="0">
+                <a:scrgbClr r="0" g="0" b="0"/>
+              </a:fillRef>
+              <a:effectRef idx="0">
+                <a:scrgbClr r="0" g="0" b="0"/>
+              </a:effectRef>
+              <a:fontRef idx="minor">
+                <a:schemeClr val="lt1"/>
+              </a:fontRef>
+            </p:style>
+            <p:txBody>
+              <a:bodyPr wrap="square" rtlCol="0" anchor="ctr">
+                <a:noAutofit/>
+              </a:bodyPr>
+              <a:lstStyle/>
+              <a:p>
+                <a:pPr marL="0" marR="0" lvl="0" indent="0" algn="ctr" defTabSz="914400" rtl="0" eaLnBrk="1" fontAlgn="auto" latinLnBrk="0" hangingPunct="1">
+                  <a:lnSpc>
+                    <a:spcPct val="95000"/>
+                  </a:lnSpc>
+                  <a:spcBef>
+                    <a:spcPts val="0"/>
+                  </a:spcBef>
+                  <a:spcAft>
+                    <a:spcPts val="0"/>
+                  </a:spcAft>
+                  <a:buClrTx/>
+                  <a:buSzTx/>
+                  <a:buFontTx/>
+                  <a:buNone/>
+                  <a:tabLst/>
+                  <a:defRPr/>
+                </a:pPr>
+                <a:endParaRPr kumimoji="0" lang="en-US" sz="1800" b="1" i="0" u="none" strike="noStrike" kern="1200" cap="none" spc="0" normalizeH="0" baseline="0" noProof="0">
+                  <a:ln>
+                    <a:noFill/>
+                  </a:ln>
+                  <a:solidFill>
+                    <a:srgbClr val="C9BC9B"/>
+                  </a:solidFill>
+                  <a:effectLst/>
+                  <a:uLnTx/>
+                  <a:uFillTx/>
+                  <a:latin typeface="Source Sans Pro" panose="020B0503030403020204" pitchFamily="34" charset="0"/>
+                  <a:ea typeface="Source Sans Pro" panose="020B0503030403020204" pitchFamily="34" charset="0"/>
+                </a:endParaRPr>
+              </a:p>
+            </p:txBody>
+          </p:sp>
+          <p:sp>
+            <p:nvSpPr>
+              <p:cNvPr id="12" name="Circular Arrow 11">
+                <a:extLst>
+                  <a:ext uri="{FF2B5EF4-FFF2-40B4-BE49-F238E27FC236}">
+                    <a16:creationId xmlns:a16="http://schemas.microsoft.com/office/drawing/2014/main" id="{BD5A5E43-4DAB-B68D-4F86-3E2883B567F4}"/>
+                  </a:ext>
+                </a:extLst>
+              </p:cNvPr>
+              <p:cNvSpPr/>
+              <p:nvPr/>
+            </p:nvSpPr>
+            <p:spPr>
+              <a:xfrm rot="15372738" flipH="1">
+                <a:off x="445623" y="2555375"/>
+                <a:ext cx="3621730" cy="3623994"/>
+              </a:xfrm>
+              <a:prstGeom prst="circularArrow">
+                <a:avLst>
+                  <a:gd name="adj1" fmla="val 15037"/>
+                  <a:gd name="adj2" fmla="val 1142319"/>
+                  <a:gd name="adj3" fmla="val 19561631"/>
+                  <a:gd name="adj4" fmla="val 12438665"/>
+                  <a:gd name="adj5" fmla="val 8364"/>
+                </a:avLst>
+              </a:prstGeom>
+              <a:solidFill>
+                <a:srgbClr val="3E6D6F"/>
+              </a:solidFill>
+              <a:ln w="19050">
+                <a:solidFill>
+                  <a:schemeClr val="bg1"/>
+                </a:solidFill>
+              </a:ln>
+            </p:spPr>
+            <p:style>
+              <a:lnRef idx="0">
+                <a:scrgbClr r="0" g="0" b="0"/>
+              </a:lnRef>
+              <a:fillRef idx="0">
+                <a:scrgbClr r="0" g="0" b="0"/>
+              </a:fillRef>
+              <a:effectRef idx="0">
+                <a:scrgbClr r="0" g="0" b="0"/>
+              </a:effectRef>
+              <a:fontRef idx="minor">
+                <a:schemeClr val="lt1"/>
+              </a:fontRef>
+            </p:style>
+            <p:txBody>
+              <a:bodyPr rtlCol="0" anchor="ctr"/>
+              <a:lstStyle/>
+              <a:p>
+                <a:pPr marL="0" marR="0" lvl="0" indent="0" algn="ctr" defTabSz="914400" rtl="0" eaLnBrk="1" fontAlgn="auto" latinLnBrk="0" hangingPunct="1">
+                  <a:lnSpc>
+                    <a:spcPct val="95000"/>
+                  </a:lnSpc>
+                  <a:spcBef>
+                    <a:spcPts val="0"/>
+                  </a:spcBef>
+                  <a:spcAft>
+                    <a:spcPts val="0"/>
+                  </a:spcAft>
+                  <a:buClrTx/>
+                  <a:buSzTx/>
+                  <a:buFontTx/>
+                  <a:buNone/>
+                  <a:tabLst/>
+                  <a:defRPr/>
+                </a:pPr>
+                <a:endParaRPr kumimoji="0" lang="en-US" sz="1800" b="1" i="0" u="none" strike="noStrike" kern="1200" cap="none" spc="0" normalizeH="0" baseline="0" noProof="0">
+                  <a:ln>
+                    <a:noFill/>
+                  </a:ln>
+                  <a:solidFill>
+                    <a:srgbClr val="C9BC9B"/>
+                  </a:solidFill>
+                  <a:effectLst/>
+                  <a:uLnTx/>
+                  <a:uFillTx/>
+                  <a:latin typeface="Source Sans Pro" panose="020B0503030403020204" pitchFamily="34" charset="0"/>
+                  <a:ea typeface="Source Sans Pro" panose="020B0503030403020204" pitchFamily="34" charset="0"/>
+                </a:endParaRPr>
+              </a:p>
+            </p:txBody>
+          </p:sp>
+          <p:sp>
+            <p:nvSpPr>
+              <p:cNvPr id="35" name="Freeform 34">
+                <a:extLst>
+                  <a:ext uri="{FF2B5EF4-FFF2-40B4-BE49-F238E27FC236}">
+                    <a16:creationId xmlns:a16="http://schemas.microsoft.com/office/drawing/2014/main" id="{80C0FABA-6F6A-F4C3-B0A9-7425E2E56443}"/>
+                  </a:ext>
+                </a:extLst>
+              </p:cNvPr>
+              <p:cNvSpPr/>
+              <p:nvPr/>
+            </p:nvSpPr>
+            <p:spPr>
+              <a:xfrm rot="14157750">
+                <a:off x="1097924" y="2413413"/>
+                <a:ext cx="2617463" cy="2565616"/>
+              </a:xfrm>
+              <a:custGeom>
+                <a:avLst/>
+                <a:gdLst>
+                  <a:gd name="csX0" fmla="*/ 2303761 w 2617463"/>
+                  <a:gd name="csY0" fmla="*/ 1792995 h 2565616"/>
+                  <a:gd name="csX1" fmla="*/ 1205660 w 2617463"/>
+                  <a:gd name="csY1" fmla="*/ 2525076 h 2565616"/>
+                  <a:gd name="csX2" fmla="*/ 1023743 w 2617463"/>
+                  <a:gd name="csY2" fmla="*/ 2553162 h 2565616"/>
+                  <a:gd name="csX3" fmla="*/ 1023708 w 2617463"/>
+                  <a:gd name="csY3" fmla="*/ 2554197 h 2565616"/>
+                  <a:gd name="csX4" fmla="*/ 1015037 w 2617463"/>
+                  <a:gd name="csY4" fmla="*/ 2554506 h 2565616"/>
+                  <a:gd name="csX5" fmla="*/ 1012589 w 2617463"/>
+                  <a:gd name="csY5" fmla="*/ 2554884 h 2565616"/>
+                  <a:gd name="csX6" fmla="*/ 1012560 w 2617463"/>
+                  <a:gd name="csY6" fmla="*/ 2554594 h 2565616"/>
+                  <a:gd name="csX7" fmla="*/ 972993 w 2617463"/>
+                  <a:gd name="csY7" fmla="*/ 2556004 h 2565616"/>
+                  <a:gd name="csX8" fmla="*/ 465015 w 2617463"/>
+                  <a:gd name="csY8" fmla="*/ 2563073 h 2565616"/>
+                  <a:gd name="csX9" fmla="*/ 314463 w 2617463"/>
+                  <a:gd name="csY9" fmla="*/ 2546779 h 2565616"/>
+                  <a:gd name="csX10" fmla="*/ 278020 w 2617463"/>
+                  <a:gd name="csY10" fmla="*/ 2542582 h 2565616"/>
+                  <a:gd name="csX11" fmla="*/ 258726 w 2617463"/>
+                  <a:gd name="csY11" fmla="*/ 2496456 h 2565616"/>
+                  <a:gd name="csX12" fmla="*/ 63501 w 2617463"/>
+                  <a:gd name="csY12" fmla="*/ 2102775 h 2565616"/>
+                  <a:gd name="csX13" fmla="*/ 0 w 2617463"/>
+                  <a:gd name="csY13" fmla="*/ 1972537 h 2565616"/>
+                  <a:gd name="csX14" fmla="*/ 5265 w 2617463"/>
+                  <a:gd name="csY14" fmla="*/ 1972997 h 2565616"/>
+                  <a:gd name="csX15" fmla="*/ 456086 w 2617463"/>
+                  <a:gd name="csY15" fmla="*/ 2016338 h 2565616"/>
+                  <a:gd name="csX16" fmla="*/ 915633 w 2617463"/>
+                  <a:gd name="csY16" fmla="*/ 2004718 h 2565616"/>
+                  <a:gd name="csX17" fmla="*/ 1001371 w 2617463"/>
+                  <a:gd name="csY17" fmla="*/ 2006565 h 2565616"/>
+                  <a:gd name="csX18" fmla="*/ 1082754 w 2617463"/>
+                  <a:gd name="csY18" fmla="*/ 1994367 h 2565616"/>
+                  <a:gd name="csX19" fmla="*/ 1807749 w 2617463"/>
+                  <a:gd name="csY19" fmla="*/ 1548533 h 2565616"/>
+                  <a:gd name="csX20" fmla="*/ 2061232 w 2617463"/>
+                  <a:gd name="csY20" fmla="*/ 614713 h 2565616"/>
+                  <a:gd name="csX21" fmla="*/ 2051772 w 2617463"/>
+                  <a:gd name="csY21" fmla="*/ 620457 h 2565616"/>
+                  <a:gd name="csX22" fmla="*/ 2125612 w 2617463"/>
+                  <a:gd name="csY22" fmla="*/ 0 h 2565616"/>
+                  <a:gd name="csX23" fmla="*/ 2569621 w 2617463"/>
+                  <a:gd name="csY23" fmla="*/ 306009 h 2565616"/>
+                  <a:gd name="csX24" fmla="*/ 2554664 w 2617463"/>
+                  <a:gd name="csY24" fmla="*/ 315091 h 2565616"/>
+                  <a:gd name="csX25" fmla="*/ 2303761 w 2617463"/>
+                  <a:gd name="csY25" fmla="*/ 1792995 h 2565616"/>
+                </a:gdLst>
+                <a:ahLst/>
+                <a:cxnLst>
+                  <a:cxn ang="0">
+                    <a:pos x="csX0" y="csY0"/>
+                  </a:cxn>
+                  <a:cxn ang="0">
+                    <a:pos x="csX1" y="csY1"/>
+                  </a:cxn>
+                  <a:cxn ang="0">
+                    <a:pos x="csX2" y="csY2"/>
+                  </a:cxn>
+                  <a:cxn ang="0">
+                    <a:pos x="csX3" y="csY3"/>
+                  </a:cxn>
+                  <a:cxn ang="0">
+                    <a:pos x="csX4" y="csY4"/>
+                  </a:cxn>
+                  <a:cxn ang="0">
+                    <a:pos x="csX5" y="csY5"/>
+                  </a:cxn>
+                  <a:cxn ang="0">
+                    <a:pos x="csX6" y="csY6"/>
+                  </a:cxn>
+                  <a:cxn ang="0">
+                    <a:pos x="csX7" y="csY7"/>
+                  </a:cxn>
+                  <a:cxn ang="0">
+                    <a:pos x="csX8" y="csY8"/>
+                  </a:cxn>
+                  <a:cxn ang="0">
+                    <a:pos x="csX9" y="csY9"/>
+                  </a:cxn>
+                  <a:cxn ang="0">
+                    <a:pos x="csX10" y="csY10"/>
+                  </a:cxn>
+                  <a:cxn ang="0">
+                    <a:pos x="csX11" y="csY11"/>
+                  </a:cxn>
+                  <a:cxn ang="0">
+                    <a:pos x="csX12" y="csY12"/>
+                  </a:cxn>
+                  <a:cxn ang="0">
+                    <a:pos x="csX13" y="csY13"/>
+                  </a:cxn>
+                  <a:cxn ang="0">
+                    <a:pos x="csX14" y="csY14"/>
+                  </a:cxn>
+                  <a:cxn ang="0">
+                    <a:pos x="csX15" y="csY15"/>
+                  </a:cxn>
+                  <a:cxn ang="0">
+                    <a:pos x="csX16" y="csY16"/>
+                  </a:cxn>
+                  <a:cxn ang="0">
+                    <a:pos x="csX17" y="csY17"/>
+                  </a:cxn>
+                  <a:cxn ang="0">
+                    <a:pos x="csX18" y="csY18"/>
+                  </a:cxn>
+                  <a:cxn ang="0">
+                    <a:pos x="csX19" y="csY19"/>
+                  </a:cxn>
+                  <a:cxn ang="0">
+                    <a:pos x="csX20" y="csY20"/>
+                  </a:cxn>
+                  <a:cxn ang="0">
+                    <a:pos x="csX21" y="csY21"/>
+                  </a:cxn>
+                  <a:cxn ang="0">
+                    <a:pos x="csX22" y="csY22"/>
+                  </a:cxn>
+                  <a:cxn ang="0">
+                    <a:pos x="csX23" y="csY23"/>
+                  </a:cxn>
+                  <a:cxn ang="0">
+                    <a:pos x="csX24" y="csY24"/>
+                  </a:cxn>
+                  <a:cxn ang="0">
+                    <a:pos x="csX25" y="csY25"/>
+                  </a:cxn>
+                </a:cxnLst>
+                <a:rect l="l" t="t" r="r" b="b"/>
+                <a:pathLst>
+                  <a:path w="2617463" h="2565616">
+                    <a:moveTo>
+                      <a:pt x="2303761" y="1792995"/>
+                    </a:moveTo>
+                    <a:cubicBezTo>
+                      <a:pt x="2043759" y="2170730"/>
+                      <a:pt x="1649616" y="2431344"/>
+                      <a:pt x="1205660" y="2525076"/>
+                    </a:cubicBezTo>
+                    <a:lnTo>
+                      <a:pt x="1023743" y="2553162"/>
+                    </a:lnTo>
+                    <a:lnTo>
+                      <a:pt x="1023708" y="2554197"/>
+                    </a:lnTo>
+                    <a:lnTo>
+                      <a:pt x="1015037" y="2554506"/>
+                    </a:lnTo>
+                    <a:lnTo>
+                      <a:pt x="1012589" y="2554884"/>
+                    </a:lnTo>
+                    <a:lnTo>
+                      <a:pt x="1012560" y="2554594"/>
+                    </a:lnTo>
+                    <a:lnTo>
+                      <a:pt x="972993" y="2556004"/>
+                    </a:lnTo>
+                    <a:cubicBezTo>
+                      <a:pt x="842265" y="2560954"/>
+                      <a:pt x="630792" y="2570063"/>
+                      <a:pt x="465015" y="2563073"/>
+                    </a:cubicBezTo>
+                    <a:cubicBezTo>
+                      <a:pt x="416881" y="2558380"/>
+                      <a:pt x="366017" y="2552706"/>
+                      <a:pt x="314463" y="2546779"/>
+                    </a:cubicBezTo>
+                    <a:lnTo>
+                      <a:pt x="278020" y="2542582"/>
+                    </a:lnTo>
+                    <a:lnTo>
+                      <a:pt x="258726" y="2496456"/>
+                    </a:lnTo>
+                    <a:cubicBezTo>
+                      <a:pt x="198428" y="2371784"/>
+                      <a:pt x="128634" y="2234037"/>
+                      <a:pt x="63501" y="2102775"/>
+                    </a:cubicBezTo>
+                    <a:lnTo>
+                      <a:pt x="0" y="1972537"/>
+                    </a:lnTo>
+                    <a:lnTo>
+                      <a:pt x="5265" y="1972997"/>
+                    </a:lnTo>
+                    <a:cubicBezTo>
+                      <a:pt x="139021" y="1986262"/>
+                      <a:pt x="311664" y="2010994"/>
+                      <a:pt x="456086" y="2016338"/>
+                    </a:cubicBezTo>
+                    <a:cubicBezTo>
+                      <a:pt x="600508" y="2021682"/>
+                      <a:pt x="775158" y="2007182"/>
+                      <a:pt x="915633" y="2004718"/>
+                    </a:cubicBezTo>
+                    <a:lnTo>
+                      <a:pt x="1001371" y="2006565"/>
+                    </a:lnTo>
+                    <a:lnTo>
+                      <a:pt x="1082754" y="1994367"/>
+                    </a:lnTo>
+                    <a:cubicBezTo>
+                      <a:pt x="1368334" y="1936622"/>
+                      <a:pt x="1625765" y="1779386"/>
+                      <a:pt x="1807749" y="1548533"/>
+                    </a:cubicBezTo>
+                    <a:cubicBezTo>
+                      <a:pt x="2015684" y="1284762"/>
+                      <a:pt x="2107200" y="947615"/>
+                      <a:pt x="2061232" y="614713"/>
+                    </a:cubicBezTo>
+                    <a:lnTo>
+                      <a:pt x="2051772" y="620457"/>
+                    </a:lnTo>
+                    <a:lnTo>
+                      <a:pt x="2125612" y="0"/>
+                    </a:lnTo>
+                    <a:lnTo>
+                      <a:pt x="2569621" y="306009"/>
+                    </a:lnTo>
+                    <a:lnTo>
+                      <a:pt x="2554664" y="315091"/>
+                    </a:lnTo>
+                    <a:cubicBezTo>
+                      <a:pt x="2692606" y="820782"/>
+                      <a:pt x="2600822" y="1361418"/>
+                      <a:pt x="2303761" y="1792995"/>
+                    </a:cubicBezTo>
+                    <a:close/>
+                  </a:path>
+                </a:pathLst>
+              </a:custGeom>
+              <a:solidFill>
+                <a:srgbClr val="25565A"/>
+              </a:solidFill>
+              <a:ln w="19050">
+                <a:solidFill>
+                  <a:schemeClr val="bg1"/>
+                </a:solidFill>
+              </a:ln>
+            </p:spPr>
+            <p:style>
+              <a:lnRef idx="0">
+                <a:scrgbClr r="0" g="0" b="0"/>
+              </a:lnRef>
+              <a:fillRef idx="0">
+                <a:scrgbClr r="0" g="0" b="0"/>
+              </a:fillRef>
+              <a:effectRef idx="0">
+                <a:scrgbClr r="0" g="0" b="0"/>
+              </a:effectRef>
+              <a:fontRef idx="minor">
+                <a:schemeClr val="lt1"/>
+              </a:fontRef>
+            </p:style>
+            <p:txBody>
+              <a:bodyPr wrap="square" rtlCol="0" anchor="ctr">
+                <a:noAutofit/>
+              </a:bodyPr>
+              <a:lstStyle/>
+              <a:p>
+                <a:pPr marL="0" marR="0" lvl="0" indent="0" algn="ctr" defTabSz="914400" rtl="0" eaLnBrk="1" fontAlgn="auto" latinLnBrk="0" hangingPunct="1">
+                  <a:lnSpc>
+                    <a:spcPct val="95000"/>
+                  </a:lnSpc>
+                  <a:spcBef>
+                    <a:spcPts val="0"/>
+                  </a:spcBef>
+                  <a:spcAft>
+                    <a:spcPts val="0"/>
+                  </a:spcAft>
+                  <a:buClrTx/>
+                  <a:buSzTx/>
+                  <a:buFontTx/>
+                  <a:buNone/>
+                  <a:tabLst/>
+                  <a:defRPr/>
+                </a:pPr>
+                <a:endParaRPr kumimoji="0" lang="en-US" sz="1800" b="1" i="0" u="none" strike="noStrike" kern="1200" cap="none" spc="0" normalizeH="0" baseline="0" noProof="0">
+                  <a:ln>
+                    <a:noFill/>
+                  </a:ln>
+                  <a:solidFill>
+                    <a:srgbClr val="C9BC9B"/>
+                  </a:solidFill>
+                  <a:effectLst/>
+                  <a:uLnTx/>
+                  <a:uFillTx/>
+                  <a:latin typeface="Source Sans Pro" panose="020B0503030403020204" pitchFamily="34" charset="0"/>
+                  <a:ea typeface="Source Sans Pro" panose="020B0503030403020204" pitchFamily="34" charset="0"/>
+                </a:endParaRPr>
+              </a:p>
+            </p:txBody>
+          </p:sp>
+        </p:grpSp>
+        <p:sp>
+          <p:nvSpPr>
+            <p:cNvPr id="40" name="TextBox 39">
+              <a:extLst>
+                <a:ext uri="{FF2B5EF4-FFF2-40B4-BE49-F238E27FC236}">
+                  <a16:creationId xmlns:a16="http://schemas.microsoft.com/office/drawing/2014/main" id="{AD85F63C-A6EE-EB44-F6F7-1E68E0C0D0A4}"/>
+                </a:ext>
+              </a:extLst>
+            </p:cNvPr>
+            <p:cNvSpPr txBox="1"/>
+            <p:nvPr/>
+          </p:nvSpPr>
+          <p:spPr>
+            <a:xfrm>
+              <a:off x="1505051" y="2968779"/>
+              <a:ext cx="1453896" cy="523220"/>
+            </a:xfrm>
+            <a:prstGeom prst="rect">
+              <a:avLst/>
+            </a:prstGeom>
+            <a:noFill/>
+          </p:spPr>
+          <p:txBody>
+            <a:bodyPr wrap="none" rtlCol="0">
+              <a:prstTxWarp prst="textArchUp">
+                <a:avLst/>
+              </a:prstTxWarp>
+              <a:spAutoFit/>
+            </a:bodyPr>
+            <a:lstStyle/>
+            <a:p>
+              <a:pPr marL="0" marR="0" lvl="0" indent="0" algn="ctr" defTabSz="914400" rtl="0" eaLnBrk="1" fontAlgn="auto" latinLnBrk="0" hangingPunct="1">
+                <a:lnSpc>
+                  <a:spcPct val="100000"/>
+                </a:lnSpc>
+                <a:spcBef>
+                  <a:spcPts val="0"/>
+                </a:spcBef>
+                <a:spcAft>
+                  <a:spcPts val="0"/>
+                </a:spcAft>
+                <a:buClrTx/>
+                <a:buSzTx/>
+                <a:buFontTx/>
+                <a:buNone/>
+                <a:tabLst/>
+                <a:defRPr/>
+              </a:pPr>
+              <a:r>
+                <a:rPr kumimoji="0" lang="en-US" b="1" i="0" u="none" strike="noStrike" kern="1200" cap="none" spc="0" normalizeH="0" baseline="0" noProof="0">
+                  <a:ln>
+                    <a:noFill/>
+                  </a:ln>
+                  <a:solidFill>
+                    <a:srgbClr val="FFFFFF"/>
+                  </a:solidFill>
+                  <a:effectLst/>
+                  <a:uLnTx/>
+                  <a:uFillTx/>
+                  <a:latin typeface="Source Sans Pro" panose="020B0503030403020204" pitchFamily="34" charset="0"/>
+                  <a:ea typeface="Source Sans Pro" panose="020B0503030403020204" pitchFamily="34" charset="0"/>
+                </a:rPr>
+                <a:t>Curate</a:t>
+              </a:r>
+            </a:p>
+          </p:txBody>
+        </p:sp>
+        <p:sp>
+          <p:nvSpPr>
+            <p:cNvPr id="41" name="TextBox 40">
+              <a:extLst>
+                <a:ext uri="{FF2B5EF4-FFF2-40B4-BE49-F238E27FC236}">
+                  <a16:creationId xmlns:a16="http://schemas.microsoft.com/office/drawing/2014/main" id="{4C666353-C0BB-6434-CCE1-8DE8B0A89F18}"/>
+                </a:ext>
+              </a:extLst>
+            </p:cNvPr>
+            <p:cNvSpPr txBox="1"/>
+            <p:nvPr/>
+          </p:nvSpPr>
+          <p:spPr>
+            <a:xfrm rot="19017958">
+              <a:off x="2277601" y="5092086"/>
+              <a:ext cx="1572768" cy="523220"/>
+            </a:xfrm>
+            <a:prstGeom prst="rect">
+              <a:avLst/>
+            </a:prstGeom>
+            <a:noFill/>
+          </p:spPr>
+          <p:txBody>
+            <a:bodyPr wrap="none" rtlCol="0">
+              <a:prstTxWarp prst="textArchDown">
+                <a:avLst/>
+              </a:prstTxWarp>
+              <a:spAutoFit/>
+            </a:bodyPr>
+            <a:lstStyle/>
+            <a:p>
+              <a:pPr marL="0" marR="0" lvl="0" indent="0" algn="ctr" defTabSz="914400" rtl="0" eaLnBrk="1" fontAlgn="auto" latinLnBrk="0" hangingPunct="1">
+                <a:lnSpc>
+                  <a:spcPct val="100000"/>
+                </a:lnSpc>
+                <a:spcBef>
+                  <a:spcPts val="0"/>
+                </a:spcBef>
+                <a:spcAft>
+                  <a:spcPts val="0"/>
+                </a:spcAft>
+                <a:buClrTx/>
+                <a:buSzTx/>
+                <a:buFontTx/>
+                <a:buNone/>
+                <a:tabLst/>
+                <a:defRPr/>
+              </a:pPr>
+              <a:r>
+                <a:rPr kumimoji="0" lang="en-US" b="1" i="0" u="none" strike="noStrike" kern="1200" cap="none" spc="0" normalizeH="0" baseline="0" noProof="0" dirty="0">
+                  <a:ln>
+                    <a:noFill/>
+                  </a:ln>
+                  <a:solidFill>
+                    <a:srgbClr val="FFFFFF"/>
+                  </a:solidFill>
+                  <a:effectLst/>
+                  <a:uLnTx/>
+                  <a:uFillTx/>
+                  <a:latin typeface="Source Sans Pro" panose="020B0503030403020204" pitchFamily="34" charset="0"/>
+                  <a:ea typeface="Source Sans Pro" panose="020B0503030403020204" pitchFamily="34" charset="0"/>
+                </a:rPr>
+                <a:t>Report</a:t>
+              </a:r>
+            </a:p>
+          </p:txBody>
+        </p:sp>
+        <p:sp>
+          <p:nvSpPr>
+            <p:cNvPr id="42" name="TextBox 41">
+              <a:extLst>
+                <a:ext uri="{FF2B5EF4-FFF2-40B4-BE49-F238E27FC236}">
+                  <a16:creationId xmlns:a16="http://schemas.microsoft.com/office/drawing/2014/main" id="{D7BB75EF-A292-9FC1-3338-2DA4A0949934}"/>
+                </a:ext>
+              </a:extLst>
+            </p:cNvPr>
+            <p:cNvSpPr txBox="1"/>
+            <p:nvPr/>
+          </p:nvSpPr>
+          <p:spPr>
+            <a:xfrm rot="3674562">
+              <a:off x="287795" y="4653497"/>
+              <a:ext cx="1453896" cy="523220"/>
+            </a:xfrm>
+            <a:prstGeom prst="rect">
+              <a:avLst/>
+            </a:prstGeom>
+            <a:noFill/>
+          </p:spPr>
+          <p:txBody>
+            <a:bodyPr wrap="none" rtlCol="0">
+              <a:prstTxWarp prst="textArchDown">
+                <a:avLst/>
+              </a:prstTxWarp>
+              <a:spAutoFit/>
+            </a:bodyPr>
+            <a:lstStyle/>
+            <a:p>
+              <a:pPr marL="0" marR="0" lvl="0" indent="0" algn="ctr" defTabSz="914400" rtl="0" eaLnBrk="1" fontAlgn="auto" latinLnBrk="0" hangingPunct="1">
+                <a:lnSpc>
+                  <a:spcPct val="100000"/>
+                </a:lnSpc>
+                <a:spcBef>
+                  <a:spcPts val="0"/>
+                </a:spcBef>
+                <a:spcAft>
+                  <a:spcPts val="0"/>
+                </a:spcAft>
+                <a:buClrTx/>
+                <a:buSzTx/>
+                <a:buFontTx/>
+                <a:buNone/>
+                <a:tabLst/>
+                <a:defRPr/>
+              </a:pPr>
+              <a:r>
+                <a:rPr kumimoji="0" lang="en-US" b="1" i="0" u="none" strike="noStrike" kern="1200" cap="none" spc="0" normalizeH="0" baseline="0" noProof="0">
+                  <a:ln>
+                    <a:noFill/>
+                  </a:ln>
+                  <a:solidFill>
+                    <a:srgbClr val="FFFFFF"/>
+                  </a:solidFill>
+                  <a:effectLst/>
+                  <a:uLnTx/>
+                  <a:uFillTx/>
+                  <a:latin typeface="Source Sans Pro" panose="020B0503030403020204" pitchFamily="34" charset="0"/>
+                  <a:ea typeface="Source Sans Pro" panose="020B0503030403020204" pitchFamily="34" charset="0"/>
+                </a:rPr>
+                <a:t>Test</a:t>
+              </a:r>
+            </a:p>
+          </p:txBody>
+        </p:sp>
+        <p:sp>
+          <p:nvSpPr>
+            <p:cNvPr id="43" name="TextBox 42">
+              <a:extLst>
+                <a:ext uri="{FF2B5EF4-FFF2-40B4-BE49-F238E27FC236}">
+                  <a16:creationId xmlns:a16="http://schemas.microsoft.com/office/drawing/2014/main" id="{C5952BC8-D5B9-50B8-B826-4F7EE4101A0F}"/>
+                </a:ext>
+              </a:extLst>
+            </p:cNvPr>
+            <p:cNvSpPr txBox="1"/>
+            <p:nvPr/>
+          </p:nvSpPr>
+          <p:spPr>
+            <a:xfrm>
+              <a:off x="5103940" y="2961624"/>
+              <a:ext cx="1455847" cy="523220"/>
+            </a:xfrm>
+            <a:prstGeom prst="rect">
+              <a:avLst/>
+            </a:prstGeom>
+            <a:noFill/>
+          </p:spPr>
+          <p:txBody>
+            <a:bodyPr wrap="none" rtlCol="0">
+              <a:prstTxWarp prst="textArchUp">
+                <a:avLst/>
+              </a:prstTxWarp>
+              <a:spAutoFit/>
+            </a:bodyPr>
+            <a:lstStyle/>
+            <a:p>
+              <a:pPr marL="0" marR="0" lvl="0" indent="0" algn="ctr" defTabSz="914400" rtl="0" eaLnBrk="1" fontAlgn="auto" latinLnBrk="0" hangingPunct="1">
+                <a:lnSpc>
+                  <a:spcPct val="100000"/>
+                </a:lnSpc>
+                <a:spcBef>
+                  <a:spcPts val="0"/>
+                </a:spcBef>
+                <a:spcAft>
+                  <a:spcPts val="0"/>
+                </a:spcAft>
+                <a:buClrTx/>
+                <a:buSzTx/>
+                <a:buFontTx/>
+                <a:buNone/>
+                <a:tabLst/>
+                <a:defRPr/>
+              </a:pPr>
+              <a:r>
+                <a:rPr kumimoji="0" lang="en-US" b="1" i="0" u="none" strike="noStrike" kern="1200" cap="none" spc="0" normalizeH="0" baseline="0" noProof="0">
+                  <a:ln>
+                    <a:noFill/>
+                  </a:ln>
+                  <a:solidFill>
+                    <a:srgbClr val="FFFFFF"/>
+                  </a:solidFill>
+                  <a:effectLst/>
+                  <a:uLnTx/>
+                  <a:uFillTx/>
+                  <a:latin typeface="Source Sans Pro" panose="020B0503030403020204" pitchFamily="34" charset="0"/>
+                  <a:ea typeface="Source Sans Pro" panose="020B0503030403020204" pitchFamily="34" charset="0"/>
+                </a:rPr>
+                <a:t>Release</a:t>
+              </a:r>
+            </a:p>
+          </p:txBody>
+        </p:sp>
+        <p:sp>
+          <p:nvSpPr>
+            <p:cNvPr id="44" name="TextBox 43">
+              <a:extLst>
+                <a:ext uri="{FF2B5EF4-FFF2-40B4-BE49-F238E27FC236}">
+                  <a16:creationId xmlns:a16="http://schemas.microsoft.com/office/drawing/2014/main" id="{67D3E837-AD06-9DE5-5344-377C02A77B3E}"/>
+                </a:ext>
+              </a:extLst>
+            </p:cNvPr>
+            <p:cNvSpPr txBox="1"/>
+            <p:nvPr/>
+          </p:nvSpPr>
+          <p:spPr>
+            <a:xfrm rot="17849146">
+              <a:off x="6216226" y="4520797"/>
+              <a:ext cx="1453896" cy="701411"/>
+            </a:xfrm>
+            <a:prstGeom prst="rect">
+              <a:avLst/>
+            </a:prstGeom>
+            <a:noFill/>
+          </p:spPr>
+          <p:txBody>
+            <a:bodyPr wrap="none" rtlCol="0">
+              <a:prstTxWarp prst="textArchDown">
+                <a:avLst/>
+              </a:prstTxWarp>
+              <a:spAutoFit/>
+            </a:bodyPr>
+            <a:lstStyle/>
+            <a:p>
+              <a:pPr marL="0" marR="0" lvl="0" indent="0" algn="ctr" defTabSz="914400" rtl="0" eaLnBrk="1" fontAlgn="auto" latinLnBrk="0" hangingPunct="1">
+                <a:lnSpc>
+                  <a:spcPct val="100000"/>
+                </a:lnSpc>
+                <a:spcBef>
+                  <a:spcPts val="0"/>
+                </a:spcBef>
+                <a:spcAft>
+                  <a:spcPts val="0"/>
+                </a:spcAft>
+                <a:buClrTx/>
+                <a:buSzTx/>
+                <a:buFontTx/>
+                <a:buNone/>
+                <a:tabLst/>
+                <a:defRPr/>
+              </a:pPr>
+              <a:r>
+                <a:rPr kumimoji="0" lang="en-US" b="1" i="0" u="none" strike="noStrike" kern="1200" cap="none" spc="0" normalizeH="0" baseline="0" noProof="0">
+                  <a:ln>
+                    <a:noFill/>
+                  </a:ln>
+                  <a:solidFill>
+                    <a:srgbClr val="FFFFFF"/>
+                  </a:solidFill>
+                  <a:effectLst/>
+                  <a:uLnTx/>
+                  <a:uFillTx/>
+                  <a:latin typeface="Source Sans Pro" panose="020B0503030403020204" pitchFamily="34" charset="0"/>
+                  <a:ea typeface="Source Sans Pro" panose="020B0503030403020204" pitchFamily="34" charset="0"/>
+                </a:rPr>
+                <a:t>Run</a:t>
+              </a:r>
+            </a:p>
+          </p:txBody>
+        </p:sp>
+        <p:sp>
+          <p:nvSpPr>
+            <p:cNvPr id="45" name="TextBox 44">
+              <a:extLst>
+                <a:ext uri="{FF2B5EF4-FFF2-40B4-BE49-F238E27FC236}">
+                  <a16:creationId xmlns:a16="http://schemas.microsoft.com/office/drawing/2014/main" id="{21E710AA-350E-63FF-BF4D-696378FD74B2}"/>
+                </a:ext>
+              </a:extLst>
+            </p:cNvPr>
+            <p:cNvSpPr txBox="1"/>
+            <p:nvPr/>
+          </p:nvSpPr>
+          <p:spPr>
+            <a:xfrm rot="2582550">
+              <a:off x="4120130" y="5093087"/>
+              <a:ext cx="1569660" cy="523220"/>
+            </a:xfrm>
+            <a:prstGeom prst="rect">
+              <a:avLst/>
+            </a:prstGeom>
+            <a:noFill/>
+          </p:spPr>
+          <p:txBody>
+            <a:bodyPr wrap="none" rtlCol="0">
+              <a:prstTxWarp prst="textArchDown">
+                <a:avLst/>
+              </a:prstTxWarp>
+              <a:spAutoFit/>
+            </a:bodyPr>
+            <a:lstStyle/>
+            <a:p>
+              <a:pPr marL="0" marR="0" lvl="0" indent="0" algn="ctr" defTabSz="914400" rtl="0" eaLnBrk="1" fontAlgn="auto" latinLnBrk="0" hangingPunct="1">
+                <a:lnSpc>
+                  <a:spcPct val="100000"/>
+                </a:lnSpc>
+                <a:spcBef>
+                  <a:spcPts val="0"/>
+                </a:spcBef>
+                <a:spcAft>
+                  <a:spcPts val="0"/>
+                </a:spcAft>
+                <a:buClrTx/>
+                <a:buSzTx/>
+                <a:buFontTx/>
+                <a:buNone/>
+                <a:tabLst/>
+                <a:defRPr/>
+              </a:pPr>
+              <a:r>
+                <a:rPr kumimoji="0" lang="en-US" b="1" i="0" u="none" strike="noStrike" kern="1200" cap="none" spc="0" normalizeH="0" baseline="0" noProof="0">
+                  <a:ln>
+                    <a:noFill/>
+                  </a:ln>
+                  <a:solidFill>
+                    <a:srgbClr val="FFFFFF"/>
+                  </a:solidFill>
+                  <a:effectLst/>
+                  <a:uLnTx/>
+                  <a:uFillTx/>
+                  <a:latin typeface="Source Sans Pro" panose="020B0503030403020204" pitchFamily="34" charset="0"/>
+                  <a:ea typeface="Source Sans Pro" panose="020B0503030403020204" pitchFamily="34" charset="0"/>
+                </a:rPr>
+                <a:t>Monitor</a:t>
+              </a:r>
+            </a:p>
+          </p:txBody>
+        </p:sp>
+      </p:grpSp>
+      <p:sp>
+        <p:nvSpPr>
+          <p:cNvPr id="21" name="TextBox 20">
+            <a:extLst>
+              <a:ext uri="{FF2B5EF4-FFF2-40B4-BE49-F238E27FC236}">
+                <a16:creationId xmlns:a16="http://schemas.microsoft.com/office/drawing/2014/main" id="{ADCE2568-96DE-23F9-5494-077B1543B649}"/>
+              </a:ext>
+            </a:extLst>
+          </p:cNvPr>
+          <p:cNvSpPr txBox="1"/>
+          <p:nvPr/>
+        </p:nvSpPr>
+        <p:spPr>
+          <a:xfrm>
+            <a:off x="5847132" y="39665"/>
+            <a:ext cx="1627994" cy="307777"/>
+          </a:xfrm>
+          <a:prstGeom prst="rect">
+            <a:avLst/>
+          </a:prstGeom>
+          <a:noFill/>
+        </p:spPr>
+        <p:txBody>
+          <a:bodyPr wrap="square" rtlCol="0">
+            <a:spAutoFit/>
+          </a:bodyPr>
+          <a:lstStyle/>
+          <a:p>
+            <a:pPr marL="0" marR="0" lvl="0" indent="0" algn="ctr" defTabSz="914400" rtl="0" eaLnBrk="1" fontAlgn="auto" latinLnBrk="0" hangingPunct="1">
+              <a:lnSpc>
+                <a:spcPct val="100000"/>
+              </a:lnSpc>
+              <a:spcBef>
+                <a:spcPts val="0"/>
+              </a:spcBef>
+              <a:spcAft>
+                <a:spcPts val="0"/>
+              </a:spcAft>
+              <a:buClrTx/>
+              <a:buSzTx/>
+              <a:buFontTx/>
+              <a:buNone/>
+              <a:tabLst/>
+              <a:defRPr/>
+            </a:pPr>
+            <a:r>
+              <a:rPr kumimoji="0" lang="en-US" sz="1400" b="1" i="0" u="none" strike="noStrike" kern="1200" cap="none" spc="0" normalizeH="0" baseline="0" noProof="0">
+                <a:ln>
+                  <a:noFill/>
+                </a:ln>
+                <a:solidFill>
+                  <a:srgbClr val="C9BC9B">
+                    <a:lumMod val="75000"/>
+                  </a:srgbClr>
+                </a:solidFill>
+                <a:effectLst/>
+                <a:uLnTx/>
+                <a:uFillTx/>
+                <a:latin typeface="Source Sans Pro" panose="020B0503030403020204" pitchFamily="34" charset="0"/>
+                <a:ea typeface="Source Sans Pro" panose="020B0503030403020204" pitchFamily="34" charset="0"/>
+              </a:rPr>
+              <a:t>Current Release</a:t>
+            </a:r>
+          </a:p>
+        </p:txBody>
+      </p:sp>
+      <p:sp>
+        <p:nvSpPr>
+          <p:cNvPr id="22" name="TextBox 21">
+            <a:extLst>
+              <a:ext uri="{FF2B5EF4-FFF2-40B4-BE49-F238E27FC236}">
+                <a16:creationId xmlns:a16="http://schemas.microsoft.com/office/drawing/2014/main" id="{D2CCC2AE-F50C-3CF3-44F8-4B348CAD361D}"/>
+              </a:ext>
+            </a:extLst>
+          </p:cNvPr>
+          <p:cNvSpPr txBox="1"/>
+          <p:nvPr/>
+        </p:nvSpPr>
+        <p:spPr>
+          <a:xfrm>
+            <a:off x="102925" y="39665"/>
+            <a:ext cx="1386716" cy="307777"/>
+          </a:xfrm>
+          <a:prstGeom prst="rect">
+            <a:avLst/>
+          </a:prstGeom>
+          <a:noFill/>
+        </p:spPr>
+        <p:txBody>
+          <a:bodyPr wrap="square" rtlCol="0">
+            <a:spAutoFit/>
+          </a:bodyPr>
+          <a:lstStyle/>
+          <a:p>
+            <a:pPr marL="0" marR="0" lvl="0" indent="0" algn="ctr" defTabSz="914400" rtl="0" eaLnBrk="1" fontAlgn="auto" latinLnBrk="0" hangingPunct="1">
+              <a:lnSpc>
+                <a:spcPct val="100000"/>
+              </a:lnSpc>
+              <a:spcBef>
+                <a:spcPts val="0"/>
+              </a:spcBef>
+              <a:spcAft>
+                <a:spcPts val="0"/>
+              </a:spcAft>
+              <a:buClrTx/>
+              <a:buSzTx/>
+              <a:buFontTx/>
+              <a:buNone/>
+              <a:tabLst/>
+              <a:defRPr/>
+            </a:pPr>
+            <a:r>
+              <a:rPr kumimoji="0" lang="en-US" sz="1400" b="1" i="0" u="none" strike="noStrike" kern="1200" cap="none" spc="0" normalizeH="0" baseline="0" noProof="0">
+                <a:ln>
+                  <a:noFill/>
+                </a:ln>
+                <a:solidFill>
+                  <a:srgbClr val="C9BC9B">
+                    <a:lumMod val="75000"/>
+                  </a:srgbClr>
+                </a:solidFill>
+                <a:effectLst/>
+                <a:uLnTx/>
+                <a:uFillTx/>
+                <a:latin typeface="Source Sans Pro" panose="020B0503030403020204" pitchFamily="34" charset="0"/>
+                <a:ea typeface="Source Sans Pro" panose="020B0503030403020204" pitchFamily="34" charset="0"/>
+              </a:rPr>
+              <a:t>Draft Model</a:t>
+            </a:r>
+          </a:p>
+        </p:txBody>
+      </p:sp>
+      <p:sp>
+        <p:nvSpPr>
+          <p:cNvPr id="122" name="TextBox 121">
+            <a:extLst>
+              <a:ext uri="{FF2B5EF4-FFF2-40B4-BE49-F238E27FC236}">
+                <a16:creationId xmlns:a16="http://schemas.microsoft.com/office/drawing/2014/main" id="{6271B3B7-A3F8-C210-7148-C646F229E108}"/>
+              </a:ext>
+            </a:extLst>
+          </p:cNvPr>
+          <p:cNvSpPr txBox="1"/>
+          <p:nvPr/>
+        </p:nvSpPr>
+        <p:spPr>
+          <a:xfrm>
+            <a:off x="222676" y="223321"/>
+            <a:ext cx="2441813" cy="830997"/>
+          </a:xfrm>
+          <a:prstGeom prst="rect">
+            <a:avLst/>
+          </a:prstGeom>
+          <a:noFill/>
+        </p:spPr>
+        <p:txBody>
+          <a:bodyPr wrap="square" rtlCol="0">
+            <a:spAutoFit/>
+          </a:bodyPr>
+          <a:lstStyle/>
+          <a:p>
+            <a:pPr marL="0" marR="0" lvl="0" indent="0" algn="l" defTabSz="914400" rtl="0" eaLnBrk="1" fontAlgn="auto" latinLnBrk="0" hangingPunct="1">
+              <a:lnSpc>
+                <a:spcPct val="100000"/>
+              </a:lnSpc>
+              <a:spcBef>
+                <a:spcPts val="0"/>
+              </a:spcBef>
+              <a:spcAft>
+                <a:spcPts val="0"/>
+              </a:spcAft>
+              <a:buClrTx/>
+              <a:buSzTx/>
+              <a:buFontTx/>
+              <a:buNone/>
+              <a:tabLst/>
+              <a:defRPr/>
+            </a:pPr>
+            <a:r>
+              <a:rPr kumimoji="0" lang="en-US" sz="1200" b="0" i="0" u="none" strike="noStrike" kern="1200" cap="none" spc="0" normalizeH="0" baseline="0" noProof="0">
+                <a:ln>
+                  <a:noFill/>
+                </a:ln>
+                <a:solidFill>
+                  <a:srgbClr val="C9BC9B">
+                    <a:lumMod val="75000"/>
+                  </a:srgbClr>
+                </a:solidFill>
+                <a:effectLst/>
+                <a:uLnTx/>
+                <a:uFillTx/>
+                <a:latin typeface="Source Sans Pro" panose="020B0503030403020204" pitchFamily="34" charset="0"/>
+                <a:ea typeface="Source Sans Pro" panose="020B0503030403020204" pitchFamily="34" charset="0"/>
+              </a:rPr>
+              <a:t>1335 Reactions</a:t>
+            </a:r>
+          </a:p>
+          <a:p>
+            <a:pPr marL="0" marR="0" lvl="0" indent="0" algn="l" defTabSz="914400" rtl="0" eaLnBrk="1" fontAlgn="auto" latinLnBrk="0" hangingPunct="1">
+              <a:lnSpc>
+                <a:spcPct val="100000"/>
+              </a:lnSpc>
+              <a:spcBef>
+                <a:spcPts val="0"/>
+              </a:spcBef>
+              <a:spcAft>
+                <a:spcPts val="0"/>
+              </a:spcAft>
+              <a:buClrTx/>
+              <a:buSzTx/>
+              <a:buFontTx/>
+              <a:buNone/>
+              <a:tabLst/>
+              <a:defRPr/>
+            </a:pPr>
+            <a:r>
+              <a:rPr kumimoji="0" lang="en-US" sz="1200" b="0" i="0" u="none" strike="noStrike" kern="1200" cap="none" spc="0" normalizeH="0" baseline="0" noProof="0">
+                <a:ln>
+                  <a:noFill/>
+                </a:ln>
+                <a:solidFill>
+                  <a:srgbClr val="C9BC9B">
+                    <a:lumMod val="75000"/>
+                  </a:srgbClr>
+                </a:solidFill>
+                <a:effectLst/>
+                <a:uLnTx/>
+                <a:uFillTx/>
+                <a:latin typeface="Source Sans Pro" panose="020B0503030403020204" pitchFamily="34" charset="0"/>
+                <a:ea typeface="Source Sans Pro" panose="020B0503030403020204" pitchFamily="34" charset="0"/>
+              </a:rPr>
+              <a:t>1212 Metabolites</a:t>
+            </a:r>
+          </a:p>
+          <a:p>
+            <a:pPr marL="0" marR="0" lvl="0" indent="0" algn="l" defTabSz="914400" rtl="0" eaLnBrk="1" fontAlgn="auto" latinLnBrk="0" hangingPunct="1">
+              <a:lnSpc>
+                <a:spcPct val="100000"/>
+              </a:lnSpc>
+              <a:spcBef>
+                <a:spcPts val="0"/>
+              </a:spcBef>
+              <a:spcAft>
+                <a:spcPts val="0"/>
+              </a:spcAft>
+              <a:buClrTx/>
+              <a:buSzTx/>
+              <a:buFontTx/>
+              <a:buNone/>
+              <a:tabLst/>
+              <a:defRPr/>
+            </a:pPr>
+            <a:r>
+              <a:rPr kumimoji="0" lang="en-US" sz="1200" b="0" i="0" u="none" strike="noStrike" kern="1200" cap="none" spc="0" normalizeH="0" baseline="0" noProof="0">
+                <a:ln>
+                  <a:noFill/>
+                </a:ln>
+                <a:solidFill>
+                  <a:srgbClr val="C9BC9B">
+                    <a:lumMod val="75000"/>
+                  </a:srgbClr>
+                </a:solidFill>
+                <a:effectLst/>
+                <a:uLnTx/>
+                <a:uFillTx/>
+                <a:latin typeface="Source Sans Pro" panose="020B0503030403020204" pitchFamily="34" charset="0"/>
+                <a:ea typeface="Source Sans Pro" panose="020B0503030403020204" pitchFamily="34" charset="0"/>
+              </a:rPr>
+              <a:t>942 Genes</a:t>
+            </a:r>
+          </a:p>
+          <a:p>
+            <a:pPr marL="0" marR="0" lvl="0" indent="0" algn="l" defTabSz="914400" rtl="0" eaLnBrk="1" fontAlgn="auto" latinLnBrk="0" hangingPunct="1">
+              <a:lnSpc>
+                <a:spcPct val="100000"/>
+              </a:lnSpc>
+              <a:spcBef>
+                <a:spcPts val="0"/>
+              </a:spcBef>
+              <a:spcAft>
+                <a:spcPts val="0"/>
+              </a:spcAft>
+              <a:buClrTx/>
+              <a:buSzTx/>
+              <a:buFontTx/>
+              <a:buNone/>
+              <a:tabLst/>
+              <a:defRPr/>
+            </a:pPr>
+            <a:r>
+              <a:rPr lang="en-US" sz="1200">
+                <a:solidFill>
+                  <a:srgbClr val="C9BC9B">
+                    <a:lumMod val="75000"/>
+                  </a:srgbClr>
+                </a:solidFill>
+                <a:latin typeface="Source Sans Pro" panose="020B0503030403020204" pitchFamily="34" charset="0"/>
+                <a:ea typeface="Source Sans Pro" panose="020B0503030403020204" pitchFamily="34" charset="0"/>
+              </a:rPr>
+              <a:t>19/52 Phenotypes Match</a:t>
+            </a:r>
+            <a:endParaRPr kumimoji="0" lang="en-US" sz="1200" b="0" i="0" u="none" strike="noStrike" kern="1200" cap="none" spc="0" normalizeH="0" baseline="0" noProof="0">
+              <a:ln>
+                <a:noFill/>
+              </a:ln>
+              <a:solidFill>
+                <a:srgbClr val="C9BC9B">
+                  <a:lumMod val="75000"/>
+                </a:srgbClr>
+              </a:solidFill>
+              <a:effectLst/>
+              <a:uLnTx/>
+              <a:uFillTx/>
+              <a:latin typeface="Source Sans Pro" panose="020B0503030403020204" pitchFamily="34" charset="0"/>
+              <a:ea typeface="Source Sans Pro" panose="020B0503030403020204" pitchFamily="34" charset="0"/>
+            </a:endParaRPr>
+          </a:p>
+        </p:txBody>
+      </p:sp>
+      <p:sp>
+        <p:nvSpPr>
+          <p:cNvPr id="123" name="TextBox 122">
+            <a:extLst>
+              <a:ext uri="{FF2B5EF4-FFF2-40B4-BE49-F238E27FC236}">
+                <a16:creationId xmlns:a16="http://schemas.microsoft.com/office/drawing/2014/main" id="{694B881A-76E0-81FD-950E-54217A2B76C1}"/>
+              </a:ext>
+            </a:extLst>
+          </p:cNvPr>
+          <p:cNvSpPr txBox="1"/>
+          <p:nvPr/>
+        </p:nvSpPr>
+        <p:spPr>
+          <a:xfrm>
+            <a:off x="5955159" y="223321"/>
+            <a:ext cx="1873736" cy="830997"/>
+          </a:xfrm>
+          <a:prstGeom prst="rect">
+            <a:avLst/>
+          </a:prstGeom>
+          <a:noFill/>
+        </p:spPr>
+        <p:txBody>
+          <a:bodyPr wrap="square" rtlCol="0">
+            <a:spAutoFit/>
+          </a:bodyPr>
+          <a:lstStyle/>
+          <a:p>
+            <a:pPr marL="0" marR="0" lvl="0" indent="0" algn="l" defTabSz="914400" rtl="0" eaLnBrk="1" fontAlgn="auto" latinLnBrk="0" hangingPunct="1">
+              <a:lnSpc>
+                <a:spcPct val="100000"/>
+              </a:lnSpc>
+              <a:spcBef>
+                <a:spcPts val="0"/>
+              </a:spcBef>
+              <a:spcAft>
+                <a:spcPts val="0"/>
+              </a:spcAft>
+              <a:buClrTx/>
+              <a:buSzTx/>
+              <a:buFontTx/>
+              <a:buNone/>
+              <a:tabLst/>
+              <a:defRPr/>
+            </a:pPr>
+            <a:r>
+              <a:rPr kumimoji="0" lang="en-US" sz="1200" b="0" i="0" u="none" strike="noStrike" kern="1200" cap="none" spc="0" normalizeH="0" baseline="0" noProof="0">
+                <a:ln>
+                  <a:noFill/>
+                </a:ln>
+                <a:solidFill>
+                  <a:srgbClr val="C9BC9B">
+                    <a:lumMod val="75000"/>
+                  </a:srgbClr>
+                </a:solidFill>
+                <a:effectLst/>
+                <a:uLnTx/>
+                <a:uFillTx/>
+                <a:latin typeface="Source Sans Pro" panose="020B0503030403020204" pitchFamily="34" charset="0"/>
+                <a:ea typeface="Source Sans Pro" panose="020B0503030403020204" pitchFamily="34" charset="0"/>
+              </a:rPr>
+              <a:t>1410 Reactions</a:t>
+            </a:r>
+          </a:p>
+          <a:p>
+            <a:pPr marL="0" marR="0" lvl="0" indent="0" algn="l" defTabSz="914400" rtl="0" eaLnBrk="1" fontAlgn="auto" latinLnBrk="0" hangingPunct="1">
+              <a:lnSpc>
+                <a:spcPct val="100000"/>
+              </a:lnSpc>
+              <a:spcBef>
+                <a:spcPts val="0"/>
+              </a:spcBef>
+              <a:spcAft>
+                <a:spcPts val="0"/>
+              </a:spcAft>
+              <a:buClrTx/>
+              <a:buSzTx/>
+              <a:buFontTx/>
+              <a:buNone/>
+              <a:tabLst/>
+              <a:defRPr/>
+            </a:pPr>
+            <a:r>
+              <a:rPr kumimoji="0" lang="en-US" sz="1200" b="0" i="0" u="none" strike="noStrike" kern="1200" cap="none" spc="0" normalizeH="0" baseline="0" noProof="0">
+                <a:ln>
+                  <a:noFill/>
+                </a:ln>
+                <a:solidFill>
+                  <a:srgbClr val="C9BC9B">
+                    <a:lumMod val="75000"/>
+                  </a:srgbClr>
+                </a:solidFill>
+                <a:effectLst/>
+                <a:uLnTx/>
+                <a:uFillTx/>
+                <a:latin typeface="Source Sans Pro" panose="020B0503030403020204" pitchFamily="34" charset="0"/>
+                <a:ea typeface="Source Sans Pro" panose="020B0503030403020204" pitchFamily="34" charset="0"/>
+              </a:rPr>
+              <a:t>1229 Metabolites</a:t>
+            </a:r>
+          </a:p>
+          <a:p>
+            <a:pPr marL="0" marR="0" lvl="0" indent="0" algn="l" defTabSz="914400" rtl="0" eaLnBrk="1" fontAlgn="auto" latinLnBrk="0" hangingPunct="1">
+              <a:lnSpc>
+                <a:spcPct val="100000"/>
+              </a:lnSpc>
+              <a:spcBef>
+                <a:spcPts val="0"/>
+              </a:spcBef>
+              <a:spcAft>
+                <a:spcPts val="0"/>
+              </a:spcAft>
+              <a:buClrTx/>
+              <a:buSzTx/>
+              <a:buFontTx/>
+              <a:buNone/>
+              <a:tabLst/>
+              <a:defRPr/>
+            </a:pPr>
+            <a:r>
+              <a:rPr kumimoji="0" lang="en-US" sz="1200" b="0" i="0" u="none" strike="noStrike" kern="1200" cap="none" spc="0" normalizeH="0" baseline="0" noProof="0">
+                <a:ln>
+                  <a:noFill/>
+                </a:ln>
+                <a:solidFill>
+                  <a:srgbClr val="C9BC9B">
+                    <a:lumMod val="75000"/>
+                  </a:srgbClr>
+                </a:solidFill>
+                <a:effectLst/>
+                <a:uLnTx/>
+                <a:uFillTx/>
+                <a:latin typeface="Source Sans Pro" panose="020B0503030403020204" pitchFamily="34" charset="0"/>
+                <a:ea typeface="Source Sans Pro" panose="020B0503030403020204" pitchFamily="34" charset="0"/>
+              </a:rPr>
+              <a:t>1062 Genes</a:t>
+            </a:r>
+          </a:p>
+          <a:p>
+            <a:pPr marL="0" marR="0" lvl="0" indent="0" algn="l" defTabSz="914400" rtl="0" eaLnBrk="1" fontAlgn="auto" latinLnBrk="0" hangingPunct="1">
+              <a:lnSpc>
+                <a:spcPct val="100000"/>
+              </a:lnSpc>
+              <a:spcBef>
+                <a:spcPts val="0"/>
+              </a:spcBef>
+              <a:spcAft>
+                <a:spcPts val="0"/>
+              </a:spcAft>
+              <a:buClrTx/>
+              <a:buSzTx/>
+              <a:buFontTx/>
+              <a:buNone/>
+              <a:tabLst/>
+              <a:defRPr/>
+            </a:pPr>
+            <a:r>
+              <a:rPr lang="en-US" sz="1200">
+                <a:solidFill>
+                  <a:srgbClr val="C9BC9B">
+                    <a:lumMod val="75000"/>
+                  </a:srgbClr>
+                </a:solidFill>
+                <a:latin typeface="Source Sans Pro" panose="020B0503030403020204" pitchFamily="34" charset="0"/>
+                <a:ea typeface="Source Sans Pro" panose="020B0503030403020204" pitchFamily="34" charset="0"/>
+              </a:rPr>
+              <a:t>49/52 Phenotypes Match</a:t>
+            </a:r>
+            <a:endParaRPr kumimoji="0" lang="en-US" sz="1200" b="0" i="0" u="none" strike="noStrike" kern="1200" cap="none" spc="0" normalizeH="0" baseline="0" noProof="0">
+              <a:ln>
+                <a:noFill/>
+              </a:ln>
+              <a:solidFill>
+                <a:srgbClr val="C9BC9B">
+                  <a:lumMod val="75000"/>
+                </a:srgbClr>
+              </a:solidFill>
+              <a:effectLst/>
+              <a:uLnTx/>
+              <a:uFillTx/>
+              <a:latin typeface="Source Sans Pro" panose="020B0503030403020204" pitchFamily="34" charset="0"/>
+              <a:ea typeface="Source Sans Pro" panose="020B0503030403020204" pitchFamily="34" charset="0"/>
+            </a:endParaRPr>
+          </a:p>
+        </p:txBody>
+      </p:sp>
+      <p:graphicFrame>
+        <p:nvGraphicFramePr>
+          <p:cNvPr id="124" name="Table 123">
+            <a:extLst>
+              <a:ext uri="{FF2B5EF4-FFF2-40B4-BE49-F238E27FC236}">
+                <a16:creationId xmlns:a16="http://schemas.microsoft.com/office/drawing/2014/main" id="{EF86AD4D-FBEA-E549-7FE9-72F78A0321FD}"/>
+              </a:ext>
+            </a:extLst>
+          </p:cNvPr>
+          <p:cNvGraphicFramePr>
+            <a:graphicFrameLocks noGrp="1"/>
+          </p:cNvGraphicFramePr>
+          <p:nvPr/>
+        </p:nvGraphicFramePr>
+        <p:xfrm>
+          <a:off x="604074" y="1345637"/>
+          <a:ext cx="1113628" cy="844884"/>
+        </p:xfrm>
+        <a:graphic>
+          <a:graphicData uri="http://schemas.openxmlformats.org/drawingml/2006/table">
+            <a:tbl>
+              <a:tblPr>
+                <a:tableStyleId>{5C22544A-7EE6-4342-B048-85BDC9FD1C3A}</a:tableStyleId>
+              </a:tblPr>
+              <a:tblGrid>
+                <a:gridCol w="231372">
+                  <a:extLst>
+                    <a:ext uri="{9D8B030D-6E8A-4147-A177-3AD203B41FA5}">
+                      <a16:colId xmlns:a16="http://schemas.microsoft.com/office/drawing/2014/main" val="3069144988"/>
+                    </a:ext>
+                  </a:extLst>
+                </a:gridCol>
+                <a:gridCol w="231372">
+                  <a:extLst>
+                    <a:ext uri="{9D8B030D-6E8A-4147-A177-3AD203B41FA5}">
+                      <a16:colId xmlns:a16="http://schemas.microsoft.com/office/drawing/2014/main" val="2983537412"/>
+                    </a:ext>
+                  </a:extLst>
+                </a:gridCol>
+                <a:gridCol w="328930">
+                  <a:extLst>
+                    <a:ext uri="{9D8B030D-6E8A-4147-A177-3AD203B41FA5}">
+                      <a16:colId xmlns:a16="http://schemas.microsoft.com/office/drawing/2014/main" val="2728058984"/>
+                    </a:ext>
+                  </a:extLst>
+                </a:gridCol>
+                <a:gridCol w="321954">
+                  <a:extLst>
+                    <a:ext uri="{9D8B030D-6E8A-4147-A177-3AD203B41FA5}">
+                      <a16:colId xmlns:a16="http://schemas.microsoft.com/office/drawing/2014/main" val="1193380528"/>
+                    </a:ext>
+                  </a:extLst>
+                </a:gridCol>
+              </a:tblGrid>
+              <a:tr h="182880">
+                <a:tc>
+                  <a:txBody>
+                    <a:bodyPr/>
+                    <a:lstStyle/>
+                    <a:p>
+                      <a:endParaRPr lang="en-US" sz="1200">
+                        <a:solidFill>
+                          <a:schemeClr val="tx2">
+                            <a:lumMod val="75000"/>
+                          </a:schemeClr>
+                        </a:solidFill>
+                      </a:endParaRPr>
+                    </a:p>
+                  </a:txBody>
+                  <a:tcPr marT="0" marB="0">
+                    <a:lnR w="12700" cap="flat" cmpd="sng" algn="ctr">
+                      <a:solidFill>
+                        <a:schemeClr val="bg1"/>
+                      </a:solidFill>
+                      <a:prstDash val="solid"/>
+                      <a:round/>
+                      <a:headEnd type="none" w="med" len="med"/>
+                      <a:tailEnd type="none" w="med" len="med"/>
+                    </a:lnR>
+                    <a:lnB w="12700" cap="flat" cmpd="sng" algn="ctr">
+                      <a:solidFill>
+                        <a:schemeClr val="bg1"/>
+                      </a:solidFill>
+                      <a:prstDash val="solid"/>
+                      <a:round/>
+                      <a:headEnd type="none" w="med" len="med"/>
+                      <a:tailEnd type="none" w="med" len="med"/>
+                    </a:lnB>
+                    <a:noFill/>
+                  </a:tcPr>
+                </a:tc>
+                <a:tc>
+                  <a:txBody>
+                    <a:bodyPr/>
+                    <a:lstStyle/>
+                    <a:p>
+                      <a:endParaRPr lang="en-US" sz="1200">
+                        <a:solidFill>
+                          <a:schemeClr val="tx2">
+                            <a:lumMod val="75000"/>
+                          </a:schemeClr>
+                        </a:solidFill>
+                      </a:endParaRPr>
+                    </a:p>
+                  </a:txBody>
+                  <a:tcPr marT="0" marB="0">
+                    <a:lnL w="12700" cap="flat" cmpd="sng" algn="ctr">
+                      <a:solidFill>
+                        <a:schemeClr val="bg1"/>
+                      </a:solidFill>
+                      <a:prstDash val="solid"/>
+                      <a:round/>
+                      <a:headEnd type="none" w="med" len="med"/>
+                      <a:tailEnd type="none" w="med" len="med"/>
+                    </a:lnL>
+                    <a:lnR w="12700" cap="flat" cmpd="sng" algn="ctr">
+                      <a:solidFill>
+                        <a:schemeClr val="bg1"/>
+                      </a:solidFill>
+                      <a:prstDash val="solid"/>
+                      <a:round/>
+                      <a:headEnd type="none" w="med" len="med"/>
+                      <a:tailEnd type="none" w="med" len="med"/>
+                    </a:lnR>
+                    <a:lnB w="12700" cap="flat" cmpd="sng" algn="ctr">
+                      <a:solidFill>
+                        <a:schemeClr val="bg1"/>
+                      </a:solidFill>
+                      <a:prstDash val="solid"/>
+                      <a:round/>
+                      <a:headEnd type="none" w="med" len="med"/>
+                      <a:tailEnd type="none" w="med" len="med"/>
+                    </a:lnB>
+                    <a:noFill/>
+                  </a:tcPr>
+                </a:tc>
+                <a:tc gridSpan="2">
+                  <a:txBody>
+                    <a:bodyPr/>
+                    <a:lstStyle/>
+                    <a:p>
+                      <a:pPr algn="ctr"/>
+                      <a:r>
+                        <a:rPr lang="en-US" sz="1200">
+                          <a:solidFill>
+                            <a:schemeClr val="tx2">
+                              <a:lumMod val="75000"/>
+                            </a:schemeClr>
+                          </a:solidFill>
+                        </a:rPr>
+                        <a:t>Pred.</a:t>
+                      </a:r>
+                    </a:p>
+                  </a:txBody>
+                  <a:tcPr marT="0" marB="0">
+                    <a:lnL w="12700" cap="flat" cmpd="sng" algn="ctr">
+                      <a:solidFill>
+                        <a:schemeClr val="bg1"/>
+                      </a:solidFill>
+                      <a:prstDash val="solid"/>
+                      <a:round/>
+                      <a:headEnd type="none" w="med" len="med"/>
+                      <a:tailEnd type="none" w="med" len="med"/>
+                    </a:lnL>
+                    <a:lnB w="12700" cap="flat" cmpd="sng" algn="ctr">
+                      <a:solidFill>
+                        <a:schemeClr val="bg1"/>
+                      </a:solidFill>
+                      <a:prstDash val="solid"/>
+                      <a:round/>
+                      <a:headEnd type="none" w="med" len="med"/>
+                      <a:tailEnd type="none" w="med" len="med"/>
+                    </a:lnB>
+                    <a:noFill/>
+                  </a:tcPr>
+                </a:tc>
+                <a:tc hMerge="1">
+                  <a:txBody>
+                    <a:bodyPr/>
+                    <a:lstStyle/>
+                    <a:p>
+                      <a:endParaRPr lang="en-US"/>
+                    </a:p>
+                  </a:txBody>
+                  <a:tcPr/>
+                </a:tc>
+                <a:extLst>
+                  <a:ext uri="{0D108BD9-81ED-4DB2-BD59-A6C34878D82A}">
+                    <a16:rowId xmlns:a16="http://schemas.microsoft.com/office/drawing/2014/main" val="3273843125"/>
+                  </a:ext>
+                </a:extLst>
+              </a:tr>
+              <a:tr h="182880">
+                <a:tc>
+                  <a:txBody>
+                    <a:bodyPr/>
+                    <a:lstStyle/>
+                    <a:p>
+                      <a:endParaRPr lang="en-US" sz="1200">
+                        <a:solidFill>
+                          <a:schemeClr val="tx2">
+                            <a:lumMod val="75000"/>
+                          </a:schemeClr>
+                        </a:solidFill>
+                      </a:endParaRPr>
+                    </a:p>
+                  </a:txBody>
+                  <a:tcPr marT="0" marB="0">
+                    <a:lnR w="12700" cap="flat" cmpd="sng" algn="ctr">
+                      <a:solidFill>
+                        <a:schemeClr val="bg1"/>
+                      </a:solidFill>
+                      <a:prstDash val="solid"/>
+                      <a:round/>
+                      <a:headEnd type="none" w="med" len="med"/>
+                      <a:tailEnd type="none" w="med" len="med"/>
+                    </a:lnR>
+                    <a:lnT w="12700" cap="flat" cmpd="sng" algn="ctr">
+                      <a:solidFill>
+                        <a:schemeClr val="bg1"/>
+                      </a:solidFill>
+                      <a:prstDash val="solid"/>
+                      <a:round/>
+                      <a:headEnd type="none" w="med" len="med"/>
+                      <a:tailEnd type="none" w="med" len="med"/>
+                    </a:lnT>
+                    <a:lnB w="12700" cap="flat" cmpd="sng" algn="ctr">
+                      <a:solidFill>
+                        <a:schemeClr val="bg1"/>
+                      </a:solidFill>
+                      <a:prstDash val="solid"/>
+                      <a:round/>
+                      <a:headEnd type="none" w="med" len="med"/>
+                      <a:tailEnd type="none" w="med" len="med"/>
+                    </a:lnB>
+                    <a:noFill/>
+                  </a:tcPr>
+                </a:tc>
+                <a:tc>
+                  <a:txBody>
+                    <a:bodyPr/>
+                    <a:lstStyle/>
+                    <a:p>
+                      <a:endParaRPr lang="en-US" sz="1200">
+                        <a:solidFill>
+                          <a:schemeClr val="tx2">
+                            <a:lumMod val="75000"/>
+                          </a:schemeClr>
+                        </a:solidFill>
+                      </a:endParaRPr>
+                    </a:p>
+                  </a:txBody>
+                  <a:tcPr marT="0" marB="0">
+                    <a:lnL w="12700" cap="flat" cmpd="sng" algn="ctr">
+                      <a:solidFill>
+                        <a:schemeClr val="bg1"/>
+                      </a:solidFill>
+                      <a:prstDash val="solid"/>
+                      <a:round/>
+                      <a:headEnd type="none" w="med" len="med"/>
+                      <a:tailEnd type="none" w="med" len="med"/>
+                    </a:lnL>
+                    <a:lnR w="12700" cap="flat" cmpd="sng" algn="ctr">
+                      <a:solidFill>
+                        <a:schemeClr val="bg1"/>
+                      </a:solidFill>
+                      <a:prstDash val="solid"/>
+                      <a:round/>
+                      <a:headEnd type="none" w="med" len="med"/>
+                      <a:tailEnd type="none" w="med" len="med"/>
+                    </a:lnR>
+                    <a:lnT w="12700" cap="flat" cmpd="sng" algn="ctr">
+                      <a:solidFill>
+                        <a:schemeClr val="bg1"/>
+                      </a:solidFill>
+                      <a:prstDash val="solid"/>
+                      <a:round/>
+                      <a:headEnd type="none" w="med" len="med"/>
+                      <a:tailEnd type="none" w="med" len="med"/>
+                    </a:lnT>
+                    <a:lnB w="12700" cap="flat" cmpd="sng" algn="ctr">
+                      <a:solidFill>
+                        <a:schemeClr val="bg1"/>
+                      </a:solidFill>
+                      <a:prstDash val="solid"/>
+                      <a:round/>
+                      <a:headEnd type="none" w="med" len="med"/>
+                      <a:tailEnd type="none" w="med" len="med"/>
+                    </a:lnB>
+                    <a:noFill/>
+                  </a:tcPr>
+                </a:tc>
+                <a:tc>
+                  <a:txBody>
+                    <a:bodyPr/>
+                    <a:lstStyle/>
+                    <a:p>
+                      <a:pPr algn="ctr"/>
+                      <a:r>
+                        <a:rPr lang="en-US" sz="1200">
+                          <a:solidFill>
+                            <a:schemeClr val="tx2">
+                              <a:lumMod val="75000"/>
+                            </a:schemeClr>
+                          </a:solidFill>
+                        </a:rPr>
+                        <a:t>+</a:t>
+                      </a:r>
+                    </a:p>
+                  </a:txBody>
+                  <a:tcPr marT="0" marB="0">
+                    <a:lnL w="12700" cap="flat" cmpd="sng" algn="ctr">
+                      <a:solidFill>
+                        <a:schemeClr val="bg1"/>
+                      </a:solidFill>
+                      <a:prstDash val="solid"/>
+                      <a:round/>
+                      <a:headEnd type="none" w="med" len="med"/>
+                      <a:tailEnd type="none" w="med" len="med"/>
+                    </a:lnL>
+                    <a:lnR w="12700" cap="flat" cmpd="sng" algn="ctr">
+                      <a:solidFill>
+                        <a:schemeClr val="tx2"/>
+                      </a:solidFill>
+                      <a:prstDash val="solid"/>
+                      <a:round/>
+                      <a:headEnd type="none" w="med" len="med"/>
+                      <a:tailEnd type="none" w="med" len="med"/>
+                    </a:lnR>
+                    <a:lnT w="12700" cap="flat" cmpd="sng" algn="ctr">
+                      <a:solidFill>
+                        <a:schemeClr val="bg1"/>
+                      </a:solidFill>
+                      <a:prstDash val="solid"/>
+                      <a:round/>
+                      <a:headEnd type="none" w="med" len="med"/>
+                      <a:tailEnd type="none" w="med" len="med"/>
+                    </a:lnT>
+                    <a:lnB w="12700" cap="flat" cmpd="sng" algn="ctr">
+                      <a:solidFill>
+                        <a:schemeClr val="tx2"/>
+                      </a:solidFill>
+                      <a:prstDash val="solid"/>
+                      <a:round/>
+                      <a:headEnd type="none" w="med" len="med"/>
+                      <a:tailEnd type="none" w="med" len="med"/>
+                    </a:lnB>
+                    <a:noFill/>
+                  </a:tcPr>
+                </a:tc>
+                <a:tc>
+                  <a:txBody>
+                    <a:bodyPr/>
+                    <a:lstStyle/>
+                    <a:p>
+                      <a:pPr algn="ctr"/>
+                      <a:r>
+                        <a:rPr lang="en-US" sz="1200">
+                          <a:solidFill>
+                            <a:schemeClr val="tx2">
+                              <a:lumMod val="75000"/>
+                            </a:schemeClr>
+                          </a:solidFill>
+                        </a:rPr>
+                        <a:t>-</a:t>
+                      </a:r>
+                    </a:p>
+                  </a:txBody>
+                  <a:tcPr marT="0" marB="0">
+                    <a:lnL w="12700" cap="flat" cmpd="sng" algn="ctr">
+                      <a:solidFill>
+                        <a:schemeClr val="tx2"/>
+                      </a:solidFill>
+                      <a:prstDash val="solid"/>
+                      <a:round/>
+                      <a:headEnd type="none" w="med" len="med"/>
+                      <a:tailEnd type="none" w="med" len="med"/>
+                    </a:lnL>
+                    <a:lnT w="12700" cap="flat" cmpd="sng" algn="ctr">
+                      <a:solidFill>
+                        <a:schemeClr val="bg1"/>
+                      </a:solidFill>
+                      <a:prstDash val="solid"/>
+                      <a:round/>
+                      <a:headEnd type="none" w="med" len="med"/>
+                      <a:tailEnd type="none" w="med" len="med"/>
+                    </a:lnT>
+                    <a:lnB w="12700" cap="flat" cmpd="sng" algn="ctr">
+                      <a:solidFill>
+                        <a:schemeClr val="tx2"/>
+                      </a:solidFill>
+                      <a:prstDash val="solid"/>
+                      <a:round/>
+                      <a:headEnd type="none" w="med" len="med"/>
+                      <a:tailEnd type="none" w="med" len="med"/>
+                    </a:lnB>
+                    <a:noFill/>
+                  </a:tcPr>
+                </a:tc>
+                <a:extLst>
+                  <a:ext uri="{0D108BD9-81ED-4DB2-BD59-A6C34878D82A}">
+                    <a16:rowId xmlns:a16="http://schemas.microsoft.com/office/drawing/2014/main" val="1235086787"/>
+                  </a:ext>
+                </a:extLst>
+              </a:tr>
+              <a:tr h="239562">
+                <a:tc rowSpan="2">
+                  <a:txBody>
+                    <a:bodyPr/>
+                    <a:lstStyle/>
+                    <a:p>
+                      <a:pPr algn="ctr"/>
+                      <a:r>
+                        <a:rPr lang="en-US" sz="1200">
+                          <a:solidFill>
+                            <a:schemeClr val="tx2">
+                              <a:lumMod val="75000"/>
+                            </a:schemeClr>
+                          </a:solidFill>
+                        </a:rPr>
+                        <a:t>Exp.</a:t>
+                      </a:r>
+                    </a:p>
+                  </a:txBody>
+                  <a:tcPr marL="0" marR="0" vert="vert270">
+                    <a:lnR w="12700" cap="flat" cmpd="sng" algn="ctr">
+                      <a:solidFill>
+                        <a:schemeClr val="bg1"/>
+                      </a:solidFill>
+                      <a:prstDash val="solid"/>
+                      <a:round/>
+                      <a:headEnd type="none" w="med" len="med"/>
+                      <a:tailEnd type="none" w="med" len="med"/>
+                    </a:lnR>
+                    <a:lnT w="12700" cap="flat" cmpd="sng" algn="ctr">
+                      <a:solidFill>
+                        <a:schemeClr val="bg1"/>
+                      </a:solidFill>
+                      <a:prstDash val="solid"/>
+                      <a:round/>
+                      <a:headEnd type="none" w="med" len="med"/>
+                      <a:tailEnd type="none" w="med" len="med"/>
+                    </a:lnT>
+                    <a:noFill/>
+                  </a:tcPr>
+                </a:tc>
+                <a:tc>
+                  <a:txBody>
+                    <a:bodyPr/>
+                    <a:lstStyle/>
+                    <a:p>
+                      <a:pPr algn="ctr"/>
+                      <a:r>
+                        <a:rPr lang="en-US" sz="1200">
+                          <a:solidFill>
+                            <a:schemeClr val="tx2">
+                              <a:lumMod val="75000"/>
+                            </a:schemeClr>
+                          </a:solidFill>
+                        </a:rPr>
+                        <a:t>+</a:t>
+                      </a:r>
+                    </a:p>
+                  </a:txBody>
+                  <a:tcPr marL="0" marR="0" vert="vert270">
+                    <a:lnL w="12700" cap="flat" cmpd="sng" algn="ctr">
+                      <a:solidFill>
+                        <a:schemeClr val="bg1"/>
+                      </a:solidFill>
+                      <a:prstDash val="solid"/>
+                      <a:round/>
+                      <a:headEnd type="none" w="med" len="med"/>
+                      <a:tailEnd type="none" w="med" len="med"/>
+                    </a:lnL>
+                    <a:lnR w="12700" cap="flat" cmpd="sng" algn="ctr">
+                      <a:solidFill>
+                        <a:schemeClr val="tx2"/>
+                      </a:solidFill>
+                      <a:prstDash val="solid"/>
+                      <a:round/>
+                      <a:headEnd type="none" w="med" len="med"/>
+                      <a:tailEnd type="none" w="med" len="med"/>
+                    </a:lnR>
+                    <a:lnT w="12700" cap="flat" cmpd="sng" algn="ctr">
+                      <a:solidFill>
+                        <a:schemeClr val="bg1"/>
+                      </a:solidFill>
+                      <a:prstDash val="solid"/>
+                      <a:round/>
+                      <a:headEnd type="none" w="med" len="med"/>
+                      <a:tailEnd type="none" w="med" len="med"/>
+                    </a:lnT>
+                    <a:lnB w="12700" cap="flat" cmpd="sng" algn="ctr">
+                      <a:solidFill>
+                        <a:schemeClr val="tx2"/>
+                      </a:solidFill>
+                      <a:prstDash val="solid"/>
+                      <a:round/>
+                      <a:headEnd type="none" w="med" len="med"/>
+                      <a:tailEnd type="none" w="med" len="med"/>
+                    </a:lnB>
+                    <a:noFill/>
+                  </a:tcPr>
+                </a:tc>
+                <a:tc>
+                  <a:txBody>
+                    <a:bodyPr/>
+                    <a:lstStyle/>
+                    <a:p>
+                      <a:pPr algn="ctr"/>
+                      <a:r>
+                        <a:rPr lang="en-US" sz="1200">
+                          <a:solidFill>
+                            <a:schemeClr val="tx2">
+                              <a:lumMod val="75000"/>
+                            </a:schemeClr>
+                          </a:solidFill>
+                        </a:rPr>
+                        <a:t>0</a:t>
+                      </a:r>
+                    </a:p>
+                  </a:txBody>
+                  <a:tcPr marL="0" marR="0" marT="0" marB="0" anchor="ctr">
+                    <a:lnL w="12700" cap="flat" cmpd="sng" algn="ctr">
+                      <a:solidFill>
+                        <a:schemeClr val="tx2"/>
+                      </a:solidFill>
+                      <a:prstDash val="solid"/>
+                      <a:round/>
+                      <a:headEnd type="none" w="med" len="med"/>
+                      <a:tailEnd type="none" w="med" len="med"/>
+                    </a:lnL>
+                    <a:lnR w="12700" cap="flat" cmpd="sng" algn="ctr">
+                      <a:solidFill>
+                        <a:schemeClr val="tx2"/>
+                      </a:solidFill>
+                      <a:prstDash val="solid"/>
+                      <a:round/>
+                      <a:headEnd type="none" w="med" len="med"/>
+                      <a:tailEnd type="none" w="med" len="med"/>
+                    </a:lnR>
+                    <a:lnT w="12700" cap="flat" cmpd="sng" algn="ctr">
+                      <a:solidFill>
+                        <a:schemeClr val="tx2"/>
+                      </a:solidFill>
+                      <a:prstDash val="solid"/>
+                      <a:round/>
+                      <a:headEnd type="none" w="med" len="med"/>
+                      <a:tailEnd type="none" w="med" len="med"/>
+                    </a:lnT>
+                    <a:lnB w="12700" cap="flat" cmpd="sng" algn="ctr">
+                      <a:solidFill>
+                        <a:schemeClr val="tx2"/>
+                      </a:solidFill>
+                      <a:prstDash val="solid"/>
+                      <a:round/>
+                      <a:headEnd type="none" w="med" len="med"/>
+                      <a:tailEnd type="none" w="med" len="med"/>
+                    </a:lnB>
+                    <a:noFill/>
+                  </a:tcPr>
+                </a:tc>
+                <a:tc>
+                  <a:txBody>
+                    <a:bodyPr/>
+                    <a:lstStyle/>
+                    <a:p>
+                      <a:pPr algn="ctr"/>
+                      <a:r>
+                        <a:rPr lang="en-US" sz="1200">
+                          <a:solidFill>
+                            <a:schemeClr val="tx2">
+                              <a:lumMod val="75000"/>
+                            </a:schemeClr>
+                          </a:solidFill>
+                        </a:rPr>
+                        <a:t>33</a:t>
+                      </a:r>
+                    </a:p>
+                  </a:txBody>
+                  <a:tcPr marL="0" marR="0" marT="0" marB="0" anchor="ctr">
+                    <a:lnL w="12700" cap="flat" cmpd="sng" algn="ctr">
+                      <a:solidFill>
+                        <a:schemeClr val="tx2"/>
+                      </a:solidFill>
+                      <a:prstDash val="solid"/>
+                      <a:round/>
+                      <a:headEnd type="none" w="med" len="med"/>
+                      <a:tailEnd type="none" w="med" len="med"/>
+                    </a:lnL>
+                    <a:lnT w="12700" cap="flat" cmpd="sng" algn="ctr">
+                      <a:solidFill>
+                        <a:schemeClr val="tx2"/>
+                      </a:solidFill>
+                      <a:prstDash val="solid"/>
+                      <a:round/>
+                      <a:headEnd type="none" w="med" len="med"/>
+                      <a:tailEnd type="none" w="med" len="med"/>
+                    </a:lnT>
+                    <a:lnB w="12700" cap="flat" cmpd="sng" algn="ctr">
+                      <a:solidFill>
+                        <a:schemeClr val="tx2"/>
+                      </a:solidFill>
+                      <a:prstDash val="solid"/>
+                      <a:round/>
+                      <a:headEnd type="none" w="med" len="med"/>
+                      <a:tailEnd type="none" w="med" len="med"/>
+                    </a:lnB>
+                    <a:solidFill>
+                      <a:schemeClr val="tx2">
+                        <a:lumMod val="40000"/>
+                        <a:lumOff val="60000"/>
+                      </a:schemeClr>
+                    </a:solidFill>
+                  </a:tcPr>
+                </a:tc>
+                <a:extLst>
+                  <a:ext uri="{0D108BD9-81ED-4DB2-BD59-A6C34878D82A}">
+                    <a16:rowId xmlns:a16="http://schemas.microsoft.com/office/drawing/2014/main" val="3226135517"/>
+                  </a:ext>
+                </a:extLst>
+              </a:tr>
+              <a:tr h="239562">
+                <a:tc vMerge="1">
+                  <a:txBody>
+                    <a:bodyPr/>
+                    <a:lstStyle/>
+                    <a:p>
+                      <a:endParaRPr lang="en-US"/>
+                    </a:p>
+                  </a:txBody>
+                  <a:tcPr/>
+                </a:tc>
+                <a:tc>
+                  <a:txBody>
+                    <a:bodyPr/>
+                    <a:lstStyle/>
+                    <a:p>
+                      <a:pPr algn="ctr"/>
+                      <a:r>
+                        <a:rPr lang="en-US" sz="1200">
+                          <a:solidFill>
+                            <a:schemeClr val="tx2">
+                              <a:lumMod val="75000"/>
+                            </a:schemeClr>
+                          </a:solidFill>
+                        </a:rPr>
+                        <a:t>-</a:t>
+                      </a:r>
+                    </a:p>
+                  </a:txBody>
+                  <a:tcPr marL="0" marR="0" vert="vert270">
+                    <a:lnL w="12700" cap="flat" cmpd="sng" algn="ctr">
+                      <a:solidFill>
+                        <a:schemeClr val="bg1"/>
+                      </a:solidFill>
+                      <a:prstDash val="solid"/>
+                      <a:round/>
+                      <a:headEnd type="none" w="med" len="med"/>
+                      <a:tailEnd type="none" w="med" len="med"/>
+                    </a:lnL>
+                    <a:lnR w="12700" cap="flat" cmpd="sng" algn="ctr">
+                      <a:solidFill>
+                        <a:schemeClr val="tx2"/>
+                      </a:solidFill>
+                      <a:prstDash val="solid"/>
+                      <a:round/>
+                      <a:headEnd type="none" w="med" len="med"/>
+                      <a:tailEnd type="none" w="med" len="med"/>
+                    </a:lnR>
+                    <a:lnT w="12700" cap="flat" cmpd="sng" algn="ctr">
+                      <a:solidFill>
+                        <a:schemeClr val="tx2"/>
+                      </a:solidFill>
+                      <a:prstDash val="solid"/>
+                      <a:round/>
+                      <a:headEnd type="none" w="med" len="med"/>
+                      <a:tailEnd type="none" w="med" len="med"/>
+                    </a:lnT>
+                    <a:noFill/>
+                  </a:tcPr>
+                </a:tc>
+                <a:tc>
+                  <a:txBody>
+                    <a:bodyPr/>
+                    <a:lstStyle/>
+                    <a:p>
+                      <a:pPr algn="ctr"/>
+                      <a:r>
+                        <a:rPr lang="en-US" sz="1200">
+                          <a:solidFill>
+                            <a:schemeClr val="tx2">
+                              <a:lumMod val="75000"/>
+                            </a:schemeClr>
+                          </a:solidFill>
+                        </a:rPr>
+                        <a:t>0</a:t>
+                      </a:r>
+                    </a:p>
+                  </a:txBody>
+                  <a:tcPr marL="0" marR="0" marT="0" marB="0" anchor="ctr">
+                    <a:lnL w="12700" cap="flat" cmpd="sng" algn="ctr">
+                      <a:solidFill>
+                        <a:schemeClr val="tx2"/>
+                      </a:solidFill>
+                      <a:prstDash val="solid"/>
+                      <a:round/>
+                      <a:headEnd type="none" w="med" len="med"/>
+                      <a:tailEnd type="none" w="med" len="med"/>
+                    </a:lnL>
+                    <a:lnR w="12700" cap="flat" cmpd="sng" algn="ctr">
+                      <a:solidFill>
+                        <a:schemeClr val="tx2"/>
+                      </a:solidFill>
+                      <a:prstDash val="solid"/>
+                      <a:round/>
+                      <a:headEnd type="none" w="med" len="med"/>
+                      <a:tailEnd type="none" w="med" len="med"/>
+                    </a:lnR>
+                    <a:lnT w="12700" cap="flat" cmpd="sng" algn="ctr">
+                      <a:solidFill>
+                        <a:schemeClr val="tx2"/>
+                      </a:solidFill>
+                      <a:prstDash val="solid"/>
+                      <a:round/>
+                      <a:headEnd type="none" w="med" len="med"/>
+                      <a:tailEnd type="none" w="med" len="med"/>
+                    </a:lnT>
+                    <a:solidFill>
+                      <a:schemeClr val="tx2">
+                        <a:lumMod val="40000"/>
+                        <a:lumOff val="60000"/>
+                      </a:schemeClr>
+                    </a:solidFill>
+                  </a:tcPr>
+                </a:tc>
+                <a:tc>
+                  <a:txBody>
+                    <a:bodyPr/>
+                    <a:lstStyle/>
+                    <a:p>
+                      <a:pPr algn="ctr"/>
+                      <a:r>
+                        <a:rPr lang="en-US" sz="1200">
+                          <a:solidFill>
+                            <a:schemeClr val="tx2">
+                              <a:lumMod val="75000"/>
+                            </a:schemeClr>
+                          </a:solidFill>
+                        </a:rPr>
+                        <a:t>19</a:t>
+                      </a:r>
+                    </a:p>
+                  </a:txBody>
+                  <a:tcPr marL="0" marR="0" marT="0" marB="0" anchor="ctr">
+                    <a:lnL w="12700" cap="flat" cmpd="sng" algn="ctr">
+                      <a:solidFill>
+                        <a:schemeClr val="tx2"/>
+                      </a:solidFill>
+                      <a:prstDash val="solid"/>
+                      <a:round/>
+                      <a:headEnd type="none" w="med" len="med"/>
+                      <a:tailEnd type="none" w="med" len="med"/>
+                    </a:lnL>
+                    <a:lnT w="12700" cap="flat" cmpd="sng" algn="ctr">
+                      <a:solidFill>
+                        <a:schemeClr val="tx2"/>
+                      </a:solidFill>
+                      <a:prstDash val="solid"/>
+                      <a:round/>
+                      <a:headEnd type="none" w="med" len="med"/>
+                      <a:tailEnd type="none" w="med" len="med"/>
+                    </a:lnT>
+                    <a:noFill/>
+                  </a:tcPr>
+                </a:tc>
+                <a:extLst>
+                  <a:ext uri="{0D108BD9-81ED-4DB2-BD59-A6C34878D82A}">
+                    <a16:rowId xmlns:a16="http://schemas.microsoft.com/office/drawing/2014/main" val="4191566085"/>
+                  </a:ext>
+                </a:extLst>
+              </a:tr>
+            </a:tbl>
+          </a:graphicData>
+        </a:graphic>
+      </p:graphicFrame>
+      <p:graphicFrame>
+        <p:nvGraphicFramePr>
+          <p:cNvPr id="125" name="Table 124">
+            <a:extLst>
+              <a:ext uri="{FF2B5EF4-FFF2-40B4-BE49-F238E27FC236}">
+                <a16:creationId xmlns:a16="http://schemas.microsoft.com/office/drawing/2014/main" id="{2B68344A-11DC-295A-9452-4E8D72312CF2}"/>
+              </a:ext>
+            </a:extLst>
+          </p:cNvPr>
+          <p:cNvGraphicFramePr>
+            <a:graphicFrameLocks noGrp="1"/>
+          </p:cNvGraphicFramePr>
+          <p:nvPr/>
+        </p:nvGraphicFramePr>
+        <p:xfrm>
+          <a:off x="6410594" y="1367881"/>
+          <a:ext cx="1064532" cy="844884"/>
+        </p:xfrm>
+        <a:graphic>
+          <a:graphicData uri="http://schemas.openxmlformats.org/drawingml/2006/table">
+            <a:tbl>
+              <a:tblPr>
+                <a:tableStyleId>{5C22544A-7EE6-4342-B048-85BDC9FD1C3A}</a:tableStyleId>
+              </a:tblPr>
+              <a:tblGrid>
+                <a:gridCol w="210312">
+                  <a:extLst>
+                    <a:ext uri="{9D8B030D-6E8A-4147-A177-3AD203B41FA5}">
+                      <a16:colId xmlns:a16="http://schemas.microsoft.com/office/drawing/2014/main" val="3069144988"/>
+                    </a:ext>
+                  </a:extLst>
+                </a:gridCol>
+                <a:gridCol w="210312">
+                  <a:extLst>
+                    <a:ext uri="{9D8B030D-6E8A-4147-A177-3AD203B41FA5}">
+                      <a16:colId xmlns:a16="http://schemas.microsoft.com/office/drawing/2014/main" val="2983537412"/>
+                    </a:ext>
+                  </a:extLst>
+                </a:gridCol>
+                <a:gridCol w="321954">
+                  <a:extLst>
+                    <a:ext uri="{9D8B030D-6E8A-4147-A177-3AD203B41FA5}">
+                      <a16:colId xmlns:a16="http://schemas.microsoft.com/office/drawing/2014/main" val="2728058984"/>
+                    </a:ext>
+                  </a:extLst>
+                </a:gridCol>
+                <a:gridCol w="321954">
+                  <a:extLst>
+                    <a:ext uri="{9D8B030D-6E8A-4147-A177-3AD203B41FA5}">
+                      <a16:colId xmlns:a16="http://schemas.microsoft.com/office/drawing/2014/main" val="1193380528"/>
+                    </a:ext>
+                  </a:extLst>
+                </a:gridCol>
+              </a:tblGrid>
+              <a:tr h="182880">
+                <a:tc>
+                  <a:txBody>
+                    <a:bodyPr/>
+                    <a:lstStyle/>
+                    <a:p>
+                      <a:endParaRPr lang="en-US" sz="1200">
+                        <a:solidFill>
+                          <a:schemeClr val="tx2">
+                            <a:lumMod val="75000"/>
+                          </a:schemeClr>
+                        </a:solidFill>
+                      </a:endParaRPr>
+                    </a:p>
+                  </a:txBody>
+                  <a:tcPr marT="0" marB="0">
+                    <a:lnR w="12700" cap="flat" cmpd="sng" algn="ctr">
+                      <a:solidFill>
+                        <a:schemeClr val="bg1"/>
+                      </a:solidFill>
+                      <a:prstDash val="solid"/>
+                      <a:round/>
+                      <a:headEnd type="none" w="med" len="med"/>
+                      <a:tailEnd type="none" w="med" len="med"/>
+                    </a:lnR>
+                    <a:lnB w="12700" cap="flat" cmpd="sng" algn="ctr">
+                      <a:solidFill>
+                        <a:schemeClr val="bg1"/>
+                      </a:solidFill>
+                      <a:prstDash val="solid"/>
+                      <a:round/>
+                      <a:headEnd type="none" w="med" len="med"/>
+                      <a:tailEnd type="none" w="med" len="med"/>
+                    </a:lnB>
+                    <a:noFill/>
+                  </a:tcPr>
+                </a:tc>
+                <a:tc>
+                  <a:txBody>
+                    <a:bodyPr/>
+                    <a:lstStyle/>
+                    <a:p>
+                      <a:endParaRPr lang="en-US" sz="1200">
+                        <a:solidFill>
+                          <a:schemeClr val="tx2">
+                            <a:lumMod val="75000"/>
+                          </a:schemeClr>
+                        </a:solidFill>
+                      </a:endParaRPr>
+                    </a:p>
+                  </a:txBody>
+                  <a:tcPr marT="0" marB="0">
+                    <a:lnL w="12700" cap="flat" cmpd="sng" algn="ctr">
+                      <a:solidFill>
+                        <a:schemeClr val="bg1"/>
+                      </a:solidFill>
+                      <a:prstDash val="solid"/>
+                      <a:round/>
+                      <a:headEnd type="none" w="med" len="med"/>
+                      <a:tailEnd type="none" w="med" len="med"/>
+                    </a:lnL>
+                    <a:lnR w="12700" cap="flat" cmpd="sng" algn="ctr">
+                      <a:solidFill>
+                        <a:schemeClr val="bg1"/>
+                      </a:solidFill>
+                      <a:prstDash val="solid"/>
+                      <a:round/>
+                      <a:headEnd type="none" w="med" len="med"/>
+                      <a:tailEnd type="none" w="med" len="med"/>
+                    </a:lnR>
+                    <a:lnB w="12700" cap="flat" cmpd="sng" algn="ctr">
+                      <a:solidFill>
+                        <a:schemeClr val="bg1"/>
+                      </a:solidFill>
+                      <a:prstDash val="solid"/>
+                      <a:round/>
+                      <a:headEnd type="none" w="med" len="med"/>
+                      <a:tailEnd type="none" w="med" len="med"/>
+                    </a:lnB>
+                    <a:noFill/>
+                  </a:tcPr>
+                </a:tc>
+                <a:tc gridSpan="2">
+                  <a:txBody>
+                    <a:bodyPr/>
+                    <a:lstStyle/>
+                    <a:p>
+                      <a:pPr algn="ctr"/>
+                      <a:r>
+                        <a:rPr lang="en-US" sz="1200">
+                          <a:solidFill>
+                            <a:schemeClr val="tx2">
+                              <a:lumMod val="75000"/>
+                            </a:schemeClr>
+                          </a:solidFill>
+                        </a:rPr>
+                        <a:t>Pred.</a:t>
+                      </a:r>
+                    </a:p>
+                  </a:txBody>
+                  <a:tcPr marT="0" marB="0">
+                    <a:lnL w="12700" cap="flat" cmpd="sng" algn="ctr">
+                      <a:solidFill>
+                        <a:schemeClr val="bg1"/>
+                      </a:solidFill>
+                      <a:prstDash val="solid"/>
+                      <a:round/>
+                      <a:headEnd type="none" w="med" len="med"/>
+                      <a:tailEnd type="none" w="med" len="med"/>
+                    </a:lnL>
+                    <a:lnB w="12700" cap="flat" cmpd="sng" algn="ctr">
+                      <a:solidFill>
+                        <a:schemeClr val="bg1"/>
+                      </a:solidFill>
+                      <a:prstDash val="solid"/>
+                      <a:round/>
+                      <a:headEnd type="none" w="med" len="med"/>
+                      <a:tailEnd type="none" w="med" len="med"/>
+                    </a:lnB>
+                    <a:noFill/>
+                  </a:tcPr>
+                </a:tc>
+                <a:tc hMerge="1">
+                  <a:txBody>
+                    <a:bodyPr/>
+                    <a:lstStyle/>
+                    <a:p>
+                      <a:endParaRPr lang="en-US"/>
+                    </a:p>
+                  </a:txBody>
+                  <a:tcPr/>
+                </a:tc>
+                <a:extLst>
+                  <a:ext uri="{0D108BD9-81ED-4DB2-BD59-A6C34878D82A}">
+                    <a16:rowId xmlns:a16="http://schemas.microsoft.com/office/drawing/2014/main" val="3273843125"/>
+                  </a:ext>
+                </a:extLst>
+              </a:tr>
+              <a:tr h="182880">
+                <a:tc>
+                  <a:txBody>
+                    <a:bodyPr/>
+                    <a:lstStyle/>
+                    <a:p>
+                      <a:endParaRPr lang="en-US" sz="1200">
+                        <a:solidFill>
+                          <a:schemeClr val="tx2">
+                            <a:lumMod val="75000"/>
+                          </a:schemeClr>
+                        </a:solidFill>
+                      </a:endParaRPr>
+                    </a:p>
+                  </a:txBody>
+                  <a:tcPr marT="0" marB="0">
+                    <a:lnR w="12700" cap="flat" cmpd="sng" algn="ctr">
+                      <a:solidFill>
+                        <a:schemeClr val="bg1"/>
+                      </a:solidFill>
+                      <a:prstDash val="solid"/>
+                      <a:round/>
+                      <a:headEnd type="none" w="med" len="med"/>
+                      <a:tailEnd type="none" w="med" len="med"/>
+                    </a:lnR>
+                    <a:lnT w="12700" cap="flat" cmpd="sng" algn="ctr">
+                      <a:solidFill>
+                        <a:schemeClr val="bg1"/>
+                      </a:solidFill>
+                      <a:prstDash val="solid"/>
+                      <a:round/>
+                      <a:headEnd type="none" w="med" len="med"/>
+                      <a:tailEnd type="none" w="med" len="med"/>
+                    </a:lnT>
+                    <a:lnB w="12700" cap="flat" cmpd="sng" algn="ctr">
+                      <a:solidFill>
+                        <a:schemeClr val="bg1"/>
+                      </a:solidFill>
+                      <a:prstDash val="solid"/>
+                      <a:round/>
+                      <a:headEnd type="none" w="med" len="med"/>
+                      <a:tailEnd type="none" w="med" len="med"/>
+                    </a:lnB>
+                    <a:noFill/>
+                  </a:tcPr>
+                </a:tc>
+                <a:tc>
+                  <a:txBody>
+                    <a:bodyPr/>
+                    <a:lstStyle/>
+                    <a:p>
+                      <a:endParaRPr lang="en-US" sz="1200">
+                        <a:solidFill>
+                          <a:schemeClr val="tx2">
+                            <a:lumMod val="75000"/>
+                          </a:schemeClr>
+                        </a:solidFill>
+                      </a:endParaRPr>
+                    </a:p>
+                  </a:txBody>
+                  <a:tcPr marT="0" marB="0">
+                    <a:lnL w="12700" cap="flat" cmpd="sng" algn="ctr">
+                      <a:solidFill>
+                        <a:schemeClr val="bg1"/>
+                      </a:solidFill>
+                      <a:prstDash val="solid"/>
+                      <a:round/>
+                      <a:headEnd type="none" w="med" len="med"/>
+                      <a:tailEnd type="none" w="med" len="med"/>
+                    </a:lnL>
+                    <a:lnR w="12700" cap="flat" cmpd="sng" algn="ctr">
+                      <a:solidFill>
+                        <a:schemeClr val="bg1"/>
+                      </a:solidFill>
+                      <a:prstDash val="solid"/>
+                      <a:round/>
+                      <a:headEnd type="none" w="med" len="med"/>
+                      <a:tailEnd type="none" w="med" len="med"/>
+                    </a:lnR>
+                    <a:lnT w="12700" cap="flat" cmpd="sng" algn="ctr">
+                      <a:solidFill>
+                        <a:schemeClr val="bg1"/>
+                      </a:solidFill>
+                      <a:prstDash val="solid"/>
+                      <a:round/>
+                      <a:headEnd type="none" w="med" len="med"/>
+                      <a:tailEnd type="none" w="med" len="med"/>
+                    </a:lnT>
+                    <a:lnB w="12700" cap="flat" cmpd="sng" algn="ctr">
+                      <a:solidFill>
+                        <a:schemeClr val="bg1"/>
+                      </a:solidFill>
+                      <a:prstDash val="solid"/>
+                      <a:round/>
+                      <a:headEnd type="none" w="med" len="med"/>
+                      <a:tailEnd type="none" w="med" len="med"/>
+                    </a:lnB>
+                    <a:noFill/>
+                  </a:tcPr>
+                </a:tc>
+                <a:tc>
+                  <a:txBody>
+                    <a:bodyPr/>
+                    <a:lstStyle/>
+                    <a:p>
+                      <a:pPr algn="ctr"/>
+                      <a:r>
+                        <a:rPr lang="en-US" sz="1200">
+                          <a:solidFill>
+                            <a:schemeClr val="tx2">
+                              <a:lumMod val="75000"/>
+                            </a:schemeClr>
+                          </a:solidFill>
+                        </a:rPr>
+                        <a:t>+</a:t>
+                      </a:r>
+                    </a:p>
+                  </a:txBody>
+                  <a:tcPr marT="0" marB="0">
+                    <a:lnL w="12700" cap="flat" cmpd="sng" algn="ctr">
+                      <a:solidFill>
+                        <a:schemeClr val="bg1"/>
+                      </a:solidFill>
+                      <a:prstDash val="solid"/>
+                      <a:round/>
+                      <a:headEnd type="none" w="med" len="med"/>
+                      <a:tailEnd type="none" w="med" len="med"/>
+                    </a:lnL>
+                    <a:lnR w="12700" cap="flat" cmpd="sng" algn="ctr">
+                      <a:solidFill>
+                        <a:schemeClr val="tx2"/>
+                      </a:solidFill>
+                      <a:prstDash val="solid"/>
+                      <a:round/>
+                      <a:headEnd type="none" w="med" len="med"/>
+                      <a:tailEnd type="none" w="med" len="med"/>
+                    </a:lnR>
+                    <a:lnT w="12700" cap="flat" cmpd="sng" algn="ctr">
+                      <a:solidFill>
+                        <a:schemeClr val="bg1"/>
+                      </a:solidFill>
+                      <a:prstDash val="solid"/>
+                      <a:round/>
+                      <a:headEnd type="none" w="med" len="med"/>
+                      <a:tailEnd type="none" w="med" len="med"/>
+                    </a:lnT>
+                    <a:lnB w="12700" cap="flat" cmpd="sng" algn="ctr">
+                      <a:solidFill>
+                        <a:schemeClr val="tx2"/>
+                      </a:solidFill>
+                      <a:prstDash val="solid"/>
+                      <a:round/>
+                      <a:headEnd type="none" w="med" len="med"/>
+                      <a:tailEnd type="none" w="med" len="med"/>
+                    </a:lnB>
+                    <a:noFill/>
+                  </a:tcPr>
+                </a:tc>
+                <a:tc>
+                  <a:txBody>
+                    <a:bodyPr/>
+                    <a:lstStyle/>
+                    <a:p>
+                      <a:pPr algn="ctr"/>
+                      <a:r>
+                        <a:rPr lang="en-US" sz="1200">
+                          <a:solidFill>
+                            <a:schemeClr val="tx2">
+                              <a:lumMod val="75000"/>
+                            </a:schemeClr>
+                          </a:solidFill>
+                        </a:rPr>
+                        <a:t>-</a:t>
+                      </a:r>
+                    </a:p>
+                  </a:txBody>
+                  <a:tcPr marT="0" marB="0">
+                    <a:lnL w="12700" cap="flat" cmpd="sng" algn="ctr">
+                      <a:solidFill>
+                        <a:schemeClr val="tx2"/>
+                      </a:solidFill>
+                      <a:prstDash val="solid"/>
+                      <a:round/>
+                      <a:headEnd type="none" w="med" len="med"/>
+                      <a:tailEnd type="none" w="med" len="med"/>
+                    </a:lnL>
+                    <a:lnT w="12700" cap="flat" cmpd="sng" algn="ctr">
+                      <a:solidFill>
+                        <a:schemeClr val="bg1"/>
+                      </a:solidFill>
+                      <a:prstDash val="solid"/>
+                      <a:round/>
+                      <a:headEnd type="none" w="med" len="med"/>
+                      <a:tailEnd type="none" w="med" len="med"/>
+                    </a:lnT>
+                    <a:lnB w="12700" cap="flat" cmpd="sng" algn="ctr">
+                      <a:solidFill>
+                        <a:schemeClr val="tx2"/>
+                      </a:solidFill>
+                      <a:prstDash val="solid"/>
+                      <a:round/>
+                      <a:headEnd type="none" w="med" len="med"/>
+                      <a:tailEnd type="none" w="med" len="med"/>
+                    </a:lnB>
+                    <a:noFill/>
+                  </a:tcPr>
+                </a:tc>
+                <a:extLst>
+                  <a:ext uri="{0D108BD9-81ED-4DB2-BD59-A6C34878D82A}">
+                    <a16:rowId xmlns:a16="http://schemas.microsoft.com/office/drawing/2014/main" val="1235086787"/>
+                  </a:ext>
+                </a:extLst>
+              </a:tr>
+              <a:tr h="239562">
+                <a:tc rowSpan="2">
+                  <a:txBody>
+                    <a:bodyPr/>
+                    <a:lstStyle/>
+                    <a:p>
+                      <a:pPr algn="ctr"/>
+                      <a:r>
+                        <a:rPr lang="en-US" sz="1200">
+                          <a:solidFill>
+                            <a:schemeClr val="tx2">
+                              <a:lumMod val="75000"/>
+                            </a:schemeClr>
+                          </a:solidFill>
+                        </a:rPr>
+                        <a:t>Exp.</a:t>
+                      </a:r>
+                    </a:p>
+                  </a:txBody>
+                  <a:tcPr marL="0" marR="0" vert="vert270">
+                    <a:lnR w="12700" cap="flat" cmpd="sng" algn="ctr">
+                      <a:solidFill>
+                        <a:schemeClr val="bg1"/>
+                      </a:solidFill>
+                      <a:prstDash val="solid"/>
+                      <a:round/>
+                      <a:headEnd type="none" w="med" len="med"/>
+                      <a:tailEnd type="none" w="med" len="med"/>
+                    </a:lnR>
+                    <a:lnT w="12700" cap="flat" cmpd="sng" algn="ctr">
+                      <a:solidFill>
+                        <a:schemeClr val="bg1"/>
+                      </a:solidFill>
+                      <a:prstDash val="solid"/>
+                      <a:round/>
+                      <a:headEnd type="none" w="med" len="med"/>
+                      <a:tailEnd type="none" w="med" len="med"/>
+                    </a:lnT>
+                    <a:noFill/>
+                  </a:tcPr>
+                </a:tc>
+                <a:tc>
+                  <a:txBody>
+                    <a:bodyPr/>
+                    <a:lstStyle/>
+                    <a:p>
+                      <a:pPr algn="ctr"/>
+                      <a:r>
+                        <a:rPr lang="en-US" sz="1200">
+                          <a:solidFill>
+                            <a:schemeClr val="tx2">
+                              <a:lumMod val="75000"/>
+                            </a:schemeClr>
+                          </a:solidFill>
+                        </a:rPr>
+                        <a:t>+</a:t>
+                      </a:r>
+                    </a:p>
+                  </a:txBody>
+                  <a:tcPr marL="0" marR="0" vert="vert270">
+                    <a:lnL w="12700" cap="flat" cmpd="sng" algn="ctr">
+                      <a:solidFill>
+                        <a:schemeClr val="bg1"/>
+                      </a:solidFill>
+                      <a:prstDash val="solid"/>
+                      <a:round/>
+                      <a:headEnd type="none" w="med" len="med"/>
+                      <a:tailEnd type="none" w="med" len="med"/>
+                    </a:lnL>
+                    <a:lnR w="12700" cap="flat" cmpd="sng" algn="ctr">
+                      <a:solidFill>
+                        <a:schemeClr val="tx2"/>
+                      </a:solidFill>
+                      <a:prstDash val="solid"/>
+                      <a:round/>
+                      <a:headEnd type="none" w="med" len="med"/>
+                      <a:tailEnd type="none" w="med" len="med"/>
+                    </a:lnR>
+                    <a:lnT w="12700" cap="flat" cmpd="sng" algn="ctr">
+                      <a:solidFill>
+                        <a:schemeClr val="bg1"/>
+                      </a:solidFill>
+                      <a:prstDash val="solid"/>
+                      <a:round/>
+                      <a:headEnd type="none" w="med" len="med"/>
+                      <a:tailEnd type="none" w="med" len="med"/>
+                    </a:lnT>
+                    <a:lnB w="12700" cap="flat" cmpd="sng" algn="ctr">
+                      <a:solidFill>
+                        <a:schemeClr val="tx2"/>
+                      </a:solidFill>
+                      <a:prstDash val="solid"/>
+                      <a:round/>
+                      <a:headEnd type="none" w="med" len="med"/>
+                      <a:tailEnd type="none" w="med" len="med"/>
+                    </a:lnB>
+                    <a:noFill/>
+                  </a:tcPr>
+                </a:tc>
+                <a:tc>
+                  <a:txBody>
+                    <a:bodyPr/>
+                    <a:lstStyle/>
+                    <a:p>
+                      <a:pPr algn="ctr"/>
+                      <a:r>
+                        <a:rPr lang="en-US" sz="1200">
+                          <a:solidFill>
+                            <a:schemeClr val="tx2">
+                              <a:lumMod val="75000"/>
+                            </a:schemeClr>
+                          </a:solidFill>
+                        </a:rPr>
+                        <a:t>32</a:t>
+                      </a:r>
+                    </a:p>
+                  </a:txBody>
+                  <a:tcPr marL="0" marR="0" marT="0" marB="0" anchor="ctr">
+                    <a:lnL w="12700" cap="flat" cmpd="sng" algn="ctr">
+                      <a:solidFill>
+                        <a:schemeClr val="tx2"/>
+                      </a:solidFill>
+                      <a:prstDash val="solid"/>
+                      <a:round/>
+                      <a:headEnd type="none" w="med" len="med"/>
+                      <a:tailEnd type="none" w="med" len="med"/>
+                    </a:lnL>
+                    <a:lnR w="12700" cap="flat" cmpd="sng" algn="ctr">
+                      <a:solidFill>
+                        <a:schemeClr val="tx2"/>
+                      </a:solidFill>
+                      <a:prstDash val="solid"/>
+                      <a:round/>
+                      <a:headEnd type="none" w="med" len="med"/>
+                      <a:tailEnd type="none" w="med" len="med"/>
+                    </a:lnR>
+                    <a:lnT w="12700" cap="flat" cmpd="sng" algn="ctr">
+                      <a:solidFill>
+                        <a:schemeClr val="tx2"/>
+                      </a:solidFill>
+                      <a:prstDash val="solid"/>
+                      <a:round/>
+                      <a:headEnd type="none" w="med" len="med"/>
+                      <a:tailEnd type="none" w="med" len="med"/>
+                    </a:lnT>
+                    <a:lnB w="12700" cap="flat" cmpd="sng" algn="ctr">
+                      <a:solidFill>
+                        <a:schemeClr val="tx2"/>
+                      </a:solidFill>
+                      <a:prstDash val="solid"/>
+                      <a:round/>
+                      <a:headEnd type="none" w="med" len="med"/>
+                      <a:tailEnd type="none" w="med" len="med"/>
+                    </a:lnB>
+                    <a:noFill/>
+                  </a:tcPr>
+                </a:tc>
+                <a:tc>
+                  <a:txBody>
+                    <a:bodyPr/>
+                    <a:lstStyle/>
+                    <a:p>
+                      <a:pPr algn="ctr"/>
+                      <a:r>
+                        <a:rPr lang="en-US" sz="1200">
+                          <a:solidFill>
+                            <a:schemeClr val="tx2">
+                              <a:lumMod val="75000"/>
+                            </a:schemeClr>
+                          </a:solidFill>
+                        </a:rPr>
+                        <a:t>1</a:t>
+                      </a:r>
+                    </a:p>
+                  </a:txBody>
+                  <a:tcPr marL="0" marR="0" marT="0" marB="0" anchor="ctr">
+                    <a:lnL w="12700" cap="flat" cmpd="sng" algn="ctr">
+                      <a:solidFill>
+                        <a:schemeClr val="tx2"/>
+                      </a:solidFill>
+                      <a:prstDash val="solid"/>
+                      <a:round/>
+                      <a:headEnd type="none" w="med" len="med"/>
+                      <a:tailEnd type="none" w="med" len="med"/>
+                    </a:lnL>
+                    <a:lnT w="12700" cap="flat" cmpd="sng" algn="ctr">
+                      <a:solidFill>
+                        <a:schemeClr val="tx2"/>
+                      </a:solidFill>
+                      <a:prstDash val="solid"/>
+                      <a:round/>
+                      <a:headEnd type="none" w="med" len="med"/>
+                      <a:tailEnd type="none" w="med" len="med"/>
+                    </a:lnT>
+                    <a:lnB w="12700" cap="flat" cmpd="sng" algn="ctr">
+                      <a:solidFill>
+                        <a:schemeClr val="tx2"/>
+                      </a:solidFill>
+                      <a:prstDash val="solid"/>
+                      <a:round/>
+                      <a:headEnd type="none" w="med" len="med"/>
+                      <a:tailEnd type="none" w="med" len="med"/>
+                    </a:lnB>
+                    <a:solidFill>
+                      <a:schemeClr val="tx2">
+                        <a:lumMod val="40000"/>
+                        <a:lumOff val="60000"/>
+                      </a:schemeClr>
+                    </a:solidFill>
+                  </a:tcPr>
+                </a:tc>
+                <a:extLst>
+                  <a:ext uri="{0D108BD9-81ED-4DB2-BD59-A6C34878D82A}">
+                    <a16:rowId xmlns:a16="http://schemas.microsoft.com/office/drawing/2014/main" val="3226135517"/>
+                  </a:ext>
+                </a:extLst>
+              </a:tr>
+              <a:tr h="239562">
+                <a:tc vMerge="1">
+                  <a:txBody>
+                    <a:bodyPr/>
+                    <a:lstStyle/>
+                    <a:p>
+                      <a:endParaRPr lang="en-US"/>
+                    </a:p>
+                  </a:txBody>
+                  <a:tcPr/>
+                </a:tc>
+                <a:tc>
+                  <a:txBody>
+                    <a:bodyPr/>
+                    <a:lstStyle/>
+                    <a:p>
+                      <a:pPr algn="ctr"/>
+                      <a:r>
+                        <a:rPr lang="en-US" sz="1200">
+                          <a:solidFill>
+                            <a:schemeClr val="tx2">
+                              <a:lumMod val="75000"/>
+                            </a:schemeClr>
+                          </a:solidFill>
+                        </a:rPr>
+                        <a:t>-</a:t>
+                      </a:r>
+                    </a:p>
+                  </a:txBody>
+                  <a:tcPr marL="0" marR="0" vert="vert270">
+                    <a:lnL w="12700" cap="flat" cmpd="sng" algn="ctr">
+                      <a:solidFill>
+                        <a:schemeClr val="bg1"/>
+                      </a:solidFill>
+                      <a:prstDash val="solid"/>
+                      <a:round/>
+                      <a:headEnd type="none" w="med" len="med"/>
+                      <a:tailEnd type="none" w="med" len="med"/>
+                    </a:lnL>
+                    <a:lnR w="12700" cap="flat" cmpd="sng" algn="ctr">
+                      <a:solidFill>
+                        <a:schemeClr val="tx2"/>
+                      </a:solidFill>
+                      <a:prstDash val="solid"/>
+                      <a:round/>
+                      <a:headEnd type="none" w="med" len="med"/>
+                      <a:tailEnd type="none" w="med" len="med"/>
+                    </a:lnR>
+                    <a:lnT w="12700" cap="flat" cmpd="sng" algn="ctr">
+                      <a:solidFill>
+                        <a:schemeClr val="tx2"/>
+                      </a:solidFill>
+                      <a:prstDash val="solid"/>
+                      <a:round/>
+                      <a:headEnd type="none" w="med" len="med"/>
+                      <a:tailEnd type="none" w="med" len="med"/>
+                    </a:lnT>
+                    <a:noFill/>
+                  </a:tcPr>
+                </a:tc>
+                <a:tc>
+                  <a:txBody>
+                    <a:bodyPr/>
+                    <a:lstStyle/>
+                    <a:p>
+                      <a:pPr algn="ctr"/>
+                      <a:r>
+                        <a:rPr lang="en-US" sz="1200">
+                          <a:solidFill>
+                            <a:schemeClr val="tx2">
+                              <a:lumMod val="75000"/>
+                            </a:schemeClr>
+                          </a:solidFill>
+                        </a:rPr>
+                        <a:t>2</a:t>
+                      </a:r>
+                    </a:p>
+                  </a:txBody>
+                  <a:tcPr marL="0" marR="0" marT="0" marB="0" anchor="ctr">
+                    <a:lnL w="12700" cap="flat" cmpd="sng" algn="ctr">
+                      <a:solidFill>
+                        <a:schemeClr val="tx2"/>
+                      </a:solidFill>
+                      <a:prstDash val="solid"/>
+                      <a:round/>
+                      <a:headEnd type="none" w="med" len="med"/>
+                      <a:tailEnd type="none" w="med" len="med"/>
+                    </a:lnL>
+                    <a:lnR w="12700" cap="flat" cmpd="sng" algn="ctr">
+                      <a:solidFill>
+                        <a:schemeClr val="tx2"/>
+                      </a:solidFill>
+                      <a:prstDash val="solid"/>
+                      <a:round/>
+                      <a:headEnd type="none" w="med" len="med"/>
+                      <a:tailEnd type="none" w="med" len="med"/>
+                    </a:lnR>
+                    <a:lnT w="12700" cap="flat" cmpd="sng" algn="ctr">
+                      <a:solidFill>
+                        <a:schemeClr val="tx2"/>
+                      </a:solidFill>
+                      <a:prstDash val="solid"/>
+                      <a:round/>
+                      <a:headEnd type="none" w="med" len="med"/>
+                      <a:tailEnd type="none" w="med" len="med"/>
+                    </a:lnT>
+                    <a:solidFill>
+                      <a:schemeClr val="tx2">
+                        <a:lumMod val="40000"/>
+                        <a:lumOff val="60000"/>
+                      </a:schemeClr>
+                    </a:solidFill>
+                  </a:tcPr>
+                </a:tc>
+                <a:tc>
+                  <a:txBody>
+                    <a:bodyPr/>
+                    <a:lstStyle/>
+                    <a:p>
+                      <a:pPr algn="ctr"/>
+                      <a:r>
+                        <a:rPr lang="en-US" sz="1200">
+                          <a:solidFill>
+                            <a:schemeClr val="tx2">
+                              <a:lumMod val="75000"/>
+                            </a:schemeClr>
+                          </a:solidFill>
+                        </a:rPr>
+                        <a:t>17</a:t>
+                      </a:r>
+                    </a:p>
+                  </a:txBody>
+                  <a:tcPr marL="0" marR="0" marT="0" marB="0" anchor="ctr">
+                    <a:lnL w="12700" cap="flat" cmpd="sng" algn="ctr">
+                      <a:solidFill>
+                        <a:schemeClr val="tx2"/>
+                      </a:solidFill>
+                      <a:prstDash val="solid"/>
+                      <a:round/>
+                      <a:headEnd type="none" w="med" len="med"/>
+                      <a:tailEnd type="none" w="med" len="med"/>
+                    </a:lnL>
+                    <a:lnT w="12700" cap="flat" cmpd="sng" algn="ctr">
+                      <a:solidFill>
+                        <a:schemeClr val="tx2"/>
+                      </a:solidFill>
+                      <a:prstDash val="solid"/>
+                      <a:round/>
+                      <a:headEnd type="none" w="med" len="med"/>
+                      <a:tailEnd type="none" w="med" len="med"/>
+                    </a:lnT>
+                    <a:noFill/>
+                  </a:tcPr>
+                </a:tc>
+                <a:extLst>
+                  <a:ext uri="{0D108BD9-81ED-4DB2-BD59-A6C34878D82A}">
+                    <a16:rowId xmlns:a16="http://schemas.microsoft.com/office/drawing/2014/main" val="4191566085"/>
+                  </a:ext>
+                </a:extLst>
+              </a:tr>
+            </a:tbl>
+          </a:graphicData>
+        </a:graphic>
+      </p:graphicFrame>
+      <p:sp>
+        <p:nvSpPr>
+          <p:cNvPr id="7" name="TextBox 6">
+            <a:extLst>
+              <a:ext uri="{FF2B5EF4-FFF2-40B4-BE49-F238E27FC236}">
+                <a16:creationId xmlns:a16="http://schemas.microsoft.com/office/drawing/2014/main" id="{2A564D16-086B-6FDD-AD35-AE97A764317E}"/>
+              </a:ext>
+            </a:extLst>
+          </p:cNvPr>
+          <p:cNvSpPr txBox="1"/>
+          <p:nvPr/>
+        </p:nvSpPr>
+        <p:spPr>
+          <a:xfrm>
+            <a:off x="0" y="3175"/>
+            <a:ext cx="389643" cy="307777"/>
+          </a:xfrm>
+          <a:prstGeom prst="rect">
+            <a:avLst/>
+          </a:prstGeom>
+          <a:noFill/>
+        </p:spPr>
+        <p:txBody>
+          <a:bodyPr wrap="square" rtlCol="0">
+            <a:spAutoFit/>
+          </a:bodyPr>
+          <a:lstStyle/>
+          <a:p>
+            <a:pPr marL="0" marR="0" lvl="0" indent="0" algn="l" defTabSz="457200" rtl="0" eaLnBrk="1" fontAlgn="auto" latinLnBrk="0" hangingPunct="1">
+              <a:lnSpc>
+                <a:spcPct val="100000"/>
+              </a:lnSpc>
+              <a:spcBef>
+                <a:spcPts val="0"/>
+              </a:spcBef>
+              <a:spcAft>
+                <a:spcPts val="0"/>
+              </a:spcAft>
+              <a:buClrTx/>
+              <a:buSzTx/>
+              <a:buFontTx/>
+              <a:buNone/>
+              <a:tabLst/>
+              <a:defRPr/>
+            </a:pPr>
+            <a:r>
+              <a:rPr kumimoji="0" lang="en-US" sz="1400" b="1" i="0" u="none" strike="noStrike" kern="1200" cap="none" spc="0" normalizeH="0" baseline="0" noProof="0">
+                <a:ln>
+                  <a:noFill/>
+                </a:ln>
+                <a:solidFill>
+                  <a:srgbClr val="000000"/>
+                </a:solidFill>
+                <a:effectLst/>
+                <a:uLnTx/>
+                <a:uFillTx/>
+                <a:latin typeface="Source Sans Pro" panose="020B0503030403020204" pitchFamily="34" charset="0"/>
+                <a:ea typeface="Source Sans Pro" panose="020B0503030403020204" pitchFamily="34" charset="0"/>
+              </a:rPr>
+              <a:t>A)</a:t>
+            </a:r>
+          </a:p>
+        </p:txBody>
+      </p:sp>
+      <p:pic>
+        <p:nvPicPr>
+          <p:cNvPr id="25" name="Graphic 24" descr="Monitor with solid fill">
+            <a:extLst>
+              <a:ext uri="{FF2B5EF4-FFF2-40B4-BE49-F238E27FC236}">
+                <a16:creationId xmlns:a16="http://schemas.microsoft.com/office/drawing/2014/main" id="{2C9DEF29-3F37-E985-7C54-BD5C427AECCD}"/>
+              </a:ext>
+            </a:extLst>
+          </p:cNvPr>
+          <p:cNvPicPr>
+            <a:picLocks noChangeAspect="1"/>
+          </p:cNvPicPr>
+          <p:nvPr/>
+        </p:nvPicPr>
+        <p:blipFill>
+          <a:blip>
+            <a:extLst>
+              <a:ext uri="{96DAC541-7B7A-43D3-8B79-37D633B846F1}">
+                <asvg:svgBlip xmlns:asvg="http://schemas.microsoft.com/office/drawing/2016/SVG/main" r:embed="rId3"/>
+              </a:ext>
+            </a:extLst>
+          </a:blip>
+          <a:stretch>
+            <a:fillRect/>
+          </a:stretch>
+        </p:blipFill>
+        <p:spPr>
+          <a:xfrm>
+            <a:off x="1172249" y="972706"/>
+            <a:ext cx="428052" cy="428052"/>
+          </a:xfrm>
+          <a:prstGeom prst="rect">
+            <a:avLst/>
+          </a:prstGeom>
+        </p:spPr>
+      </p:pic>
+      <p:grpSp>
+        <p:nvGrpSpPr>
+          <p:cNvPr id="31" name="Group 30">
+            <a:extLst>
+              <a:ext uri="{FF2B5EF4-FFF2-40B4-BE49-F238E27FC236}">
+                <a16:creationId xmlns:a16="http://schemas.microsoft.com/office/drawing/2014/main" id="{000267CC-40DF-D338-5CE0-F61E1F576B70}"/>
+              </a:ext>
+            </a:extLst>
+          </p:cNvPr>
+          <p:cNvGrpSpPr/>
+          <p:nvPr/>
+        </p:nvGrpSpPr>
+        <p:grpSpPr>
+          <a:xfrm>
+            <a:off x="413292" y="1728695"/>
+            <a:ext cx="166463" cy="478633"/>
+            <a:chOff x="6055539" y="719842"/>
+            <a:chExt cx="243162" cy="699167"/>
+          </a:xfrm>
+        </p:grpSpPr>
+        <p:sp>
+          <p:nvSpPr>
+            <p:cNvPr id="32" name="Freeform 31">
+              <a:extLst>
+                <a:ext uri="{FF2B5EF4-FFF2-40B4-BE49-F238E27FC236}">
+                  <a16:creationId xmlns:a16="http://schemas.microsoft.com/office/drawing/2014/main" id="{2B61836A-CBE9-60D9-85EF-94C292E383BD}"/>
+                </a:ext>
+              </a:extLst>
+            </p:cNvPr>
+            <p:cNvSpPr/>
+            <p:nvPr/>
+          </p:nvSpPr>
+          <p:spPr>
+            <a:xfrm rot="5420156">
+              <a:off x="5842436" y="970237"/>
+              <a:ext cx="669394" cy="228150"/>
+            </a:xfrm>
+            <a:custGeom>
+              <a:avLst/>
+              <a:gdLst>
+                <a:gd name="csX0" fmla="*/ 1320 w 669396"/>
+                <a:gd name="csY0" fmla="*/ 226846 h 228150"/>
+                <a:gd name="csX1" fmla="*/ 0 w 669396"/>
+                <a:gd name="csY1" fmla="*/ 1570 h 228150"/>
+                <a:gd name="csX2" fmla="*/ 7775 w 669396"/>
+                <a:gd name="csY2" fmla="*/ 0 h 228150"/>
+                <a:gd name="csX3" fmla="*/ 555321 w 669396"/>
+                <a:gd name="csY3" fmla="*/ 0 h 228150"/>
+                <a:gd name="csX4" fmla="*/ 669396 w 669396"/>
+                <a:gd name="csY4" fmla="*/ 114075 h 228150"/>
+                <a:gd name="csX5" fmla="*/ 669395 w 669396"/>
+                <a:gd name="csY5" fmla="*/ 114075 h 228150"/>
+                <a:gd name="csX6" fmla="*/ 555320 w 669396"/>
+                <a:gd name="csY6" fmla="*/ 228150 h 228150"/>
+                <a:gd name="csX7" fmla="*/ 7775 w 669396"/>
+                <a:gd name="csY7" fmla="*/ 228149 h 228150"/>
+              </a:gdLst>
+              <a:ahLst/>
+              <a:cxnLst>
+                <a:cxn ang="0">
+                  <a:pos x="csX0" y="csY0"/>
+                </a:cxn>
+                <a:cxn ang="0">
+                  <a:pos x="csX1" y="csY1"/>
+                </a:cxn>
+                <a:cxn ang="0">
+                  <a:pos x="csX2" y="csY2"/>
+                </a:cxn>
+                <a:cxn ang="0">
+                  <a:pos x="csX3" y="csY3"/>
+                </a:cxn>
+                <a:cxn ang="0">
+                  <a:pos x="csX4" y="csY4"/>
+                </a:cxn>
+                <a:cxn ang="0">
+                  <a:pos x="csX5" y="csY5"/>
+                </a:cxn>
+                <a:cxn ang="0">
+                  <a:pos x="csX6" y="csY6"/>
+                </a:cxn>
+                <a:cxn ang="0">
+                  <a:pos x="csX7" y="csY7"/>
+                </a:cxn>
+              </a:cxnLst>
+              <a:rect l="l" t="t" r="r" b="b"/>
+              <a:pathLst>
+                <a:path w="669396" h="228150">
+                  <a:moveTo>
+                    <a:pt x="1320" y="226846"/>
+                  </a:moveTo>
+                  <a:lnTo>
+                    <a:pt x="0" y="1570"/>
+                  </a:lnTo>
+                  <a:lnTo>
+                    <a:pt x="7775" y="0"/>
+                  </a:lnTo>
+                  <a:lnTo>
+                    <a:pt x="555321" y="0"/>
+                  </a:lnTo>
+                  <a:cubicBezTo>
+                    <a:pt x="618323" y="0"/>
+                    <a:pt x="669396" y="51073"/>
+                    <a:pt x="669396" y="114075"/>
+                  </a:cubicBezTo>
+                  <a:lnTo>
+                    <a:pt x="669395" y="114075"/>
+                  </a:lnTo>
+                  <a:cubicBezTo>
+                    <a:pt x="669395" y="177077"/>
+                    <a:pt x="618322" y="228150"/>
+                    <a:pt x="555320" y="228150"/>
+                  </a:cubicBezTo>
+                  <a:lnTo>
+                    <a:pt x="7775" y="228149"/>
+                  </a:lnTo>
+                  <a:close/>
+                </a:path>
+              </a:pathLst>
+            </a:custGeom>
+            <a:noFill/>
+            <a:ln w="22225">
+              <a:solidFill>
+                <a:srgbClr val="CABC9C"/>
+              </a:solidFill>
+            </a:ln>
+            <a:effectLst/>
+          </p:spPr>
+          <p:style>
+            <a:lnRef idx="2">
+              <a:schemeClr val="accent1">
+                <a:shade val="50000"/>
+              </a:schemeClr>
+            </a:lnRef>
+            <a:fillRef idx="1">
+              <a:schemeClr val="accent1"/>
+            </a:fillRef>
+            <a:effectRef idx="0">
+              <a:schemeClr val="accent1"/>
+            </a:effectRef>
+            <a:fontRef idx="minor">
+              <a:schemeClr val="lt1"/>
+            </a:fontRef>
+          </p:style>
+          <p:txBody>
+            <a:bodyPr wrap="square" rtlCol="0" anchor="ctr">
+              <a:noAutofit/>
+            </a:bodyPr>
+            <a:lstStyle/>
+            <a:p>
+              <a:pPr marL="0" marR="0" lvl="0" indent="0" algn="ctr" defTabSz="457200" rtl="0" eaLnBrk="1" fontAlgn="auto" latinLnBrk="0" hangingPunct="1">
+                <a:lnSpc>
+                  <a:spcPct val="95000"/>
+                </a:lnSpc>
+                <a:spcBef>
+                  <a:spcPts val="0"/>
+                </a:spcBef>
+                <a:spcAft>
+                  <a:spcPts val="0"/>
+                </a:spcAft>
+                <a:buClrTx/>
+                <a:buSzTx/>
+                <a:buFontTx/>
+                <a:buNone/>
+                <a:tabLst/>
+                <a:defRPr/>
+              </a:pPr>
+              <a:endParaRPr kumimoji="0" lang="en-US" sz="1800" b="1" i="0" u="none" strike="noStrike" kern="1200" cap="none" spc="0" normalizeH="0" baseline="0" noProof="0">
+                <a:ln>
+                  <a:noFill/>
+                </a:ln>
+                <a:solidFill>
+                  <a:srgbClr val="C9BC9B"/>
+                </a:solidFill>
+                <a:effectLst/>
+                <a:uLnTx/>
+                <a:uFillTx/>
+                <a:latin typeface="Source Sans Pro" panose="020B0503030403020204" pitchFamily="34" charset="0"/>
+                <a:ea typeface="Source Sans Pro" panose="020B0503030403020204" pitchFamily="34" charset="0"/>
+              </a:endParaRPr>
+            </a:p>
+          </p:txBody>
+        </p:sp>
+        <p:sp>
+          <p:nvSpPr>
+            <p:cNvPr id="33" name="Oval 32">
+              <a:extLst>
+                <a:ext uri="{FF2B5EF4-FFF2-40B4-BE49-F238E27FC236}">
+                  <a16:creationId xmlns:a16="http://schemas.microsoft.com/office/drawing/2014/main" id="{84314ED5-57A9-545D-B141-D029C51B85AA}"/>
+                </a:ext>
+              </a:extLst>
+            </p:cNvPr>
+            <p:cNvSpPr/>
+            <p:nvPr/>
+          </p:nvSpPr>
+          <p:spPr>
+            <a:xfrm>
+              <a:off x="6055539" y="719842"/>
+              <a:ext cx="243162" cy="58208"/>
+            </a:xfrm>
+            <a:prstGeom prst="ellipse">
+              <a:avLst/>
+            </a:prstGeom>
+            <a:solidFill>
+              <a:srgbClr val="FCF9EA"/>
+            </a:solidFill>
+            <a:ln w="22225">
+              <a:solidFill>
+                <a:srgbClr val="CABC9C"/>
+              </a:solidFill>
+            </a:ln>
+          </p:spPr>
+          <p:style>
+            <a:lnRef idx="2">
+              <a:schemeClr val="accent1">
+                <a:shade val="15000"/>
+              </a:schemeClr>
+            </a:lnRef>
+            <a:fillRef idx="1">
+              <a:schemeClr val="accent1"/>
+            </a:fillRef>
+            <a:effectRef idx="0">
+              <a:schemeClr val="accent1"/>
+            </a:effectRef>
+            <a:fontRef idx="minor">
+              <a:schemeClr val="lt1"/>
+            </a:fontRef>
+          </p:style>
+          <p:txBody>
+            <a:bodyPr rtlCol="0" anchor="ctr"/>
+            <a:lstStyle/>
+            <a:p>
+              <a:pPr marL="0" marR="0" lvl="0" indent="0" algn="ctr" defTabSz="457200" rtl="0" eaLnBrk="1" fontAlgn="auto" latinLnBrk="0" hangingPunct="1">
+                <a:lnSpc>
+                  <a:spcPct val="100000"/>
+                </a:lnSpc>
+                <a:spcBef>
+                  <a:spcPts val="0"/>
+                </a:spcBef>
+                <a:spcAft>
+                  <a:spcPts val="0"/>
+                </a:spcAft>
+                <a:buClrTx/>
+                <a:buSzTx/>
+                <a:buFontTx/>
+                <a:buNone/>
+                <a:tabLst/>
+                <a:defRPr/>
+              </a:pPr>
+              <a:endParaRPr kumimoji="0" lang="en-US" sz="1800" b="0" i="0" u="none" strike="noStrike" kern="1200" cap="none" spc="0" normalizeH="0" baseline="0" noProof="0">
+                <a:ln>
+                  <a:noFill/>
+                </a:ln>
+                <a:solidFill>
+                  <a:srgbClr val="FFFFFF"/>
+                </a:solidFill>
+                <a:effectLst/>
+                <a:uLnTx/>
+                <a:uFillTx/>
+                <a:latin typeface="Source Sans Pro" panose="020B0503030403020204" pitchFamily="34" charset="0"/>
+                <a:ea typeface="Source Sans Pro" panose="020B0503030403020204" pitchFamily="34" charset="0"/>
+              </a:endParaRPr>
+            </a:p>
+          </p:txBody>
+        </p:sp>
+        <p:sp>
+          <p:nvSpPr>
+            <p:cNvPr id="37" name="Oval 36">
+              <a:extLst>
+                <a:ext uri="{FF2B5EF4-FFF2-40B4-BE49-F238E27FC236}">
+                  <a16:creationId xmlns:a16="http://schemas.microsoft.com/office/drawing/2014/main" id="{C3C9F656-B003-C114-0C95-28155F346A1E}"/>
+                </a:ext>
+              </a:extLst>
+            </p:cNvPr>
+            <p:cNvSpPr/>
+            <p:nvPr/>
+          </p:nvSpPr>
+          <p:spPr>
+            <a:xfrm>
+              <a:off x="6068813" y="866544"/>
+              <a:ext cx="218450" cy="56631"/>
+            </a:xfrm>
+            <a:prstGeom prst="ellipse">
+              <a:avLst/>
+            </a:prstGeom>
+            <a:noFill/>
+            <a:ln w="22225">
+              <a:solidFill>
+                <a:schemeClr val="tx2"/>
+              </a:solidFill>
+            </a:ln>
+          </p:spPr>
+          <p:style>
+            <a:lnRef idx="2">
+              <a:schemeClr val="accent1">
+                <a:shade val="15000"/>
+              </a:schemeClr>
+            </a:lnRef>
+            <a:fillRef idx="1">
+              <a:schemeClr val="accent1"/>
+            </a:fillRef>
+            <a:effectRef idx="0">
+              <a:schemeClr val="accent1"/>
+            </a:effectRef>
+            <a:fontRef idx="minor">
+              <a:schemeClr val="lt1"/>
+            </a:fontRef>
+          </p:style>
+          <p:txBody>
+            <a:bodyPr rtlCol="0" anchor="ctr"/>
+            <a:lstStyle/>
+            <a:p>
+              <a:pPr marL="0" marR="0" lvl="0" indent="0" algn="ctr" defTabSz="457200" rtl="0" eaLnBrk="1" fontAlgn="auto" latinLnBrk="0" hangingPunct="1">
+                <a:lnSpc>
+                  <a:spcPct val="100000"/>
+                </a:lnSpc>
+                <a:spcBef>
+                  <a:spcPts val="0"/>
+                </a:spcBef>
+                <a:spcAft>
+                  <a:spcPts val="0"/>
+                </a:spcAft>
+                <a:buClrTx/>
+                <a:buSzTx/>
+                <a:buFontTx/>
+                <a:buNone/>
+                <a:tabLst/>
+                <a:defRPr/>
+              </a:pPr>
+              <a:endParaRPr kumimoji="0" lang="en-US" sz="1800" b="0" i="0" u="none" strike="noStrike" kern="1200" cap="none" spc="0" normalizeH="0" baseline="0" noProof="0">
+                <a:ln>
+                  <a:noFill/>
+                </a:ln>
+                <a:solidFill>
+                  <a:srgbClr val="FFFFFF"/>
+                </a:solidFill>
+                <a:effectLst/>
+                <a:uLnTx/>
+                <a:uFillTx/>
+                <a:latin typeface="Source Sans Pro" panose="020B0503030403020204" pitchFamily="34" charset="0"/>
+                <a:ea typeface="Source Sans Pro" panose="020B0503030403020204" pitchFamily="34" charset="0"/>
+              </a:endParaRPr>
+            </a:p>
+          </p:txBody>
+        </p:sp>
+      </p:grpSp>
+      <p:pic>
+        <p:nvPicPr>
+          <p:cNvPr id="38" name="Graphic 37" descr="Monitor with solid fill">
+            <a:extLst>
+              <a:ext uri="{FF2B5EF4-FFF2-40B4-BE49-F238E27FC236}">
+                <a16:creationId xmlns:a16="http://schemas.microsoft.com/office/drawing/2014/main" id="{DEE1C2AD-7734-F46D-F4F7-E2267663CFBA}"/>
+              </a:ext>
+            </a:extLst>
+          </p:cNvPr>
+          <p:cNvPicPr>
+            <a:picLocks noChangeAspect="1"/>
+          </p:cNvPicPr>
+          <p:nvPr/>
+        </p:nvPicPr>
+        <p:blipFill>
+          <a:blip>
+            <a:extLst>
+              <a:ext uri="{96DAC541-7B7A-43D3-8B79-37D633B846F1}">
+                <asvg:svgBlip xmlns:asvg="http://schemas.microsoft.com/office/drawing/2016/SVG/main" r:embed="rId3"/>
+              </a:ext>
+            </a:extLst>
+          </a:blip>
+          <a:stretch>
+            <a:fillRect/>
+          </a:stretch>
+        </p:blipFill>
+        <p:spPr>
+          <a:xfrm>
+            <a:off x="6949138" y="969494"/>
+            <a:ext cx="428052" cy="428052"/>
+          </a:xfrm>
+          <a:prstGeom prst="rect">
+            <a:avLst/>
+          </a:prstGeom>
+        </p:spPr>
+      </p:pic>
+      <p:grpSp>
+        <p:nvGrpSpPr>
+          <p:cNvPr id="46" name="Group 45">
+            <a:extLst>
+              <a:ext uri="{FF2B5EF4-FFF2-40B4-BE49-F238E27FC236}">
+                <a16:creationId xmlns:a16="http://schemas.microsoft.com/office/drawing/2014/main" id="{A57E3A9C-2BF9-EAED-3F13-5F52A351807B}"/>
+              </a:ext>
+            </a:extLst>
+          </p:cNvPr>
+          <p:cNvGrpSpPr/>
+          <p:nvPr/>
+        </p:nvGrpSpPr>
+        <p:grpSpPr>
+          <a:xfrm>
+            <a:off x="6190181" y="1725483"/>
+            <a:ext cx="166463" cy="478633"/>
+            <a:chOff x="6055539" y="719842"/>
+            <a:chExt cx="243162" cy="699167"/>
+          </a:xfrm>
+        </p:grpSpPr>
+        <p:sp>
+          <p:nvSpPr>
+            <p:cNvPr id="47" name="Freeform 46">
+              <a:extLst>
+                <a:ext uri="{FF2B5EF4-FFF2-40B4-BE49-F238E27FC236}">
+                  <a16:creationId xmlns:a16="http://schemas.microsoft.com/office/drawing/2014/main" id="{8603690F-1BFC-878B-ACA5-F4A4B343455D}"/>
+                </a:ext>
+              </a:extLst>
+            </p:cNvPr>
+            <p:cNvSpPr/>
+            <p:nvPr/>
+          </p:nvSpPr>
+          <p:spPr>
+            <a:xfrm rot="5420156">
+              <a:off x="5842436" y="970237"/>
+              <a:ext cx="669394" cy="228150"/>
+            </a:xfrm>
+            <a:custGeom>
+              <a:avLst/>
+              <a:gdLst>
+                <a:gd name="csX0" fmla="*/ 1320 w 669396"/>
+                <a:gd name="csY0" fmla="*/ 226846 h 228150"/>
+                <a:gd name="csX1" fmla="*/ 0 w 669396"/>
+                <a:gd name="csY1" fmla="*/ 1570 h 228150"/>
+                <a:gd name="csX2" fmla="*/ 7775 w 669396"/>
+                <a:gd name="csY2" fmla="*/ 0 h 228150"/>
+                <a:gd name="csX3" fmla="*/ 555321 w 669396"/>
+                <a:gd name="csY3" fmla="*/ 0 h 228150"/>
+                <a:gd name="csX4" fmla="*/ 669396 w 669396"/>
+                <a:gd name="csY4" fmla="*/ 114075 h 228150"/>
+                <a:gd name="csX5" fmla="*/ 669395 w 669396"/>
+                <a:gd name="csY5" fmla="*/ 114075 h 228150"/>
+                <a:gd name="csX6" fmla="*/ 555320 w 669396"/>
+                <a:gd name="csY6" fmla="*/ 228150 h 228150"/>
+                <a:gd name="csX7" fmla="*/ 7775 w 669396"/>
+                <a:gd name="csY7" fmla="*/ 228149 h 228150"/>
+              </a:gdLst>
+              <a:ahLst/>
+              <a:cxnLst>
+                <a:cxn ang="0">
+                  <a:pos x="csX0" y="csY0"/>
+                </a:cxn>
+                <a:cxn ang="0">
+                  <a:pos x="csX1" y="csY1"/>
+                </a:cxn>
+                <a:cxn ang="0">
+                  <a:pos x="csX2" y="csY2"/>
+                </a:cxn>
+                <a:cxn ang="0">
+                  <a:pos x="csX3" y="csY3"/>
+                </a:cxn>
+                <a:cxn ang="0">
+                  <a:pos x="csX4" y="csY4"/>
+                </a:cxn>
+                <a:cxn ang="0">
+                  <a:pos x="csX5" y="csY5"/>
+                </a:cxn>
+                <a:cxn ang="0">
+                  <a:pos x="csX6" y="csY6"/>
+                </a:cxn>
+                <a:cxn ang="0">
+                  <a:pos x="csX7" y="csY7"/>
+                </a:cxn>
+              </a:cxnLst>
+              <a:rect l="l" t="t" r="r" b="b"/>
+              <a:pathLst>
+                <a:path w="669396" h="228150">
+                  <a:moveTo>
+                    <a:pt x="1320" y="226846"/>
+                  </a:moveTo>
+                  <a:lnTo>
+                    <a:pt x="0" y="1570"/>
+                  </a:lnTo>
+                  <a:lnTo>
+                    <a:pt x="7775" y="0"/>
+                  </a:lnTo>
+                  <a:lnTo>
+                    <a:pt x="555321" y="0"/>
+                  </a:lnTo>
+                  <a:cubicBezTo>
+                    <a:pt x="618323" y="0"/>
+                    <a:pt x="669396" y="51073"/>
+                    <a:pt x="669396" y="114075"/>
+                  </a:cubicBezTo>
+                  <a:lnTo>
+                    <a:pt x="669395" y="114075"/>
+                  </a:lnTo>
+                  <a:cubicBezTo>
+                    <a:pt x="669395" y="177077"/>
+                    <a:pt x="618322" y="228150"/>
+                    <a:pt x="555320" y="228150"/>
+                  </a:cubicBezTo>
+                  <a:lnTo>
+                    <a:pt x="7775" y="228149"/>
+                  </a:lnTo>
+                  <a:close/>
+                </a:path>
+              </a:pathLst>
+            </a:custGeom>
+            <a:noFill/>
+            <a:ln w="22225">
+              <a:solidFill>
+                <a:srgbClr val="CABC9C"/>
+              </a:solidFill>
+            </a:ln>
+            <a:effectLst/>
+          </p:spPr>
+          <p:style>
+            <a:lnRef idx="2">
+              <a:schemeClr val="accent1">
+                <a:shade val="50000"/>
+              </a:schemeClr>
+            </a:lnRef>
+            <a:fillRef idx="1">
+              <a:schemeClr val="accent1"/>
+            </a:fillRef>
+            <a:effectRef idx="0">
+              <a:schemeClr val="accent1"/>
+            </a:effectRef>
+            <a:fontRef idx="minor">
+              <a:schemeClr val="lt1"/>
+            </a:fontRef>
+          </p:style>
+          <p:txBody>
+            <a:bodyPr wrap="square" rtlCol="0" anchor="ctr">
+              <a:noAutofit/>
+            </a:bodyPr>
+            <a:lstStyle/>
+            <a:p>
+              <a:pPr marL="0" marR="0" lvl="0" indent="0" algn="ctr" defTabSz="457200" rtl="0" eaLnBrk="1" fontAlgn="auto" latinLnBrk="0" hangingPunct="1">
+                <a:lnSpc>
+                  <a:spcPct val="95000"/>
+                </a:lnSpc>
+                <a:spcBef>
+                  <a:spcPts val="0"/>
+                </a:spcBef>
+                <a:spcAft>
+                  <a:spcPts val="0"/>
+                </a:spcAft>
+                <a:buClrTx/>
+                <a:buSzTx/>
+                <a:buFontTx/>
+                <a:buNone/>
+                <a:tabLst/>
+                <a:defRPr/>
+              </a:pPr>
+              <a:endParaRPr kumimoji="0" lang="en-US" sz="1800" b="1" i="0" u="none" strike="noStrike" kern="1200" cap="none" spc="0" normalizeH="0" baseline="0" noProof="0">
+                <a:ln>
+                  <a:noFill/>
+                </a:ln>
+                <a:solidFill>
+                  <a:srgbClr val="C9BC9B"/>
+                </a:solidFill>
+                <a:effectLst/>
+                <a:uLnTx/>
+                <a:uFillTx/>
+                <a:latin typeface="Source Sans Pro" panose="020B0503030403020204" pitchFamily="34" charset="0"/>
+                <a:ea typeface="Source Sans Pro" panose="020B0503030403020204" pitchFamily="34" charset="0"/>
+              </a:endParaRPr>
+            </a:p>
+          </p:txBody>
+        </p:sp>
+        <p:sp>
+          <p:nvSpPr>
+            <p:cNvPr id="48" name="Oval 47">
+              <a:extLst>
+                <a:ext uri="{FF2B5EF4-FFF2-40B4-BE49-F238E27FC236}">
+                  <a16:creationId xmlns:a16="http://schemas.microsoft.com/office/drawing/2014/main" id="{B88F2B47-D620-00A5-3ABE-E793F0051D87}"/>
+                </a:ext>
+              </a:extLst>
+            </p:cNvPr>
+            <p:cNvSpPr/>
+            <p:nvPr/>
+          </p:nvSpPr>
+          <p:spPr>
+            <a:xfrm>
+              <a:off x="6055539" y="719842"/>
+              <a:ext cx="243162" cy="58208"/>
+            </a:xfrm>
+            <a:prstGeom prst="ellipse">
+              <a:avLst/>
+            </a:prstGeom>
+            <a:solidFill>
+              <a:srgbClr val="FCF9EA"/>
+            </a:solidFill>
+            <a:ln w="22225">
+              <a:solidFill>
+                <a:srgbClr val="CABC9C"/>
+              </a:solidFill>
+            </a:ln>
+          </p:spPr>
+          <p:style>
+            <a:lnRef idx="2">
+              <a:schemeClr val="accent1">
+                <a:shade val="15000"/>
+              </a:schemeClr>
+            </a:lnRef>
+            <a:fillRef idx="1">
+              <a:schemeClr val="accent1"/>
+            </a:fillRef>
+            <a:effectRef idx="0">
+              <a:schemeClr val="accent1"/>
+            </a:effectRef>
+            <a:fontRef idx="minor">
+              <a:schemeClr val="lt1"/>
+            </a:fontRef>
+          </p:style>
+          <p:txBody>
+            <a:bodyPr rtlCol="0" anchor="ctr"/>
+            <a:lstStyle/>
+            <a:p>
+              <a:pPr marL="0" marR="0" lvl="0" indent="0" algn="ctr" defTabSz="457200" rtl="0" eaLnBrk="1" fontAlgn="auto" latinLnBrk="0" hangingPunct="1">
+                <a:lnSpc>
+                  <a:spcPct val="100000"/>
+                </a:lnSpc>
+                <a:spcBef>
+                  <a:spcPts val="0"/>
+                </a:spcBef>
+                <a:spcAft>
+                  <a:spcPts val="0"/>
+                </a:spcAft>
+                <a:buClrTx/>
+                <a:buSzTx/>
+                <a:buFontTx/>
+                <a:buNone/>
+                <a:tabLst/>
+                <a:defRPr/>
+              </a:pPr>
+              <a:endParaRPr kumimoji="0" lang="en-US" sz="1800" b="0" i="0" u="none" strike="noStrike" kern="1200" cap="none" spc="0" normalizeH="0" baseline="0" noProof="0">
+                <a:ln>
+                  <a:noFill/>
+                </a:ln>
+                <a:solidFill>
+                  <a:srgbClr val="FFFFFF"/>
+                </a:solidFill>
+                <a:effectLst/>
+                <a:uLnTx/>
+                <a:uFillTx/>
+                <a:latin typeface="Source Sans Pro" panose="020B0503030403020204" pitchFamily="34" charset="0"/>
+                <a:ea typeface="Source Sans Pro" panose="020B0503030403020204" pitchFamily="34" charset="0"/>
+              </a:endParaRPr>
+            </a:p>
+          </p:txBody>
+        </p:sp>
+        <p:sp>
+          <p:nvSpPr>
+            <p:cNvPr id="49" name="Oval 48">
+              <a:extLst>
+                <a:ext uri="{FF2B5EF4-FFF2-40B4-BE49-F238E27FC236}">
+                  <a16:creationId xmlns:a16="http://schemas.microsoft.com/office/drawing/2014/main" id="{9F3E91EE-F01B-DD45-BC43-8078B76A6E23}"/>
+                </a:ext>
+              </a:extLst>
+            </p:cNvPr>
+            <p:cNvSpPr/>
+            <p:nvPr/>
+          </p:nvSpPr>
+          <p:spPr>
+            <a:xfrm>
+              <a:off x="6068813" y="866544"/>
+              <a:ext cx="218450" cy="56631"/>
+            </a:xfrm>
+            <a:prstGeom prst="ellipse">
+              <a:avLst/>
+            </a:prstGeom>
+            <a:noFill/>
+            <a:ln w="22225">
+              <a:solidFill>
+                <a:schemeClr val="tx2"/>
+              </a:solidFill>
+            </a:ln>
+          </p:spPr>
+          <p:style>
+            <a:lnRef idx="2">
+              <a:schemeClr val="accent1">
+                <a:shade val="15000"/>
+              </a:schemeClr>
+            </a:lnRef>
+            <a:fillRef idx="1">
+              <a:schemeClr val="accent1"/>
+            </a:fillRef>
+            <a:effectRef idx="0">
+              <a:schemeClr val="accent1"/>
+            </a:effectRef>
+            <a:fontRef idx="minor">
+              <a:schemeClr val="lt1"/>
+            </a:fontRef>
+          </p:style>
+          <p:txBody>
+            <a:bodyPr rtlCol="0" anchor="ctr"/>
+            <a:lstStyle/>
+            <a:p>
+              <a:pPr marL="0" marR="0" lvl="0" indent="0" algn="ctr" defTabSz="457200" rtl="0" eaLnBrk="1" fontAlgn="auto" latinLnBrk="0" hangingPunct="1">
+                <a:lnSpc>
+                  <a:spcPct val="100000"/>
+                </a:lnSpc>
+                <a:spcBef>
+                  <a:spcPts val="0"/>
+                </a:spcBef>
+                <a:spcAft>
+                  <a:spcPts val="0"/>
+                </a:spcAft>
+                <a:buClrTx/>
+                <a:buSzTx/>
+                <a:buFontTx/>
+                <a:buNone/>
+                <a:tabLst/>
+                <a:defRPr/>
+              </a:pPr>
+              <a:endParaRPr kumimoji="0" lang="en-US" sz="1800" b="0" i="0" u="none" strike="noStrike" kern="1200" cap="none" spc="0" normalizeH="0" baseline="0" noProof="0">
+                <a:ln>
+                  <a:noFill/>
+                </a:ln>
+                <a:solidFill>
+                  <a:srgbClr val="FFFFFF"/>
+                </a:solidFill>
+                <a:effectLst/>
+                <a:uLnTx/>
+                <a:uFillTx/>
+                <a:latin typeface="Source Sans Pro" panose="020B0503030403020204" pitchFamily="34" charset="0"/>
+                <a:ea typeface="Source Sans Pro" panose="020B0503030403020204" pitchFamily="34" charset="0"/>
+              </a:endParaRPr>
+            </a:p>
+          </p:txBody>
+        </p:sp>
+      </p:grpSp>
+    </p:spTree>
+    <p:extLst>
+      <p:ext uri="{BB962C8B-B14F-4D97-AF65-F5344CB8AC3E}">
+        <p14:creationId xmlns:p14="http://schemas.microsoft.com/office/powerpoint/2010/main" val="659693228"/>
+      </p:ext>
+    </p:extLst>
+  </p:cSld>
+  <p:clrMapOvr>
+    <a:masterClrMapping/>
+  </p:clrMapOvr>
+</p:sld>
+</file>
+
+<file path=ppt/slides/slide3.xml><?xml version="1.0" encoding="utf-8"?>
+<p:sld xmlns:a="http://schemas.openxmlformats.org/drawingml/2006/main" xmlns:r="http://schemas.openxmlformats.org/officeDocument/2006/relationships" xmlns:p="http://schemas.openxmlformats.org/presentationml/2006/main">
+  <p:cSld>
+    <p:spTree>
+      <p:nvGrpSpPr>
+        <p:cNvPr id="1" name="">
+          <a:extLst>
+            <a:ext uri="{FF2B5EF4-FFF2-40B4-BE49-F238E27FC236}">
+              <a16:creationId xmlns:a16="http://schemas.microsoft.com/office/drawing/2014/main" id="{50E9E104-2CC3-7805-943D-1ABA31B69417}"/>
+            </a:ext>
+          </a:extLst>
+        </p:cNvPr>
+        <p:cNvGrpSpPr/>
+        <p:nvPr/>
+      </p:nvGrpSpPr>
+      <p:grpSpPr>
+        <a:xfrm>
+          <a:off x="0" y="0"/>
+          <a:ext cx="0" cy="0"/>
+          <a:chOff x="0" y="0"/>
+          <a:chExt cx="0" cy="0"/>
+        </a:xfrm>
+      </p:grpSpPr>
+      <p:sp>
+        <p:nvSpPr>
           <p:cNvPr id="15" name="Freeform 14">
             <a:extLst>
               <a:ext uri="{FF2B5EF4-FFF2-40B4-BE49-F238E27FC236}">
@@ -9535,7 +14657,7 @@
 </p:sld>
 </file>
 
-<file path=ppt/slides/slide3.xml><?xml version="1.0" encoding="utf-8"?>
+<file path=ppt/slides/slide4.xml><?xml version="1.0" encoding="utf-8"?>
 <p:sld xmlns:a="http://schemas.openxmlformats.org/drawingml/2006/main" xmlns:r="http://schemas.openxmlformats.org/officeDocument/2006/relationships" xmlns:p="http://schemas.openxmlformats.org/presentationml/2006/main">
   <p:cSld>
     <p:spTree>
@@ -10875,7 +15997,7 @@
 </p:sld>
 </file>
 
-<file path=ppt/slides/slide4.xml><?xml version="1.0" encoding="utf-8"?>
+<file path=ppt/slides/slide5.xml><?xml version="1.0" encoding="utf-8"?>
 <p:sld xmlns:a="http://schemas.openxmlformats.org/drawingml/2006/main" xmlns:r="http://schemas.openxmlformats.org/officeDocument/2006/relationships" xmlns:p="http://schemas.openxmlformats.org/presentationml/2006/main">
   <p:cSld>
     <p:spTree>
@@ -11174,6 +16296,1663 @@
     <p:extLst>
       <p:ext uri="{BB962C8B-B14F-4D97-AF65-F5344CB8AC3E}">
         <p14:creationId xmlns:p14="http://schemas.microsoft.com/office/powerpoint/2010/main" val="1678728573"/>
+      </p:ext>
+    </p:extLst>
+  </p:cSld>
+  <p:clrMapOvr>
+    <a:masterClrMapping/>
+  </p:clrMapOvr>
+</p:sld>
+</file>
+
+<file path=ppt/slides/slide6.xml><?xml version="1.0" encoding="utf-8"?>
+<p:sld xmlns:a="http://schemas.openxmlformats.org/drawingml/2006/main" xmlns:r="http://schemas.openxmlformats.org/officeDocument/2006/relationships" xmlns:p="http://schemas.openxmlformats.org/presentationml/2006/main">
+  <p:cSld>
+    <p:spTree>
+      <p:nvGrpSpPr>
+        <p:cNvPr id="1" name=""/>
+        <p:cNvGrpSpPr/>
+        <p:nvPr/>
+      </p:nvGrpSpPr>
+      <p:grpSpPr>
+        <a:xfrm>
+          <a:off x="0" y="0"/>
+          <a:ext cx="0" cy="0"/>
+          <a:chOff x="0" y="0"/>
+          <a:chExt cx="0" cy="0"/>
+        </a:xfrm>
+      </p:grpSpPr>
+      <p:sp>
+        <p:nvSpPr>
+          <p:cNvPr id="22" name="Rectangle 21">
+            <a:extLst>
+              <a:ext uri="{FF2B5EF4-FFF2-40B4-BE49-F238E27FC236}">
+                <a16:creationId xmlns:a16="http://schemas.microsoft.com/office/drawing/2014/main" id="{B7CECD37-8C9A-3E88-9D9D-7C02B5D5EAA4}"/>
+              </a:ext>
+            </a:extLst>
+          </p:cNvPr>
+          <p:cNvSpPr/>
+          <p:nvPr/>
+        </p:nvSpPr>
+        <p:spPr>
+          <a:xfrm>
+            <a:off x="5051836" y="2594620"/>
+            <a:ext cx="2410162" cy="1640114"/>
+          </a:xfrm>
+          <a:prstGeom prst="rect">
+            <a:avLst/>
+          </a:prstGeom>
+          <a:solidFill>
+            <a:srgbClr val="893525">
+              <a:alpha val="29804"/>
+            </a:srgbClr>
+          </a:solidFill>
+          <a:ln>
+            <a:noFill/>
+          </a:ln>
+        </p:spPr>
+        <p:style>
+          <a:lnRef idx="2">
+            <a:schemeClr val="accent1">
+              <a:shade val="15000"/>
+            </a:schemeClr>
+          </a:lnRef>
+          <a:fillRef idx="1">
+            <a:schemeClr val="accent1"/>
+          </a:fillRef>
+          <a:effectRef idx="0">
+            <a:schemeClr val="accent1"/>
+          </a:effectRef>
+          <a:fontRef idx="minor">
+            <a:schemeClr val="lt1"/>
+          </a:fontRef>
+        </p:style>
+        <p:txBody>
+          <a:bodyPr lIns="45720" rIns="45720" rtlCol="0" anchor="t"/>
+          <a:lstStyle/>
+          <a:p>
+            <a:r>
+              <a:rPr lang="en-US" sz="1200" dirty="0">
+                <a:solidFill>
+                  <a:schemeClr val="tx1"/>
+                </a:solidFill>
+                <a:latin typeface="Source Sans Pro" panose="020B0503030403020204" pitchFamily="34" charset="0"/>
+                <a:ea typeface="Source Sans Pro" panose="020B0503030403020204" pitchFamily="34" charset="0"/>
+              </a:rPr>
+              <a:t>Open issues to document problems</a:t>
+            </a:r>
+          </a:p>
+          <a:p>
+            <a:pPr marL="171450" indent="-171450">
+              <a:buFont typeface="Arial" panose="020B0604020202020204" pitchFamily="34" charset="0"/>
+              <a:buChar char="•"/>
+            </a:pPr>
+            <a:r>
+              <a:rPr lang="en-US" sz="1200" dirty="0">
+                <a:solidFill>
+                  <a:schemeClr val="tx1"/>
+                </a:solidFill>
+                <a:latin typeface="Source Sans Pro" panose="020B0503030403020204" pitchFamily="34" charset="0"/>
+                <a:ea typeface="Source Sans Pro" panose="020B0503030403020204" pitchFamily="34" charset="0"/>
+              </a:rPr>
+              <a:t>GitHub Issues can be created, viewed, and commented on by anyone</a:t>
+            </a:r>
+          </a:p>
+          <a:p>
+            <a:pPr marL="171450" indent="-171450">
+              <a:buFont typeface="Arial" panose="020B0604020202020204" pitchFamily="34" charset="0"/>
+              <a:buChar char="•"/>
+            </a:pPr>
+            <a:r>
+              <a:rPr lang="en-US" sz="1200" dirty="0">
+                <a:solidFill>
+                  <a:schemeClr val="tx1"/>
+                </a:solidFill>
+                <a:latin typeface="Source Sans Pro" panose="020B0503030403020204" pitchFamily="34" charset="0"/>
+                <a:ea typeface="Source Sans Pro" panose="020B0503030403020204" pitchFamily="34" charset="0"/>
+              </a:rPr>
+              <a:t>Issues should include all of the required information to recreate the problem</a:t>
+            </a:r>
+          </a:p>
+        </p:txBody>
+      </p:sp>
+      <p:sp>
+        <p:nvSpPr>
+          <p:cNvPr id="25" name="Rectangle 24">
+            <a:extLst>
+              <a:ext uri="{FF2B5EF4-FFF2-40B4-BE49-F238E27FC236}">
+                <a16:creationId xmlns:a16="http://schemas.microsoft.com/office/drawing/2014/main" id="{1076AA5D-92F6-46EF-EF96-92598E5DC3DF}"/>
+              </a:ext>
+            </a:extLst>
+          </p:cNvPr>
+          <p:cNvSpPr/>
+          <p:nvPr/>
+        </p:nvSpPr>
+        <p:spPr>
+          <a:xfrm>
+            <a:off x="49427" y="2594620"/>
+            <a:ext cx="2410162" cy="1640114"/>
+          </a:xfrm>
+          <a:prstGeom prst="rect">
+            <a:avLst/>
+          </a:prstGeom>
+          <a:solidFill>
+            <a:srgbClr val="C36957">
+              <a:alpha val="29804"/>
+            </a:srgbClr>
+          </a:solidFill>
+          <a:ln>
+            <a:noFill/>
+          </a:ln>
+        </p:spPr>
+        <p:style>
+          <a:lnRef idx="2">
+            <a:schemeClr val="accent1">
+              <a:shade val="15000"/>
+            </a:schemeClr>
+          </a:lnRef>
+          <a:fillRef idx="1">
+            <a:schemeClr val="accent1"/>
+          </a:fillRef>
+          <a:effectRef idx="0">
+            <a:schemeClr val="accent1"/>
+          </a:effectRef>
+          <a:fontRef idx="minor">
+            <a:schemeClr val="lt1"/>
+          </a:fontRef>
+        </p:style>
+        <p:txBody>
+          <a:bodyPr lIns="45720" rIns="45720" rtlCol="0" anchor="t"/>
+          <a:lstStyle/>
+          <a:p>
+            <a:r>
+              <a:rPr lang="en-US" sz="1200" dirty="0">
+                <a:solidFill>
+                  <a:schemeClr val="tx1"/>
+                </a:solidFill>
+                <a:latin typeface="Source Sans Pro" panose="020B0503030403020204" pitchFamily="34" charset="0"/>
+                <a:ea typeface="Source Sans Pro" panose="020B0503030403020204" pitchFamily="34" charset="0"/>
+              </a:rPr>
+              <a:t>Merge changes to the “main” branch to create a permanently citable version</a:t>
+            </a:r>
+          </a:p>
+          <a:p>
+            <a:pPr marL="115888" indent="-115888">
+              <a:buFont typeface="Arial" panose="020B0604020202020204" pitchFamily="34" charset="0"/>
+              <a:buChar char="•"/>
+            </a:pPr>
+            <a:r>
+              <a:rPr lang="en-US" sz="1200" dirty="0">
+                <a:solidFill>
+                  <a:schemeClr val="tx1"/>
+                </a:solidFill>
+                <a:latin typeface="Source Sans Pro" panose="020B0503030403020204" pitchFamily="34" charset="0"/>
+                <a:ea typeface="Source Sans Pro" panose="020B0503030403020204" pitchFamily="34" charset="0"/>
+              </a:rPr>
+              <a:t>Semantic versioning of the model</a:t>
+            </a:r>
+          </a:p>
+          <a:p>
+            <a:pPr marL="115888" indent="-115888">
+              <a:buFont typeface="Arial" panose="020B0604020202020204" pitchFamily="34" charset="0"/>
+              <a:buChar char="•"/>
+            </a:pPr>
+            <a:r>
+              <a:rPr lang="en-US" sz="1200" dirty="0">
+                <a:solidFill>
+                  <a:schemeClr val="tx1"/>
+                </a:solidFill>
+                <a:latin typeface="Source Sans Pro" panose="020B0503030403020204" pitchFamily="34" charset="0"/>
+                <a:ea typeface="Source Sans Pro" panose="020B0503030403020204" pitchFamily="34" charset="0"/>
+              </a:rPr>
+              <a:t>Export to other formats (e.g., JSON, MAT, Excel)</a:t>
+            </a:r>
+          </a:p>
+          <a:p>
+            <a:pPr marL="115888" indent="-115888">
+              <a:buFont typeface="Arial" panose="020B0604020202020204" pitchFamily="34" charset="0"/>
+              <a:buChar char="•"/>
+            </a:pPr>
+            <a:r>
+              <a:rPr lang="en-US" sz="1200" dirty="0">
+                <a:solidFill>
+                  <a:schemeClr val="tx1"/>
+                </a:solidFill>
+                <a:latin typeface="Source Sans Pro" panose="020B0503030403020204" pitchFamily="34" charset="0"/>
+                <a:ea typeface="Source Sans Pro" panose="020B0503030403020204" pitchFamily="34" charset="0"/>
+              </a:rPr>
+              <a:t>GitHub release</a:t>
+            </a:r>
+          </a:p>
+          <a:p>
+            <a:pPr marL="115888" indent="-115888">
+              <a:buFont typeface="Arial" panose="020B0604020202020204" pitchFamily="34" charset="0"/>
+              <a:buChar char="•"/>
+            </a:pPr>
+            <a:r>
+              <a:rPr lang="en-US" sz="1200" dirty="0">
+                <a:solidFill>
+                  <a:schemeClr val="tx1"/>
+                </a:solidFill>
+                <a:latin typeface="Source Sans Pro" panose="020B0503030403020204" pitchFamily="34" charset="0"/>
+                <a:ea typeface="Source Sans Pro" panose="020B0503030403020204" pitchFamily="34" charset="0"/>
+              </a:rPr>
+              <a:t>Zenodo release to generate DOI</a:t>
+            </a:r>
+          </a:p>
+        </p:txBody>
+      </p:sp>
+      <p:sp>
+        <p:nvSpPr>
+          <p:cNvPr id="26" name="Rectangle 25">
+            <a:extLst>
+              <a:ext uri="{FF2B5EF4-FFF2-40B4-BE49-F238E27FC236}">
+                <a16:creationId xmlns:a16="http://schemas.microsoft.com/office/drawing/2014/main" id="{C8DB8D6C-9DAB-C3CD-677C-EA87DBA70757}"/>
+              </a:ext>
+            </a:extLst>
+          </p:cNvPr>
+          <p:cNvSpPr/>
+          <p:nvPr/>
+        </p:nvSpPr>
+        <p:spPr>
+          <a:xfrm>
+            <a:off x="2552602" y="2594620"/>
+            <a:ext cx="2410162" cy="1640114"/>
+          </a:xfrm>
+          <a:prstGeom prst="rect">
+            <a:avLst/>
+          </a:prstGeom>
+          <a:solidFill>
+            <a:srgbClr val="A44E3C">
+              <a:alpha val="29804"/>
+            </a:srgbClr>
+          </a:solidFill>
+          <a:ln>
+            <a:noFill/>
+          </a:ln>
+        </p:spPr>
+        <p:style>
+          <a:lnRef idx="2">
+            <a:schemeClr val="accent1">
+              <a:shade val="15000"/>
+            </a:schemeClr>
+          </a:lnRef>
+          <a:fillRef idx="1">
+            <a:schemeClr val="accent1"/>
+          </a:fillRef>
+          <a:effectRef idx="0">
+            <a:schemeClr val="accent1"/>
+          </a:effectRef>
+          <a:fontRef idx="minor">
+            <a:schemeClr val="lt1"/>
+          </a:fontRef>
+        </p:style>
+        <p:txBody>
+          <a:bodyPr lIns="45720" rIns="45720" rtlCol="0" anchor="t"/>
+          <a:lstStyle/>
+          <a:p>
+            <a:r>
+              <a:rPr lang="en-US" sz="1200" dirty="0">
+                <a:solidFill>
+                  <a:schemeClr val="tx1"/>
+                </a:solidFill>
+                <a:latin typeface="Source Sans Pro" panose="020B0503030403020204" pitchFamily="34" charset="0"/>
+                <a:ea typeface="Source Sans Pro" panose="020B0503030403020204" pitchFamily="34" charset="0"/>
+              </a:rPr>
+              <a:t>Use the model for simulations of interest</a:t>
+            </a:r>
+          </a:p>
+          <a:p>
+            <a:pPr marL="171450" indent="-171450">
+              <a:buFont typeface="Arial" panose="020B0604020202020204" pitchFamily="34" charset="0"/>
+              <a:buChar char="•"/>
+            </a:pPr>
+            <a:r>
+              <a:rPr lang="en-US" sz="1200" dirty="0">
+                <a:solidFill>
+                  <a:schemeClr val="tx1"/>
+                </a:solidFill>
+                <a:latin typeface="Source Sans Pro" panose="020B0503030403020204" pitchFamily="34" charset="0"/>
+                <a:ea typeface="Source Sans Pro" panose="020B0503030403020204" pitchFamily="34" charset="0"/>
+              </a:rPr>
+              <a:t>Use FBA to run the model for simulations of interest</a:t>
+            </a:r>
+          </a:p>
+        </p:txBody>
+      </p:sp>
+      <p:sp>
+        <p:nvSpPr>
+          <p:cNvPr id="23" name="Rectangle 22">
+            <a:extLst>
+              <a:ext uri="{FF2B5EF4-FFF2-40B4-BE49-F238E27FC236}">
+                <a16:creationId xmlns:a16="http://schemas.microsoft.com/office/drawing/2014/main" id="{B50CF35D-066B-4423-D3A7-3E8B14BEC74C}"/>
+              </a:ext>
+            </a:extLst>
+          </p:cNvPr>
+          <p:cNvSpPr/>
+          <p:nvPr/>
+        </p:nvSpPr>
+        <p:spPr>
+          <a:xfrm>
+            <a:off x="2552602" y="462517"/>
+            <a:ext cx="2410162" cy="1640114"/>
+          </a:xfrm>
+          <a:prstGeom prst="rect">
+            <a:avLst/>
+          </a:prstGeom>
+          <a:solidFill>
+            <a:srgbClr val="3E6D6F">
+              <a:alpha val="29804"/>
+            </a:srgbClr>
+          </a:solidFill>
+          <a:ln>
+            <a:noFill/>
+          </a:ln>
+        </p:spPr>
+        <p:style>
+          <a:lnRef idx="2">
+            <a:schemeClr val="accent1">
+              <a:shade val="15000"/>
+            </a:schemeClr>
+          </a:lnRef>
+          <a:fillRef idx="1">
+            <a:schemeClr val="accent1"/>
+          </a:fillRef>
+          <a:effectRef idx="0">
+            <a:schemeClr val="accent1"/>
+          </a:effectRef>
+          <a:fontRef idx="minor">
+            <a:schemeClr val="lt1"/>
+          </a:fontRef>
+        </p:style>
+        <p:txBody>
+          <a:bodyPr lIns="45720" rIns="45720" rtlCol="0" anchor="t"/>
+          <a:lstStyle/>
+          <a:p>
+            <a:r>
+              <a:rPr lang="en-US" sz="1200" dirty="0">
+                <a:solidFill>
+                  <a:schemeClr val="tx1"/>
+                </a:solidFill>
+                <a:latin typeface="Source Sans Pro" panose="020B0503030403020204" pitchFamily="34" charset="0"/>
+                <a:ea typeface="Source Sans Pro" panose="020B0503030403020204" pitchFamily="34" charset="0"/>
+              </a:rPr>
+              <a:t>Unit Tests with clear pass/fail run automatically with GitHub Actions</a:t>
+            </a:r>
+          </a:p>
+          <a:p>
+            <a:pPr marL="171450" indent="-171450">
+              <a:buFont typeface="Arial" panose="020B0604020202020204" pitchFamily="34" charset="0"/>
+              <a:buChar char="•"/>
+            </a:pPr>
+            <a:r>
+              <a:rPr lang="en-US" sz="1200" dirty="0">
+                <a:solidFill>
+                  <a:schemeClr val="tx1"/>
+                </a:solidFill>
+                <a:latin typeface="Source Sans Pro" panose="020B0503030403020204" pitchFamily="34" charset="0"/>
+                <a:ea typeface="Source Sans Pro" panose="020B0503030403020204" pitchFamily="34" charset="0"/>
+              </a:rPr>
+              <a:t>SBML Validation</a:t>
+            </a:r>
+          </a:p>
+          <a:p>
+            <a:pPr marL="171450" indent="-171450">
+              <a:buFont typeface="Arial" panose="020B0604020202020204" pitchFamily="34" charset="0"/>
+              <a:buChar char="•"/>
+            </a:pPr>
+            <a:r>
+              <a:rPr lang="en-US" sz="1200" dirty="0">
+                <a:solidFill>
+                  <a:schemeClr val="tx1"/>
+                </a:solidFill>
+                <a:latin typeface="Source Sans Pro" panose="020B0503030403020204" pitchFamily="34" charset="0"/>
+                <a:ea typeface="Source Sans Pro" panose="020B0503030403020204" pitchFamily="34" charset="0"/>
+              </a:rPr>
+              <a:t>Compare growth phenotypes to previous baseline, fail if the phenotypes are worse</a:t>
+            </a:r>
+          </a:p>
+          <a:p>
+            <a:pPr marL="400050" lvl="1" indent="-171450">
+              <a:buFont typeface="Courier New" panose="02070309020205020404" pitchFamily="49" charset="0"/>
+              <a:buChar char="o"/>
+            </a:pPr>
+            <a:endParaRPr lang="en-US" sz="1200" dirty="0">
+              <a:solidFill>
+                <a:schemeClr val="tx1"/>
+              </a:solidFill>
+              <a:latin typeface="Source Sans Pro" panose="020B0503030403020204" pitchFamily="34" charset="0"/>
+              <a:ea typeface="Source Sans Pro" panose="020B0503030403020204" pitchFamily="34" charset="0"/>
+            </a:endParaRPr>
+          </a:p>
+        </p:txBody>
+      </p:sp>
+      <p:sp>
+        <p:nvSpPr>
+          <p:cNvPr id="6" name="Freeform 5">
+            <a:extLst>
+              <a:ext uri="{FF2B5EF4-FFF2-40B4-BE49-F238E27FC236}">
+                <a16:creationId xmlns:a16="http://schemas.microsoft.com/office/drawing/2014/main" id="{88677A28-CA33-EAF8-F92B-E3B7B0848472}"/>
+              </a:ext>
+            </a:extLst>
+          </p:cNvPr>
+          <p:cNvSpPr/>
+          <p:nvPr/>
+        </p:nvSpPr>
+        <p:spPr>
+          <a:xfrm rot="16200000">
+            <a:off x="1210952" y="1092409"/>
+            <a:ext cx="346999" cy="2670048"/>
+          </a:xfrm>
+          <a:custGeom>
+            <a:avLst/>
+            <a:gdLst>
+              <a:gd name="csX0" fmla="*/ 0 w 521208"/>
+              <a:gd name="csY0" fmla="*/ 0 h 2785946"/>
+              <a:gd name="csX1" fmla="*/ 12734 w 521208"/>
+              <a:gd name="csY1" fmla="*/ 0 h 2785946"/>
+              <a:gd name="csX2" fmla="*/ 260604 w 521208"/>
+              <a:gd name="csY2" fmla="*/ 261057 h 2785946"/>
+              <a:gd name="csX3" fmla="*/ 508474 w 521208"/>
+              <a:gd name="csY3" fmla="*/ 0 h 2785946"/>
+              <a:gd name="csX4" fmla="*/ 521208 w 521208"/>
+              <a:gd name="csY4" fmla="*/ 0 h 2785946"/>
+              <a:gd name="csX5" fmla="*/ 521208 w 521208"/>
+              <a:gd name="csY5" fmla="*/ 2511478 h 2785946"/>
+              <a:gd name="csX6" fmla="*/ 260604 w 521208"/>
+              <a:gd name="csY6" fmla="*/ 2785946 h 2785946"/>
+              <a:gd name="csX7" fmla="*/ 0 w 521208"/>
+              <a:gd name="csY7" fmla="*/ 2511478 h 2785946"/>
+            </a:gdLst>
+            <a:ahLst/>
+            <a:cxnLst>
+              <a:cxn ang="0">
+                <a:pos x="csX0" y="csY0"/>
+              </a:cxn>
+              <a:cxn ang="0">
+                <a:pos x="csX1" y="csY1"/>
+              </a:cxn>
+              <a:cxn ang="0">
+                <a:pos x="csX2" y="csY2"/>
+              </a:cxn>
+              <a:cxn ang="0">
+                <a:pos x="csX3" y="csY3"/>
+              </a:cxn>
+              <a:cxn ang="0">
+                <a:pos x="csX4" y="csY4"/>
+              </a:cxn>
+              <a:cxn ang="0">
+                <a:pos x="csX5" y="csY5"/>
+              </a:cxn>
+              <a:cxn ang="0">
+                <a:pos x="csX6" y="csY6"/>
+              </a:cxn>
+              <a:cxn ang="0">
+                <a:pos x="csX7" y="csY7"/>
+              </a:cxn>
+            </a:cxnLst>
+            <a:rect l="l" t="t" r="r" b="b"/>
+            <a:pathLst>
+              <a:path w="521208" h="2785946">
+                <a:moveTo>
+                  <a:pt x="0" y="0"/>
+                </a:moveTo>
+                <a:lnTo>
+                  <a:pt x="12734" y="0"/>
+                </a:lnTo>
+                <a:lnTo>
+                  <a:pt x="260604" y="261057"/>
+                </a:lnTo>
+                <a:lnTo>
+                  <a:pt x="508474" y="0"/>
+                </a:lnTo>
+                <a:lnTo>
+                  <a:pt x="521208" y="0"/>
+                </a:lnTo>
+                <a:lnTo>
+                  <a:pt x="521208" y="2511478"/>
+                </a:lnTo>
+                <a:lnTo>
+                  <a:pt x="260604" y="2785946"/>
+                </a:lnTo>
+                <a:lnTo>
+                  <a:pt x="0" y="2511478"/>
+                </a:lnTo>
+                <a:close/>
+              </a:path>
+            </a:pathLst>
+          </a:custGeom>
+          <a:solidFill>
+            <a:srgbClr val="C36957"/>
+          </a:solidFill>
+          <a:ln>
+            <a:noFill/>
+          </a:ln>
+        </p:spPr>
+        <p:style>
+          <a:lnRef idx="0">
+            <a:scrgbClr r="0" g="0" b="0"/>
+          </a:lnRef>
+          <a:fillRef idx="0">
+            <a:scrgbClr r="0" g="0" b="0"/>
+          </a:fillRef>
+          <a:effectRef idx="0">
+            <a:scrgbClr r="0" g="0" b="0"/>
+          </a:effectRef>
+          <a:fontRef idx="minor">
+            <a:schemeClr val="lt1"/>
+          </a:fontRef>
+        </p:style>
+        <p:txBody>
+          <a:bodyPr vert="vert" wrap="square" rtlCol="0" anchor="ctr">
+            <a:noAutofit/>
+          </a:bodyPr>
+          <a:lstStyle/>
+          <a:p>
+            <a:pPr marL="0" marR="0" lvl="0" indent="0" algn="ctr" defTabSz="914400" rtl="0" eaLnBrk="1" fontAlgn="auto" latinLnBrk="0" hangingPunct="1">
+              <a:lnSpc>
+                <a:spcPct val="95000"/>
+              </a:lnSpc>
+              <a:spcBef>
+                <a:spcPts val="0"/>
+              </a:spcBef>
+              <a:spcAft>
+                <a:spcPts val="0"/>
+              </a:spcAft>
+              <a:buClrTx/>
+              <a:buSzTx/>
+              <a:buFontTx/>
+              <a:buNone/>
+              <a:tabLst/>
+              <a:defRPr/>
+            </a:pPr>
+            <a:r>
+              <a:rPr kumimoji="0" lang="en-US" sz="1700" b="1" i="0" u="none" strike="noStrike" kern="1200" cap="none" spc="0" normalizeH="0" baseline="0" noProof="0">
+                <a:ln>
+                  <a:noFill/>
+                </a:ln>
+                <a:solidFill>
+                  <a:srgbClr val="FFFFFF"/>
+                </a:solidFill>
+                <a:effectLst/>
+                <a:uLnTx/>
+                <a:uFillTx/>
+                <a:latin typeface="Source Sans Pro" panose="020B0503030403020204" pitchFamily="34" charset="0"/>
+                <a:ea typeface="Source Sans Pro" panose="020B0503030403020204" pitchFamily="34" charset="0"/>
+              </a:rPr>
+              <a:t>Release</a:t>
+            </a:r>
+          </a:p>
+        </p:txBody>
+      </p:sp>
+      <p:sp>
+        <p:nvSpPr>
+          <p:cNvPr id="7" name="Freeform 6">
+            <a:extLst>
+              <a:ext uri="{FF2B5EF4-FFF2-40B4-BE49-F238E27FC236}">
+                <a16:creationId xmlns:a16="http://schemas.microsoft.com/office/drawing/2014/main" id="{08084EF4-5117-8B4A-7FF8-05EC372BC57F}"/>
+              </a:ext>
+            </a:extLst>
+          </p:cNvPr>
+          <p:cNvSpPr/>
+          <p:nvPr/>
+        </p:nvSpPr>
+        <p:spPr>
+          <a:xfrm rot="16200000">
+            <a:off x="3706283" y="1086096"/>
+            <a:ext cx="346999" cy="2670048"/>
+          </a:xfrm>
+          <a:custGeom>
+            <a:avLst/>
+            <a:gdLst>
+              <a:gd name="csX0" fmla="*/ 0 w 521208"/>
+              <a:gd name="csY0" fmla="*/ 0 h 2785946"/>
+              <a:gd name="csX1" fmla="*/ 12734 w 521208"/>
+              <a:gd name="csY1" fmla="*/ 0 h 2785946"/>
+              <a:gd name="csX2" fmla="*/ 260604 w 521208"/>
+              <a:gd name="csY2" fmla="*/ 261057 h 2785946"/>
+              <a:gd name="csX3" fmla="*/ 508474 w 521208"/>
+              <a:gd name="csY3" fmla="*/ 0 h 2785946"/>
+              <a:gd name="csX4" fmla="*/ 521208 w 521208"/>
+              <a:gd name="csY4" fmla="*/ 0 h 2785946"/>
+              <a:gd name="csX5" fmla="*/ 521208 w 521208"/>
+              <a:gd name="csY5" fmla="*/ 2511478 h 2785946"/>
+              <a:gd name="csX6" fmla="*/ 260604 w 521208"/>
+              <a:gd name="csY6" fmla="*/ 2785946 h 2785946"/>
+              <a:gd name="csX7" fmla="*/ 0 w 521208"/>
+              <a:gd name="csY7" fmla="*/ 2511478 h 2785946"/>
+            </a:gdLst>
+            <a:ahLst/>
+            <a:cxnLst>
+              <a:cxn ang="0">
+                <a:pos x="csX0" y="csY0"/>
+              </a:cxn>
+              <a:cxn ang="0">
+                <a:pos x="csX1" y="csY1"/>
+              </a:cxn>
+              <a:cxn ang="0">
+                <a:pos x="csX2" y="csY2"/>
+              </a:cxn>
+              <a:cxn ang="0">
+                <a:pos x="csX3" y="csY3"/>
+              </a:cxn>
+              <a:cxn ang="0">
+                <a:pos x="csX4" y="csY4"/>
+              </a:cxn>
+              <a:cxn ang="0">
+                <a:pos x="csX5" y="csY5"/>
+              </a:cxn>
+              <a:cxn ang="0">
+                <a:pos x="csX6" y="csY6"/>
+              </a:cxn>
+              <a:cxn ang="0">
+                <a:pos x="csX7" y="csY7"/>
+              </a:cxn>
+            </a:cxnLst>
+            <a:rect l="l" t="t" r="r" b="b"/>
+            <a:pathLst>
+              <a:path w="521208" h="2785946">
+                <a:moveTo>
+                  <a:pt x="0" y="0"/>
+                </a:moveTo>
+                <a:lnTo>
+                  <a:pt x="12734" y="0"/>
+                </a:lnTo>
+                <a:lnTo>
+                  <a:pt x="260604" y="261057"/>
+                </a:lnTo>
+                <a:lnTo>
+                  <a:pt x="508474" y="0"/>
+                </a:lnTo>
+                <a:lnTo>
+                  <a:pt x="521208" y="0"/>
+                </a:lnTo>
+                <a:lnTo>
+                  <a:pt x="521208" y="2511478"/>
+                </a:lnTo>
+                <a:lnTo>
+                  <a:pt x="260604" y="2785946"/>
+                </a:lnTo>
+                <a:lnTo>
+                  <a:pt x="0" y="2511478"/>
+                </a:lnTo>
+                <a:close/>
+              </a:path>
+            </a:pathLst>
+          </a:custGeom>
+          <a:solidFill>
+            <a:srgbClr val="A44E3C"/>
+          </a:solidFill>
+          <a:ln>
+            <a:noFill/>
+          </a:ln>
+        </p:spPr>
+        <p:style>
+          <a:lnRef idx="0">
+            <a:scrgbClr r="0" g="0" b="0"/>
+          </a:lnRef>
+          <a:fillRef idx="0">
+            <a:scrgbClr r="0" g="0" b="0"/>
+          </a:fillRef>
+          <a:effectRef idx="0">
+            <a:scrgbClr r="0" g="0" b="0"/>
+          </a:effectRef>
+          <a:fontRef idx="minor">
+            <a:schemeClr val="lt1"/>
+          </a:fontRef>
+        </p:style>
+        <p:txBody>
+          <a:bodyPr vert="vert" wrap="square" rtlCol="0" anchor="ctr">
+            <a:noAutofit/>
+          </a:bodyPr>
+          <a:lstStyle/>
+          <a:p>
+            <a:pPr marL="0" marR="0" lvl="0" indent="0" algn="ctr" defTabSz="914400" rtl="0" eaLnBrk="1" fontAlgn="auto" latinLnBrk="0" hangingPunct="1">
+              <a:lnSpc>
+                <a:spcPct val="95000"/>
+              </a:lnSpc>
+              <a:spcBef>
+                <a:spcPts val="0"/>
+              </a:spcBef>
+              <a:spcAft>
+                <a:spcPts val="0"/>
+              </a:spcAft>
+              <a:buClrTx/>
+              <a:buSzTx/>
+              <a:buFontTx/>
+              <a:buNone/>
+              <a:tabLst/>
+              <a:defRPr/>
+            </a:pPr>
+            <a:r>
+              <a:rPr kumimoji="0" lang="en-US" sz="1700" b="1" i="0" u="none" strike="noStrike" kern="1200" cap="none" spc="0" normalizeH="0" baseline="0" noProof="0">
+                <a:ln>
+                  <a:noFill/>
+                </a:ln>
+                <a:solidFill>
+                  <a:srgbClr val="FFFFFF"/>
+                </a:solidFill>
+                <a:effectLst/>
+                <a:uLnTx/>
+                <a:uFillTx/>
+                <a:latin typeface="Source Sans Pro" panose="020B0503030403020204" pitchFamily="34" charset="0"/>
+                <a:ea typeface="Source Sans Pro" panose="020B0503030403020204" pitchFamily="34" charset="0"/>
+              </a:rPr>
+              <a:t>Run</a:t>
+            </a:r>
+          </a:p>
+        </p:txBody>
+      </p:sp>
+      <p:sp>
+        <p:nvSpPr>
+          <p:cNvPr id="8" name="Freeform 7">
+            <a:extLst>
+              <a:ext uri="{FF2B5EF4-FFF2-40B4-BE49-F238E27FC236}">
+                <a16:creationId xmlns:a16="http://schemas.microsoft.com/office/drawing/2014/main" id="{66965428-4894-7BDF-B1AC-1A7B7AA6E43F}"/>
+              </a:ext>
+            </a:extLst>
+          </p:cNvPr>
+          <p:cNvSpPr/>
+          <p:nvPr/>
+        </p:nvSpPr>
+        <p:spPr>
+          <a:xfrm rot="16200000">
+            <a:off x="6213361" y="1086096"/>
+            <a:ext cx="346999" cy="2670048"/>
+          </a:xfrm>
+          <a:custGeom>
+            <a:avLst/>
+            <a:gdLst>
+              <a:gd name="csX0" fmla="*/ 0 w 521208"/>
+              <a:gd name="csY0" fmla="*/ 0 h 2785946"/>
+              <a:gd name="csX1" fmla="*/ 12734 w 521208"/>
+              <a:gd name="csY1" fmla="*/ 0 h 2785946"/>
+              <a:gd name="csX2" fmla="*/ 260604 w 521208"/>
+              <a:gd name="csY2" fmla="*/ 261057 h 2785946"/>
+              <a:gd name="csX3" fmla="*/ 508474 w 521208"/>
+              <a:gd name="csY3" fmla="*/ 0 h 2785946"/>
+              <a:gd name="csX4" fmla="*/ 521208 w 521208"/>
+              <a:gd name="csY4" fmla="*/ 0 h 2785946"/>
+              <a:gd name="csX5" fmla="*/ 521208 w 521208"/>
+              <a:gd name="csY5" fmla="*/ 2511478 h 2785946"/>
+              <a:gd name="csX6" fmla="*/ 260604 w 521208"/>
+              <a:gd name="csY6" fmla="*/ 2785946 h 2785946"/>
+              <a:gd name="csX7" fmla="*/ 0 w 521208"/>
+              <a:gd name="csY7" fmla="*/ 2511478 h 2785946"/>
+            </a:gdLst>
+            <a:ahLst/>
+            <a:cxnLst>
+              <a:cxn ang="0">
+                <a:pos x="csX0" y="csY0"/>
+              </a:cxn>
+              <a:cxn ang="0">
+                <a:pos x="csX1" y="csY1"/>
+              </a:cxn>
+              <a:cxn ang="0">
+                <a:pos x="csX2" y="csY2"/>
+              </a:cxn>
+              <a:cxn ang="0">
+                <a:pos x="csX3" y="csY3"/>
+              </a:cxn>
+              <a:cxn ang="0">
+                <a:pos x="csX4" y="csY4"/>
+              </a:cxn>
+              <a:cxn ang="0">
+                <a:pos x="csX5" y="csY5"/>
+              </a:cxn>
+              <a:cxn ang="0">
+                <a:pos x="csX6" y="csY6"/>
+              </a:cxn>
+              <a:cxn ang="0">
+                <a:pos x="csX7" y="csY7"/>
+              </a:cxn>
+            </a:cxnLst>
+            <a:rect l="l" t="t" r="r" b="b"/>
+            <a:pathLst>
+              <a:path w="521208" h="2785946">
+                <a:moveTo>
+                  <a:pt x="0" y="0"/>
+                </a:moveTo>
+                <a:lnTo>
+                  <a:pt x="12734" y="0"/>
+                </a:lnTo>
+                <a:lnTo>
+                  <a:pt x="260604" y="261057"/>
+                </a:lnTo>
+                <a:lnTo>
+                  <a:pt x="508474" y="0"/>
+                </a:lnTo>
+                <a:lnTo>
+                  <a:pt x="521208" y="0"/>
+                </a:lnTo>
+                <a:lnTo>
+                  <a:pt x="521208" y="2511478"/>
+                </a:lnTo>
+                <a:lnTo>
+                  <a:pt x="260604" y="2785946"/>
+                </a:lnTo>
+                <a:lnTo>
+                  <a:pt x="0" y="2511478"/>
+                </a:lnTo>
+                <a:close/>
+              </a:path>
+            </a:pathLst>
+          </a:custGeom>
+          <a:solidFill>
+            <a:srgbClr val="893625"/>
+          </a:solidFill>
+          <a:ln>
+            <a:noFill/>
+          </a:ln>
+        </p:spPr>
+        <p:style>
+          <a:lnRef idx="0">
+            <a:scrgbClr r="0" g="0" b="0"/>
+          </a:lnRef>
+          <a:fillRef idx="0">
+            <a:scrgbClr r="0" g="0" b="0"/>
+          </a:fillRef>
+          <a:effectRef idx="0">
+            <a:scrgbClr r="0" g="0" b="0"/>
+          </a:effectRef>
+          <a:fontRef idx="minor">
+            <a:schemeClr val="lt1"/>
+          </a:fontRef>
+        </p:style>
+        <p:txBody>
+          <a:bodyPr vert="vert" wrap="square" rtlCol="0" anchor="ctr">
+            <a:noAutofit/>
+          </a:bodyPr>
+          <a:lstStyle/>
+          <a:p>
+            <a:pPr marL="0" marR="0" lvl="0" indent="0" algn="ctr" defTabSz="914400" rtl="0" eaLnBrk="1" fontAlgn="auto" latinLnBrk="0" hangingPunct="1">
+              <a:lnSpc>
+                <a:spcPct val="95000"/>
+              </a:lnSpc>
+              <a:spcBef>
+                <a:spcPts val="0"/>
+              </a:spcBef>
+              <a:spcAft>
+                <a:spcPts val="0"/>
+              </a:spcAft>
+              <a:buClrTx/>
+              <a:buSzTx/>
+              <a:buFontTx/>
+              <a:buNone/>
+              <a:tabLst/>
+              <a:defRPr/>
+            </a:pPr>
+            <a:r>
+              <a:rPr kumimoji="0" lang="en-US" sz="1700" b="1" i="0" u="none" strike="noStrike" kern="1200" cap="none" spc="0" normalizeH="0" baseline="0" noProof="0">
+                <a:ln>
+                  <a:noFill/>
+                </a:ln>
+                <a:solidFill>
+                  <a:srgbClr val="FFFFFF"/>
+                </a:solidFill>
+                <a:effectLst/>
+                <a:uLnTx/>
+                <a:uFillTx/>
+                <a:latin typeface="Source Sans Pro" panose="020B0503030403020204" pitchFamily="34" charset="0"/>
+                <a:ea typeface="Source Sans Pro" panose="020B0503030403020204" pitchFamily="34" charset="0"/>
+              </a:rPr>
+              <a:t>Monitor</a:t>
+            </a:r>
+          </a:p>
+        </p:txBody>
+      </p:sp>
+      <p:sp>
+        <p:nvSpPr>
+          <p:cNvPr id="4" name="Freeform 3">
+            <a:extLst>
+              <a:ext uri="{FF2B5EF4-FFF2-40B4-BE49-F238E27FC236}">
+                <a16:creationId xmlns:a16="http://schemas.microsoft.com/office/drawing/2014/main" id="{8100E688-9779-3E34-B6B2-E5F3E315F152}"/>
+              </a:ext>
+            </a:extLst>
+          </p:cNvPr>
+          <p:cNvSpPr/>
+          <p:nvPr/>
+        </p:nvSpPr>
+        <p:spPr>
+          <a:xfrm rot="16200000">
+            <a:off x="3709243" y="-1031191"/>
+            <a:ext cx="346999" cy="2667875"/>
+          </a:xfrm>
+          <a:custGeom>
+            <a:avLst/>
+            <a:gdLst>
+              <a:gd name="csX0" fmla="*/ 0 w 521208"/>
+              <a:gd name="csY0" fmla="*/ 0 h 2785946"/>
+              <a:gd name="csX1" fmla="*/ 12734 w 521208"/>
+              <a:gd name="csY1" fmla="*/ 0 h 2785946"/>
+              <a:gd name="csX2" fmla="*/ 260604 w 521208"/>
+              <a:gd name="csY2" fmla="*/ 261057 h 2785946"/>
+              <a:gd name="csX3" fmla="*/ 508474 w 521208"/>
+              <a:gd name="csY3" fmla="*/ 0 h 2785946"/>
+              <a:gd name="csX4" fmla="*/ 521208 w 521208"/>
+              <a:gd name="csY4" fmla="*/ 0 h 2785946"/>
+              <a:gd name="csX5" fmla="*/ 521208 w 521208"/>
+              <a:gd name="csY5" fmla="*/ 2511478 h 2785946"/>
+              <a:gd name="csX6" fmla="*/ 260604 w 521208"/>
+              <a:gd name="csY6" fmla="*/ 2785946 h 2785946"/>
+              <a:gd name="csX7" fmla="*/ 0 w 521208"/>
+              <a:gd name="csY7" fmla="*/ 2511478 h 2785946"/>
+            </a:gdLst>
+            <a:ahLst/>
+            <a:cxnLst>
+              <a:cxn ang="0">
+                <a:pos x="csX0" y="csY0"/>
+              </a:cxn>
+              <a:cxn ang="0">
+                <a:pos x="csX1" y="csY1"/>
+              </a:cxn>
+              <a:cxn ang="0">
+                <a:pos x="csX2" y="csY2"/>
+              </a:cxn>
+              <a:cxn ang="0">
+                <a:pos x="csX3" y="csY3"/>
+              </a:cxn>
+              <a:cxn ang="0">
+                <a:pos x="csX4" y="csY4"/>
+              </a:cxn>
+              <a:cxn ang="0">
+                <a:pos x="csX5" y="csY5"/>
+              </a:cxn>
+              <a:cxn ang="0">
+                <a:pos x="csX6" y="csY6"/>
+              </a:cxn>
+              <a:cxn ang="0">
+                <a:pos x="csX7" y="csY7"/>
+              </a:cxn>
+            </a:cxnLst>
+            <a:rect l="l" t="t" r="r" b="b"/>
+            <a:pathLst>
+              <a:path w="521208" h="2785946">
+                <a:moveTo>
+                  <a:pt x="0" y="0"/>
+                </a:moveTo>
+                <a:lnTo>
+                  <a:pt x="12734" y="0"/>
+                </a:lnTo>
+                <a:lnTo>
+                  <a:pt x="260604" y="261057"/>
+                </a:lnTo>
+                <a:lnTo>
+                  <a:pt x="508474" y="0"/>
+                </a:lnTo>
+                <a:lnTo>
+                  <a:pt x="521208" y="0"/>
+                </a:lnTo>
+                <a:lnTo>
+                  <a:pt x="521208" y="2511478"/>
+                </a:lnTo>
+                <a:lnTo>
+                  <a:pt x="260604" y="2785946"/>
+                </a:lnTo>
+                <a:lnTo>
+                  <a:pt x="0" y="2511478"/>
+                </a:lnTo>
+                <a:close/>
+              </a:path>
+            </a:pathLst>
+          </a:custGeom>
+          <a:solidFill>
+            <a:srgbClr val="3E6D6F"/>
+          </a:solidFill>
+          <a:ln>
+            <a:noFill/>
+          </a:ln>
+        </p:spPr>
+        <p:style>
+          <a:lnRef idx="0">
+            <a:scrgbClr r="0" g="0" b="0"/>
+          </a:lnRef>
+          <a:fillRef idx="0">
+            <a:scrgbClr r="0" g="0" b="0"/>
+          </a:fillRef>
+          <a:effectRef idx="0">
+            <a:scrgbClr r="0" g="0" b="0"/>
+          </a:effectRef>
+          <a:fontRef idx="minor">
+            <a:schemeClr val="lt1"/>
+          </a:fontRef>
+        </p:style>
+        <p:txBody>
+          <a:bodyPr vert="vert" wrap="square" rtlCol="0" anchor="ctr">
+            <a:noAutofit/>
+          </a:bodyPr>
+          <a:lstStyle/>
+          <a:p>
+            <a:pPr marL="0" marR="0" lvl="0" indent="0" algn="ctr" defTabSz="914400" rtl="0" eaLnBrk="1" fontAlgn="auto" latinLnBrk="0" hangingPunct="1">
+              <a:lnSpc>
+                <a:spcPct val="95000"/>
+              </a:lnSpc>
+              <a:spcBef>
+                <a:spcPts val="0"/>
+              </a:spcBef>
+              <a:spcAft>
+                <a:spcPts val="0"/>
+              </a:spcAft>
+              <a:buClrTx/>
+              <a:buSzTx/>
+              <a:buFontTx/>
+              <a:buNone/>
+              <a:tabLst/>
+              <a:defRPr/>
+            </a:pPr>
+            <a:r>
+              <a:rPr kumimoji="0" lang="en-US" sz="1700" b="1" i="0" u="none" strike="noStrike" kern="1200" cap="none" spc="0" normalizeH="0" baseline="0" noProof="0">
+                <a:ln>
+                  <a:noFill/>
+                </a:ln>
+                <a:solidFill>
+                  <a:srgbClr val="FFFFFF"/>
+                </a:solidFill>
+                <a:effectLst/>
+                <a:uLnTx/>
+                <a:uFillTx/>
+                <a:latin typeface="Source Sans Pro" panose="020B0503030403020204" pitchFamily="34" charset="0"/>
+                <a:ea typeface="Source Sans Pro" panose="020B0503030403020204" pitchFamily="34" charset="0"/>
+              </a:rPr>
+              <a:t>Test</a:t>
+            </a:r>
+          </a:p>
+        </p:txBody>
+      </p:sp>
+      <p:sp>
+        <p:nvSpPr>
+          <p:cNvPr id="5" name="Freeform 4">
+            <a:extLst>
+              <a:ext uri="{FF2B5EF4-FFF2-40B4-BE49-F238E27FC236}">
+                <a16:creationId xmlns:a16="http://schemas.microsoft.com/office/drawing/2014/main" id="{F733D3B3-1A09-C624-FCDC-2B1DA5AC1782}"/>
+              </a:ext>
+            </a:extLst>
+          </p:cNvPr>
+          <p:cNvSpPr/>
+          <p:nvPr/>
+        </p:nvSpPr>
+        <p:spPr>
+          <a:xfrm rot="16200000">
+            <a:off x="6214448" y="-1031193"/>
+            <a:ext cx="346999" cy="2667875"/>
+          </a:xfrm>
+          <a:custGeom>
+            <a:avLst/>
+            <a:gdLst>
+              <a:gd name="csX0" fmla="*/ 0 w 521208"/>
+              <a:gd name="csY0" fmla="*/ 0 h 2785946"/>
+              <a:gd name="csX1" fmla="*/ 12734 w 521208"/>
+              <a:gd name="csY1" fmla="*/ 0 h 2785946"/>
+              <a:gd name="csX2" fmla="*/ 260604 w 521208"/>
+              <a:gd name="csY2" fmla="*/ 261057 h 2785946"/>
+              <a:gd name="csX3" fmla="*/ 508474 w 521208"/>
+              <a:gd name="csY3" fmla="*/ 0 h 2785946"/>
+              <a:gd name="csX4" fmla="*/ 521208 w 521208"/>
+              <a:gd name="csY4" fmla="*/ 0 h 2785946"/>
+              <a:gd name="csX5" fmla="*/ 521208 w 521208"/>
+              <a:gd name="csY5" fmla="*/ 2511478 h 2785946"/>
+              <a:gd name="csX6" fmla="*/ 260604 w 521208"/>
+              <a:gd name="csY6" fmla="*/ 2785946 h 2785946"/>
+              <a:gd name="csX7" fmla="*/ 0 w 521208"/>
+              <a:gd name="csY7" fmla="*/ 2511478 h 2785946"/>
+            </a:gdLst>
+            <a:ahLst/>
+            <a:cxnLst>
+              <a:cxn ang="0">
+                <a:pos x="csX0" y="csY0"/>
+              </a:cxn>
+              <a:cxn ang="0">
+                <a:pos x="csX1" y="csY1"/>
+              </a:cxn>
+              <a:cxn ang="0">
+                <a:pos x="csX2" y="csY2"/>
+              </a:cxn>
+              <a:cxn ang="0">
+                <a:pos x="csX3" y="csY3"/>
+              </a:cxn>
+              <a:cxn ang="0">
+                <a:pos x="csX4" y="csY4"/>
+              </a:cxn>
+              <a:cxn ang="0">
+                <a:pos x="csX5" y="csY5"/>
+              </a:cxn>
+              <a:cxn ang="0">
+                <a:pos x="csX6" y="csY6"/>
+              </a:cxn>
+              <a:cxn ang="0">
+                <a:pos x="csX7" y="csY7"/>
+              </a:cxn>
+            </a:cxnLst>
+            <a:rect l="l" t="t" r="r" b="b"/>
+            <a:pathLst>
+              <a:path w="521208" h="2785946">
+                <a:moveTo>
+                  <a:pt x="0" y="0"/>
+                </a:moveTo>
+                <a:lnTo>
+                  <a:pt x="12734" y="0"/>
+                </a:lnTo>
+                <a:lnTo>
+                  <a:pt x="260604" y="261057"/>
+                </a:lnTo>
+                <a:lnTo>
+                  <a:pt x="508474" y="0"/>
+                </a:lnTo>
+                <a:lnTo>
+                  <a:pt x="521208" y="0"/>
+                </a:lnTo>
+                <a:lnTo>
+                  <a:pt x="521208" y="2511478"/>
+                </a:lnTo>
+                <a:lnTo>
+                  <a:pt x="260604" y="2785946"/>
+                </a:lnTo>
+                <a:lnTo>
+                  <a:pt x="0" y="2511478"/>
+                </a:lnTo>
+                <a:close/>
+              </a:path>
+            </a:pathLst>
+          </a:custGeom>
+          <a:solidFill>
+            <a:schemeClr val="accent1"/>
+          </a:solidFill>
+          <a:ln>
+            <a:noFill/>
+          </a:ln>
+        </p:spPr>
+        <p:style>
+          <a:lnRef idx="0">
+            <a:scrgbClr r="0" g="0" b="0"/>
+          </a:lnRef>
+          <a:fillRef idx="0">
+            <a:scrgbClr r="0" g="0" b="0"/>
+          </a:fillRef>
+          <a:effectRef idx="0">
+            <a:scrgbClr r="0" g="0" b="0"/>
+          </a:effectRef>
+          <a:fontRef idx="minor">
+            <a:schemeClr val="lt1"/>
+          </a:fontRef>
+        </p:style>
+        <p:txBody>
+          <a:bodyPr vert="vert" wrap="square" rtlCol="0" anchor="ctr">
+            <a:noAutofit/>
+          </a:bodyPr>
+          <a:lstStyle/>
+          <a:p>
+            <a:pPr marL="0" marR="0" lvl="0" indent="0" algn="ctr" defTabSz="914400" rtl="0" eaLnBrk="1" fontAlgn="auto" latinLnBrk="0" hangingPunct="1">
+              <a:lnSpc>
+                <a:spcPct val="95000"/>
+              </a:lnSpc>
+              <a:spcBef>
+                <a:spcPts val="0"/>
+              </a:spcBef>
+              <a:spcAft>
+                <a:spcPts val="0"/>
+              </a:spcAft>
+              <a:buClrTx/>
+              <a:buSzTx/>
+              <a:buFontTx/>
+              <a:buNone/>
+              <a:tabLst/>
+              <a:defRPr/>
+            </a:pPr>
+            <a:r>
+              <a:rPr kumimoji="0" lang="en-US" sz="1700" b="1" i="0" u="none" strike="noStrike" kern="1200" cap="none" spc="0" normalizeH="0" baseline="0" noProof="0">
+                <a:ln>
+                  <a:noFill/>
+                </a:ln>
+                <a:solidFill>
+                  <a:srgbClr val="FFFFFF"/>
+                </a:solidFill>
+                <a:effectLst/>
+                <a:uLnTx/>
+                <a:uFillTx/>
+                <a:latin typeface="Source Sans Pro" panose="020B0503030403020204" pitchFamily="34" charset="0"/>
+                <a:ea typeface="Source Sans Pro" panose="020B0503030403020204" pitchFamily="34" charset="0"/>
+              </a:rPr>
+              <a:t>Report</a:t>
+            </a:r>
+          </a:p>
+        </p:txBody>
+      </p:sp>
+      <p:sp>
+        <p:nvSpPr>
+          <p:cNvPr id="3" name="Freeform 2">
+            <a:extLst>
+              <a:ext uri="{FF2B5EF4-FFF2-40B4-BE49-F238E27FC236}">
+                <a16:creationId xmlns:a16="http://schemas.microsoft.com/office/drawing/2014/main" id="{2E282EEC-6C5D-E5EB-16F8-C87E3D80AEDF}"/>
+              </a:ext>
+            </a:extLst>
+          </p:cNvPr>
+          <p:cNvSpPr/>
+          <p:nvPr/>
+        </p:nvSpPr>
+        <p:spPr>
+          <a:xfrm rot="16200000">
+            <a:off x="1210953" y="-1031193"/>
+            <a:ext cx="346999" cy="2667875"/>
+          </a:xfrm>
+          <a:custGeom>
+            <a:avLst/>
+            <a:gdLst>
+              <a:gd name="csX0" fmla="*/ 0 w 521208"/>
+              <a:gd name="csY0" fmla="*/ 0 h 2785946"/>
+              <a:gd name="csX1" fmla="*/ 12734 w 521208"/>
+              <a:gd name="csY1" fmla="*/ 0 h 2785946"/>
+              <a:gd name="csX2" fmla="*/ 260604 w 521208"/>
+              <a:gd name="csY2" fmla="*/ 261057 h 2785946"/>
+              <a:gd name="csX3" fmla="*/ 508474 w 521208"/>
+              <a:gd name="csY3" fmla="*/ 0 h 2785946"/>
+              <a:gd name="csX4" fmla="*/ 521208 w 521208"/>
+              <a:gd name="csY4" fmla="*/ 0 h 2785946"/>
+              <a:gd name="csX5" fmla="*/ 521208 w 521208"/>
+              <a:gd name="csY5" fmla="*/ 2511478 h 2785946"/>
+              <a:gd name="csX6" fmla="*/ 260604 w 521208"/>
+              <a:gd name="csY6" fmla="*/ 2785946 h 2785946"/>
+              <a:gd name="csX7" fmla="*/ 0 w 521208"/>
+              <a:gd name="csY7" fmla="*/ 2511478 h 2785946"/>
+            </a:gdLst>
+            <a:ahLst/>
+            <a:cxnLst>
+              <a:cxn ang="0">
+                <a:pos x="csX0" y="csY0"/>
+              </a:cxn>
+              <a:cxn ang="0">
+                <a:pos x="csX1" y="csY1"/>
+              </a:cxn>
+              <a:cxn ang="0">
+                <a:pos x="csX2" y="csY2"/>
+              </a:cxn>
+              <a:cxn ang="0">
+                <a:pos x="csX3" y="csY3"/>
+              </a:cxn>
+              <a:cxn ang="0">
+                <a:pos x="csX4" y="csY4"/>
+              </a:cxn>
+              <a:cxn ang="0">
+                <a:pos x="csX5" y="csY5"/>
+              </a:cxn>
+              <a:cxn ang="0">
+                <a:pos x="csX6" y="csY6"/>
+              </a:cxn>
+              <a:cxn ang="0">
+                <a:pos x="csX7" y="csY7"/>
+              </a:cxn>
+            </a:cxnLst>
+            <a:rect l="l" t="t" r="r" b="b"/>
+            <a:pathLst>
+              <a:path w="521208" h="2785946">
+                <a:moveTo>
+                  <a:pt x="0" y="0"/>
+                </a:moveTo>
+                <a:lnTo>
+                  <a:pt x="12734" y="0"/>
+                </a:lnTo>
+                <a:lnTo>
+                  <a:pt x="260604" y="261057"/>
+                </a:lnTo>
+                <a:lnTo>
+                  <a:pt x="508474" y="0"/>
+                </a:lnTo>
+                <a:lnTo>
+                  <a:pt x="521208" y="0"/>
+                </a:lnTo>
+                <a:lnTo>
+                  <a:pt x="521208" y="2511478"/>
+                </a:lnTo>
+                <a:lnTo>
+                  <a:pt x="260604" y="2785946"/>
+                </a:lnTo>
+                <a:lnTo>
+                  <a:pt x="0" y="2511478"/>
+                </a:lnTo>
+                <a:close/>
+              </a:path>
+            </a:pathLst>
+          </a:custGeom>
+          <a:solidFill>
+            <a:srgbClr val="25565A"/>
+          </a:solidFill>
+          <a:ln>
+            <a:noFill/>
+          </a:ln>
+        </p:spPr>
+        <p:style>
+          <a:lnRef idx="0">
+            <a:scrgbClr r="0" g="0" b="0"/>
+          </a:lnRef>
+          <a:fillRef idx="0">
+            <a:scrgbClr r="0" g="0" b="0"/>
+          </a:fillRef>
+          <a:effectRef idx="0">
+            <a:scrgbClr r="0" g="0" b="0"/>
+          </a:effectRef>
+          <a:fontRef idx="minor">
+            <a:schemeClr val="lt1"/>
+          </a:fontRef>
+        </p:style>
+        <p:txBody>
+          <a:bodyPr vert="vert" wrap="square" rtlCol="0" anchor="ctr">
+            <a:noAutofit/>
+          </a:bodyPr>
+          <a:lstStyle/>
+          <a:p>
+            <a:pPr marL="0" marR="0" lvl="0" indent="0" algn="ctr" defTabSz="914400" rtl="0" eaLnBrk="1" fontAlgn="auto" latinLnBrk="0" hangingPunct="1">
+              <a:lnSpc>
+                <a:spcPct val="95000"/>
+              </a:lnSpc>
+              <a:spcBef>
+                <a:spcPts val="0"/>
+              </a:spcBef>
+              <a:spcAft>
+                <a:spcPts val="0"/>
+              </a:spcAft>
+              <a:buClrTx/>
+              <a:buSzTx/>
+              <a:buFontTx/>
+              <a:buNone/>
+              <a:tabLst/>
+              <a:defRPr/>
+            </a:pPr>
+            <a:r>
+              <a:rPr kumimoji="0" lang="en-US" sz="1700" b="1" i="0" u="none" strike="noStrike" kern="1200" cap="none" spc="0" normalizeH="0" baseline="0" noProof="0">
+                <a:ln>
+                  <a:noFill/>
+                </a:ln>
+                <a:solidFill>
+                  <a:srgbClr val="FFFFFF"/>
+                </a:solidFill>
+                <a:effectLst/>
+                <a:uLnTx/>
+                <a:uFillTx/>
+                <a:latin typeface="Source Sans Pro" panose="020B0503030403020204" pitchFamily="34" charset="0"/>
+                <a:ea typeface="Source Sans Pro" panose="020B0503030403020204" pitchFamily="34" charset="0"/>
+              </a:rPr>
+              <a:t>Curate</a:t>
+            </a:r>
+          </a:p>
+        </p:txBody>
+      </p:sp>
+      <p:sp>
+        <p:nvSpPr>
+          <p:cNvPr id="20" name="Rectangle 19">
+            <a:extLst>
+              <a:ext uri="{FF2B5EF4-FFF2-40B4-BE49-F238E27FC236}">
+                <a16:creationId xmlns:a16="http://schemas.microsoft.com/office/drawing/2014/main" id="{6C21B286-0CA6-E002-157E-5C8021A48D98}"/>
+              </a:ext>
+            </a:extLst>
+          </p:cNvPr>
+          <p:cNvSpPr/>
+          <p:nvPr/>
+        </p:nvSpPr>
+        <p:spPr>
+          <a:xfrm>
+            <a:off x="50515" y="469380"/>
+            <a:ext cx="2410162" cy="1640114"/>
+          </a:xfrm>
+          <a:prstGeom prst="rect">
+            <a:avLst/>
+          </a:prstGeom>
+          <a:solidFill>
+            <a:srgbClr val="25565A">
+              <a:alpha val="29804"/>
+            </a:srgbClr>
+          </a:solidFill>
+          <a:ln>
+            <a:noFill/>
+          </a:ln>
+        </p:spPr>
+        <p:style>
+          <a:lnRef idx="2">
+            <a:schemeClr val="accent1">
+              <a:shade val="15000"/>
+            </a:schemeClr>
+          </a:lnRef>
+          <a:fillRef idx="1">
+            <a:schemeClr val="accent1"/>
+          </a:fillRef>
+          <a:effectRef idx="0">
+            <a:schemeClr val="accent1"/>
+          </a:effectRef>
+          <a:fontRef idx="minor">
+            <a:schemeClr val="lt1"/>
+          </a:fontRef>
+        </p:style>
+        <p:txBody>
+          <a:bodyPr lIns="45720" rIns="45720" rtlCol="0" anchor="t"/>
+          <a:lstStyle/>
+          <a:p>
+            <a:r>
+              <a:rPr lang="en-US" sz="1200" dirty="0">
+                <a:solidFill>
+                  <a:schemeClr val="tx1"/>
+                </a:solidFill>
+                <a:latin typeface="Source Sans Pro" panose="020B0503030403020204" pitchFamily="34" charset="0"/>
+                <a:ea typeface="Source Sans Pro" panose="020B0503030403020204" pitchFamily="34" charset="0"/>
+              </a:rPr>
+              <a:t>Add/remove/edit reactions, metabolites, genes</a:t>
+            </a:r>
+          </a:p>
+          <a:p>
+            <a:pPr marL="171450" indent="-171450">
+              <a:buFont typeface="Arial" panose="020B0604020202020204" pitchFamily="34" charset="0"/>
+              <a:buChar char="•"/>
+            </a:pPr>
+            <a:r>
+              <a:rPr lang="en-US" sz="1200" dirty="0">
+                <a:solidFill>
+                  <a:schemeClr val="tx1"/>
+                </a:solidFill>
+                <a:latin typeface="Source Sans Pro" panose="020B0503030403020204" pitchFamily="34" charset="0"/>
+                <a:ea typeface="Source Sans Pro" panose="020B0503030403020204" pitchFamily="34" charset="0"/>
+              </a:rPr>
+              <a:t>Commit changes frequently with semantic commits</a:t>
+            </a:r>
+          </a:p>
+          <a:p>
+            <a:pPr marL="115888" indent="-115888">
+              <a:buFont typeface="Arial" panose="020B0604020202020204" pitchFamily="34" charset="0"/>
+              <a:buChar char="•"/>
+            </a:pPr>
+            <a:r>
+              <a:rPr lang="en-US" sz="1200" dirty="0">
+                <a:solidFill>
+                  <a:schemeClr val="tx1"/>
+                </a:solidFill>
+                <a:latin typeface="Source Sans Pro" panose="020B0503030403020204" pitchFamily="34" charset="0"/>
+                <a:ea typeface="Source Sans Pro" panose="020B0503030403020204" pitchFamily="34" charset="0"/>
+              </a:rPr>
+              <a:t>Track removed reactions/metabolites</a:t>
+            </a:r>
+          </a:p>
+          <a:p>
+            <a:pPr marL="115888" indent="-115888">
+              <a:buFont typeface="Arial" panose="020B0604020202020204" pitchFamily="34" charset="0"/>
+              <a:buChar char="•"/>
+            </a:pPr>
+            <a:r>
+              <a:rPr lang="en-US" sz="1200" dirty="0">
+                <a:solidFill>
+                  <a:schemeClr val="tx1"/>
+                </a:solidFill>
+                <a:latin typeface="Source Sans Pro" panose="020B0503030403020204" pitchFamily="34" charset="0"/>
+                <a:ea typeface="Source Sans Pro" panose="020B0503030403020204" pitchFamily="34" charset="0"/>
+              </a:rPr>
+              <a:t>Open a Pull Request, document rationale behind decisions</a:t>
+            </a:r>
+          </a:p>
+        </p:txBody>
+      </p:sp>
+      <p:sp>
+        <p:nvSpPr>
+          <p:cNvPr id="24" name="Rectangle 23">
+            <a:extLst>
+              <a:ext uri="{FF2B5EF4-FFF2-40B4-BE49-F238E27FC236}">
+                <a16:creationId xmlns:a16="http://schemas.microsoft.com/office/drawing/2014/main" id="{085FFF5B-EA24-30B7-5EBB-3666B6241B5D}"/>
+              </a:ext>
+            </a:extLst>
+          </p:cNvPr>
+          <p:cNvSpPr/>
+          <p:nvPr/>
+        </p:nvSpPr>
+        <p:spPr>
+          <a:xfrm>
+            <a:off x="5051836" y="462517"/>
+            <a:ext cx="2410162" cy="1640114"/>
+          </a:xfrm>
+          <a:prstGeom prst="rect">
+            <a:avLst/>
+          </a:prstGeom>
+          <a:solidFill>
+            <a:srgbClr val="5B8C8F">
+              <a:alpha val="29804"/>
+            </a:srgbClr>
+          </a:solidFill>
+          <a:ln>
+            <a:noFill/>
+          </a:ln>
+        </p:spPr>
+        <p:style>
+          <a:lnRef idx="2">
+            <a:schemeClr val="accent1">
+              <a:shade val="15000"/>
+            </a:schemeClr>
+          </a:lnRef>
+          <a:fillRef idx="1">
+            <a:schemeClr val="accent1"/>
+          </a:fillRef>
+          <a:effectRef idx="0">
+            <a:schemeClr val="accent1"/>
+          </a:effectRef>
+          <a:fontRef idx="minor">
+            <a:schemeClr val="lt1"/>
+          </a:fontRef>
+        </p:style>
+        <p:txBody>
+          <a:bodyPr lIns="45720" rIns="45720" rtlCol="0" anchor="t"/>
+          <a:lstStyle/>
+          <a:p>
+            <a:r>
+              <a:rPr lang="en-US" sz="1200" dirty="0">
+                <a:solidFill>
+                  <a:schemeClr val="tx1"/>
+                </a:solidFill>
+                <a:latin typeface="Source Sans Pro" panose="020B0503030403020204" pitchFamily="34" charset="0"/>
+                <a:ea typeface="Source Sans Pro" panose="020B0503030403020204" pitchFamily="34" charset="0"/>
+              </a:rPr>
+              <a:t>Generate artifacts for curators to look at (e.g., plots, reports) automatically with GitHub Actions</a:t>
+            </a:r>
+          </a:p>
+          <a:p>
+            <a:pPr marL="115888" indent="-115888">
+              <a:buFont typeface="Arial" panose="020B0604020202020204" pitchFamily="34" charset="0"/>
+              <a:buChar char="•"/>
+            </a:pPr>
+            <a:r>
+              <a:rPr lang="en-US" sz="1200" dirty="0">
+                <a:solidFill>
+                  <a:schemeClr val="tx1"/>
+                </a:solidFill>
+                <a:latin typeface="Source Sans Pro" panose="020B0503030403020204" pitchFamily="34" charset="0"/>
+                <a:ea typeface="Source Sans Pro" panose="020B0503030403020204" pitchFamily="34" charset="0"/>
+              </a:rPr>
+              <a:t>Biomass component producibility heatmap</a:t>
+            </a:r>
+          </a:p>
+          <a:p>
+            <a:pPr marL="115888" indent="-115888">
+              <a:buFont typeface="Arial" panose="020B0604020202020204" pitchFamily="34" charset="0"/>
+              <a:buChar char="•"/>
+            </a:pPr>
+            <a:r>
+              <a:rPr lang="en-US" sz="1200" dirty="0">
+                <a:solidFill>
+                  <a:schemeClr val="tx1"/>
+                </a:solidFill>
+                <a:latin typeface="Source Sans Pro" panose="020B0503030403020204" pitchFamily="34" charset="0"/>
+                <a:ea typeface="Source Sans Pro" panose="020B0503030403020204" pitchFamily="34" charset="0"/>
+              </a:rPr>
+              <a:t>Growth phenotypes heatmap</a:t>
+            </a:r>
+          </a:p>
+          <a:p>
+            <a:pPr marL="115888" indent="-115888">
+              <a:buFont typeface="Arial" panose="020B0604020202020204" pitchFamily="34" charset="0"/>
+              <a:buChar char="•"/>
+            </a:pPr>
+            <a:r>
+              <a:rPr lang="en-US" sz="1200" dirty="0">
+                <a:solidFill>
+                  <a:schemeClr val="tx1"/>
+                </a:solidFill>
+                <a:latin typeface="Source Sans Pro" panose="020B0503030403020204" pitchFamily="34" charset="0"/>
+                <a:ea typeface="Source Sans Pro" panose="020B0503030403020204" pitchFamily="34" charset="0"/>
+              </a:rPr>
+              <a:t>MEMOTE</a:t>
+            </a:r>
+          </a:p>
+          <a:p>
+            <a:pPr marL="115888" indent="-115888">
+              <a:buFont typeface="Arial" panose="020B0604020202020204" pitchFamily="34" charset="0"/>
+              <a:buChar char="•"/>
+            </a:pPr>
+            <a:r>
+              <a:rPr lang="en-US" sz="1200" dirty="0">
+                <a:solidFill>
+                  <a:schemeClr val="tx1"/>
+                </a:solidFill>
+                <a:latin typeface="Source Sans Pro" panose="020B0503030403020204" pitchFamily="34" charset="0"/>
+                <a:ea typeface="Source Sans Pro" panose="020B0503030403020204" pitchFamily="34" charset="0"/>
+              </a:rPr>
+              <a:t>MACAW</a:t>
+            </a:r>
+          </a:p>
+        </p:txBody>
+      </p:sp>
+      <p:sp>
+        <p:nvSpPr>
+          <p:cNvPr id="2" name="TextBox 1">
+            <a:extLst>
+              <a:ext uri="{FF2B5EF4-FFF2-40B4-BE49-F238E27FC236}">
+                <a16:creationId xmlns:a16="http://schemas.microsoft.com/office/drawing/2014/main" id="{8343265F-1D51-31A4-3F3E-AFA3696116C2}"/>
+              </a:ext>
+            </a:extLst>
+          </p:cNvPr>
+          <p:cNvSpPr txBox="1"/>
+          <p:nvPr/>
+        </p:nvSpPr>
+        <p:spPr>
+          <a:xfrm>
+            <a:off x="127626" y="4365994"/>
+            <a:ext cx="7504312" cy="276999"/>
+          </a:xfrm>
+          <a:prstGeom prst="rect">
+            <a:avLst/>
+          </a:prstGeom>
+          <a:noFill/>
+        </p:spPr>
+        <p:txBody>
+          <a:bodyPr wrap="square" rtlCol="0">
+            <a:spAutoFit/>
+          </a:bodyPr>
+          <a:lstStyle/>
+          <a:p>
+            <a:r>
+              <a:rPr lang="en-US" sz="1200" dirty="0">
+                <a:latin typeface="Source Sans Pro" panose="020B0503030403020204" pitchFamily="34" charset="0"/>
+                <a:ea typeface="Source Sans Pro" panose="020B0503030403020204" pitchFamily="34" charset="0"/>
+              </a:rPr>
+              <a:t>Fig S1: The Steps of the Continuous Curation Pipeline: Curate, test, report, release, run, and monitor. </a:t>
+            </a:r>
+          </a:p>
+        </p:txBody>
+      </p:sp>
+    </p:spTree>
+    <p:extLst>
+      <p:ext uri="{BB962C8B-B14F-4D97-AF65-F5344CB8AC3E}">
+        <p14:creationId xmlns:p14="http://schemas.microsoft.com/office/powerpoint/2010/main" val="2446217991"/>
       </p:ext>
     </p:extLst>
   </p:cSld>
